--- a/media/module4/slides.pptx
+++ b/media/module4/slides.pptx
@@ -39,6 +39,16 @@
     <p:sldId id="287" r:id="rId39"/>
     <p:sldId id="288" r:id="rId40"/>
     <p:sldId id="289" r:id="rId41"/>
+    <p:sldId id="290" r:id="rId42"/>
+    <p:sldId id="291" r:id="rId43"/>
+    <p:sldId id="292" r:id="rId44"/>
+    <p:sldId id="293" r:id="rId45"/>
+    <p:sldId id="294" r:id="rId46"/>
+    <p:sldId id="295" r:id="rId47"/>
+    <p:sldId id="296" r:id="rId48"/>
+    <p:sldId id="297" r:id="rId49"/>
+    <p:sldId id="298" r:id="rId50"/>
+    <p:sldId id="299" r:id="rId51"/>
   </p:sldIdLst>
   <p:sldSz cx="12191695" cy="6858000" type="screen4x3"/>
   <p:notesSz cx="6858000" cy="9144000"/>
@@ -535,7 +545,7 @@
           <a:lstStyle/>
           <a:p>
             <a:r>
-              <a:t>From MODULE4 Design Architecture.</a:t>
+              <a:t>From docs/MODULE4.md — read guides before running demos.</a:t>
             </a:r>
           </a:p>
         </p:txBody>
@@ -675,7 +685,7 @@
           <a:lstStyle/>
           <a:p>
             <a:r>
-              <a:t>Run from course repository root.</a:t>
+              <a:t>From MODULE4 Topics Covered.</a:t>
             </a:r>
           </a:p>
         </p:txBody>
@@ -745,7 +755,7 @@
           <a:lstStyle/>
           <a:p>
             <a:r>
-              <a:t>Hands-on: module4/examples/env_design/</a:t>
+              <a:t>From MODULE4 Topics Covered.</a:t>
             </a:r>
           </a:p>
         </p:txBody>
@@ -815,7 +825,7 @@
           <a:lstStyle/>
           <a:p>
             <a:r>
-              <a:t>Hands-on: module4/examples/checker_plan/</a:t>
+              <a:t>From MODULE4 Topics Covered.</a:t>
             </a:r>
           </a:p>
         </p:txBody>
@@ -885,7 +895,7 @@
           <a:lstStyle/>
           <a:p>
             <a:r>
-              <a:t>Hands-on: module4/examples/module_tb/</a:t>
+              <a:t>From MODULE4 Topics Covered.</a:t>
             </a:r>
           </a:p>
         </p:txBody>
@@ -955,7 +965,7 @@
           <a:lstStyle/>
           <a:p>
             <a:r>
-              <a:t>Hands-on: module4/examples/solutions/</a:t>
+              <a:t>Full detail in docs/MODULE4.md command reference.</a:t>
             </a:r>
           </a:p>
         </p:txBody>
@@ -1025,7 +1035,7 @@
           <a:lstStyle/>
           <a:p>
             <a:r>
-              <a:t>Hands-on: module4/examples/validate/</a:t>
+              <a:t>Full detail in docs/MODULE4.md command reference.</a:t>
             </a:r>
           </a:p>
         </p:txBody>
@@ -1095,7 +1105,7 @@
           <a:lstStyle/>
           <a:p>
             <a:r>
-              <a:t>From MODULE4 Learning Outcomes.</a:t>
+              <a:t>Run from course repository root.</a:t>
             </a:r>
           </a:p>
         </p:txBody>
@@ -1165,7 +1175,77 @@
           <a:lstStyle/>
           <a:p>
             <a:r>
-              <a:t>From MODULE4 Learning Outcomes.</a:t>
+              <a:t>Hands-on: module4/examples/env_design/</a:t>
+            </a:r>
+          </a:p>
+        </p:txBody>
+      </p:sp>
+      <p:sp>
+        <p:nvSpPr>
+          <p:cNvPr id="4" name="Slide Number Placeholder 3"/>
+          <p:cNvSpPr>
+            <a:spLocks noGrp="1"/>
+          </p:cNvSpPr>
+          <p:nvPr>
+            <p:ph type="sldNum" idx="5" sz="quarter"/>
+          </p:nvPr>
+        </p:nvSpPr>
+        <p:spPr/>
+      </p:sp>
+    </p:spTree>
+  </p:cSld>
+  <p:clrMapOvr>
+    <a:masterClrMapping/>
+  </p:clrMapOvr>
+</p:notes>
+</file>
+
+<file path=ppt/notesSlides/notesSlide19.xml><?xml version="1.0" encoding="utf-8"?>
+<p:notes xmlns:a="http://schemas.openxmlformats.org/drawingml/2006/main" xmlns:p="http://schemas.openxmlformats.org/presentationml/2006/main" xmlns:r="http://schemas.openxmlformats.org/officeDocument/2006/relationships">
+  <p:cSld>
+    <p:spTree>
+      <p:nvGrpSpPr>
+        <p:cNvPr id="1" name=""/>
+        <p:cNvGrpSpPr/>
+        <p:nvPr/>
+      </p:nvGrpSpPr>
+      <p:grpSpPr>
+        <a:xfrm>
+          <a:off x="0" y="0"/>
+          <a:ext cx="0" cy="0"/>
+          <a:chOff x="0" y="0"/>
+          <a:chExt cx="0" cy="0"/>
+        </a:xfrm>
+      </p:grpSpPr>
+      <p:sp>
+        <p:nvSpPr>
+          <p:cNvPr id="2" name="Slide Image Placeholder 1"/>
+          <p:cNvSpPr>
+            <a:spLocks noGrp="1"/>
+          </p:cNvSpPr>
+          <p:nvPr>
+            <p:ph type="sldImg" idx="2"/>
+          </p:nvPr>
+        </p:nvSpPr>
+        <p:spPr/>
+      </p:sp>
+      <p:sp>
+        <p:nvSpPr>
+          <p:cNvPr id="3" name="Notes Placeholder 2"/>
+          <p:cNvSpPr>
+            <a:spLocks noGrp="1"/>
+          </p:cNvSpPr>
+          <p:nvPr>
+            <p:ph type="body" idx="3" sz="quarter"/>
+          </p:nvPr>
+        </p:nvSpPr>
+        <p:spPr/>
+        <p:txBody>
+          <a:bodyPr/>
+          <a:lstStyle/>
+          <a:p>
+            <a:r>
+              <a:t>Hands-on: module4/examples/checker_plan/</a:t>
             </a:r>
           </a:p>
         </p:txBody>
@@ -1235,7 +1315,357 @@
           <a:lstStyle/>
           <a:p>
             <a:r>
-              <a:t>From MODULE4 Design Architecture.</a:t>
+              <a:t>From docs/MODULE4.md — read guides before running demos.</a:t>
+            </a:r>
+          </a:p>
+        </p:txBody>
+      </p:sp>
+      <p:sp>
+        <p:nvSpPr>
+          <p:cNvPr id="4" name="Slide Number Placeholder 3"/>
+          <p:cNvSpPr>
+            <a:spLocks noGrp="1"/>
+          </p:cNvSpPr>
+          <p:nvPr>
+            <p:ph type="sldNum" idx="5" sz="quarter"/>
+          </p:nvPr>
+        </p:nvSpPr>
+        <p:spPr/>
+      </p:sp>
+    </p:spTree>
+  </p:cSld>
+  <p:clrMapOvr>
+    <a:masterClrMapping/>
+  </p:clrMapOvr>
+</p:notes>
+</file>
+
+<file path=ppt/notesSlides/notesSlide20.xml><?xml version="1.0" encoding="utf-8"?>
+<p:notes xmlns:a="http://schemas.openxmlformats.org/drawingml/2006/main" xmlns:p="http://schemas.openxmlformats.org/presentationml/2006/main" xmlns:r="http://schemas.openxmlformats.org/officeDocument/2006/relationships">
+  <p:cSld>
+    <p:spTree>
+      <p:nvGrpSpPr>
+        <p:cNvPr id="1" name=""/>
+        <p:cNvGrpSpPr/>
+        <p:nvPr/>
+      </p:nvGrpSpPr>
+      <p:grpSpPr>
+        <a:xfrm>
+          <a:off x="0" y="0"/>
+          <a:ext cx="0" cy="0"/>
+          <a:chOff x="0" y="0"/>
+          <a:chExt cx="0" cy="0"/>
+        </a:xfrm>
+      </p:grpSpPr>
+      <p:sp>
+        <p:nvSpPr>
+          <p:cNvPr id="2" name="Slide Image Placeholder 1"/>
+          <p:cNvSpPr>
+            <a:spLocks noGrp="1"/>
+          </p:cNvSpPr>
+          <p:nvPr>
+            <p:ph type="sldImg" idx="2"/>
+          </p:nvPr>
+        </p:nvSpPr>
+        <p:spPr/>
+      </p:sp>
+      <p:sp>
+        <p:nvSpPr>
+          <p:cNvPr id="3" name="Notes Placeholder 2"/>
+          <p:cNvSpPr>
+            <a:spLocks noGrp="1"/>
+          </p:cNvSpPr>
+          <p:nvPr>
+            <p:ph type="body" idx="3" sz="quarter"/>
+          </p:nvPr>
+        </p:nvSpPr>
+        <p:spPr/>
+        <p:txBody>
+          <a:bodyPr/>
+          <a:lstStyle/>
+          <a:p>
+            <a:r>
+              <a:t>Hands-on: module4/examples/module_tb/</a:t>
+            </a:r>
+          </a:p>
+        </p:txBody>
+      </p:sp>
+      <p:sp>
+        <p:nvSpPr>
+          <p:cNvPr id="4" name="Slide Number Placeholder 3"/>
+          <p:cNvSpPr>
+            <a:spLocks noGrp="1"/>
+          </p:cNvSpPr>
+          <p:nvPr>
+            <p:ph type="sldNum" idx="5" sz="quarter"/>
+          </p:nvPr>
+        </p:nvSpPr>
+        <p:spPr/>
+      </p:sp>
+    </p:spTree>
+  </p:cSld>
+  <p:clrMapOvr>
+    <a:masterClrMapping/>
+  </p:clrMapOvr>
+</p:notes>
+</file>
+
+<file path=ppt/notesSlides/notesSlide21.xml><?xml version="1.0" encoding="utf-8"?>
+<p:notes xmlns:a="http://schemas.openxmlformats.org/drawingml/2006/main" xmlns:p="http://schemas.openxmlformats.org/presentationml/2006/main" xmlns:r="http://schemas.openxmlformats.org/officeDocument/2006/relationships">
+  <p:cSld>
+    <p:spTree>
+      <p:nvGrpSpPr>
+        <p:cNvPr id="1" name=""/>
+        <p:cNvGrpSpPr/>
+        <p:nvPr/>
+      </p:nvGrpSpPr>
+      <p:grpSpPr>
+        <a:xfrm>
+          <a:off x="0" y="0"/>
+          <a:ext cx="0" cy="0"/>
+          <a:chOff x="0" y="0"/>
+          <a:chExt cx="0" cy="0"/>
+        </a:xfrm>
+      </p:grpSpPr>
+      <p:sp>
+        <p:nvSpPr>
+          <p:cNvPr id="2" name="Slide Image Placeholder 1"/>
+          <p:cNvSpPr>
+            <a:spLocks noGrp="1"/>
+          </p:cNvSpPr>
+          <p:nvPr>
+            <p:ph type="sldImg" idx="2"/>
+          </p:nvPr>
+        </p:nvSpPr>
+        <p:spPr/>
+      </p:sp>
+      <p:sp>
+        <p:nvSpPr>
+          <p:cNvPr id="3" name="Notes Placeholder 2"/>
+          <p:cNvSpPr>
+            <a:spLocks noGrp="1"/>
+          </p:cNvSpPr>
+          <p:nvPr>
+            <p:ph type="body" idx="3" sz="quarter"/>
+          </p:nvPr>
+        </p:nvSpPr>
+        <p:spPr/>
+        <p:txBody>
+          <a:bodyPr/>
+          <a:lstStyle/>
+          <a:p>
+            <a:r>
+              <a:t>Hands-on: module4/examples/solutions/</a:t>
+            </a:r>
+          </a:p>
+        </p:txBody>
+      </p:sp>
+      <p:sp>
+        <p:nvSpPr>
+          <p:cNvPr id="4" name="Slide Number Placeholder 3"/>
+          <p:cNvSpPr>
+            <a:spLocks noGrp="1"/>
+          </p:cNvSpPr>
+          <p:nvPr>
+            <p:ph type="sldNum" idx="5" sz="quarter"/>
+          </p:nvPr>
+        </p:nvSpPr>
+        <p:spPr/>
+      </p:sp>
+    </p:spTree>
+  </p:cSld>
+  <p:clrMapOvr>
+    <a:masterClrMapping/>
+  </p:clrMapOvr>
+</p:notes>
+</file>
+
+<file path=ppt/notesSlides/notesSlide22.xml><?xml version="1.0" encoding="utf-8"?>
+<p:notes xmlns:a="http://schemas.openxmlformats.org/drawingml/2006/main" xmlns:p="http://schemas.openxmlformats.org/presentationml/2006/main" xmlns:r="http://schemas.openxmlformats.org/officeDocument/2006/relationships">
+  <p:cSld>
+    <p:spTree>
+      <p:nvGrpSpPr>
+        <p:cNvPr id="1" name=""/>
+        <p:cNvGrpSpPr/>
+        <p:nvPr/>
+      </p:nvGrpSpPr>
+      <p:grpSpPr>
+        <a:xfrm>
+          <a:off x="0" y="0"/>
+          <a:ext cx="0" cy="0"/>
+          <a:chOff x="0" y="0"/>
+          <a:chExt cx="0" cy="0"/>
+        </a:xfrm>
+      </p:grpSpPr>
+      <p:sp>
+        <p:nvSpPr>
+          <p:cNvPr id="2" name="Slide Image Placeholder 1"/>
+          <p:cNvSpPr>
+            <a:spLocks noGrp="1"/>
+          </p:cNvSpPr>
+          <p:nvPr>
+            <p:ph type="sldImg" idx="2"/>
+          </p:nvPr>
+        </p:nvSpPr>
+        <p:spPr/>
+      </p:sp>
+      <p:sp>
+        <p:nvSpPr>
+          <p:cNvPr id="3" name="Notes Placeholder 2"/>
+          <p:cNvSpPr>
+            <a:spLocks noGrp="1"/>
+          </p:cNvSpPr>
+          <p:nvPr>
+            <p:ph type="body" idx="3" sz="quarter"/>
+          </p:nvPr>
+        </p:nvSpPr>
+        <p:spPr/>
+        <p:txBody>
+          <a:bodyPr/>
+          <a:lstStyle/>
+          <a:p>
+            <a:r>
+              <a:t>Hands-on: module4/examples/validate/</a:t>
+            </a:r>
+          </a:p>
+        </p:txBody>
+      </p:sp>
+      <p:sp>
+        <p:nvSpPr>
+          <p:cNvPr id="4" name="Slide Number Placeholder 3"/>
+          <p:cNvSpPr>
+            <a:spLocks noGrp="1"/>
+          </p:cNvSpPr>
+          <p:nvPr>
+            <p:ph type="sldNum" idx="5" sz="quarter"/>
+          </p:nvPr>
+        </p:nvSpPr>
+        <p:spPr/>
+      </p:sp>
+    </p:spTree>
+  </p:cSld>
+  <p:clrMapOvr>
+    <a:masterClrMapping/>
+  </p:clrMapOvr>
+</p:notes>
+</file>
+
+<file path=ppt/notesSlides/notesSlide23.xml><?xml version="1.0" encoding="utf-8"?>
+<p:notes xmlns:a="http://schemas.openxmlformats.org/drawingml/2006/main" xmlns:p="http://schemas.openxmlformats.org/presentationml/2006/main" xmlns:r="http://schemas.openxmlformats.org/officeDocument/2006/relationships">
+  <p:cSld>
+    <p:spTree>
+      <p:nvGrpSpPr>
+        <p:cNvPr id="1" name=""/>
+        <p:cNvGrpSpPr/>
+        <p:nvPr/>
+      </p:nvGrpSpPr>
+      <p:grpSpPr>
+        <a:xfrm>
+          <a:off x="0" y="0"/>
+          <a:ext cx="0" cy="0"/>
+          <a:chOff x="0" y="0"/>
+          <a:chExt cx="0" cy="0"/>
+        </a:xfrm>
+      </p:grpSpPr>
+      <p:sp>
+        <p:nvSpPr>
+          <p:cNvPr id="2" name="Slide Image Placeholder 1"/>
+          <p:cNvSpPr>
+            <a:spLocks noGrp="1"/>
+          </p:cNvSpPr>
+          <p:nvPr>
+            <p:ph type="sldImg" idx="2"/>
+          </p:nvPr>
+        </p:nvSpPr>
+        <p:spPr/>
+      </p:sp>
+      <p:sp>
+        <p:nvSpPr>
+          <p:cNvPr id="3" name="Notes Placeholder 2"/>
+          <p:cNvSpPr>
+            <a:spLocks noGrp="1"/>
+          </p:cNvSpPr>
+          <p:nvPr>
+            <p:ph type="body" idx="3" sz="quarter"/>
+          </p:nvPr>
+        </p:nvSpPr>
+        <p:spPr/>
+        <p:txBody>
+          <a:bodyPr/>
+          <a:lstStyle/>
+          <a:p>
+            <a:r>
+              <a:t>From MODULE4 Learning Outcomes.</a:t>
+            </a:r>
+          </a:p>
+        </p:txBody>
+      </p:sp>
+      <p:sp>
+        <p:nvSpPr>
+          <p:cNvPr id="4" name="Slide Number Placeholder 3"/>
+          <p:cNvSpPr>
+            <a:spLocks noGrp="1"/>
+          </p:cNvSpPr>
+          <p:nvPr>
+            <p:ph type="sldNum" idx="5" sz="quarter"/>
+          </p:nvPr>
+        </p:nvSpPr>
+        <p:spPr/>
+      </p:sp>
+    </p:spTree>
+  </p:cSld>
+  <p:clrMapOvr>
+    <a:masterClrMapping/>
+  </p:clrMapOvr>
+</p:notes>
+</file>
+
+<file path=ppt/notesSlides/notesSlide24.xml><?xml version="1.0" encoding="utf-8"?>
+<p:notes xmlns:a="http://schemas.openxmlformats.org/drawingml/2006/main" xmlns:p="http://schemas.openxmlformats.org/presentationml/2006/main" xmlns:r="http://schemas.openxmlformats.org/officeDocument/2006/relationships">
+  <p:cSld>
+    <p:spTree>
+      <p:nvGrpSpPr>
+        <p:cNvPr id="1" name=""/>
+        <p:cNvGrpSpPr/>
+        <p:nvPr/>
+      </p:nvGrpSpPr>
+      <p:grpSpPr>
+        <a:xfrm>
+          <a:off x="0" y="0"/>
+          <a:ext cx="0" cy="0"/>
+          <a:chOff x="0" y="0"/>
+          <a:chExt cx="0" cy="0"/>
+        </a:xfrm>
+      </p:grpSpPr>
+      <p:sp>
+        <p:nvSpPr>
+          <p:cNvPr id="2" name="Slide Image Placeholder 1"/>
+          <p:cNvSpPr>
+            <a:spLocks noGrp="1"/>
+          </p:cNvSpPr>
+          <p:nvPr>
+            <p:ph type="sldImg" idx="2"/>
+          </p:nvPr>
+        </p:nvSpPr>
+        <p:spPr/>
+      </p:sp>
+      <p:sp>
+        <p:nvSpPr>
+          <p:cNvPr id="3" name="Notes Placeholder 2"/>
+          <p:cNvSpPr>
+            <a:spLocks noGrp="1"/>
+          </p:cNvSpPr>
+          <p:nvPr>
+            <p:ph type="body" idx="3" sz="quarter"/>
+          </p:nvPr>
+        </p:nvSpPr>
+        <p:spPr/>
+        <p:txBody>
+          <a:bodyPr/>
+          <a:lstStyle/>
+          <a:p>
+            <a:r>
+              <a:t>From MODULE4 Learning Outcomes.</a:t>
             </a:r>
           </a:p>
         </p:txBody>
@@ -1305,7 +1735,7 @@
           <a:lstStyle/>
           <a:p>
             <a:r>
-              <a:t>From MODULE4 Verification &amp; Testing Methods.</a:t>
+              <a:t>From MODULE4 Design Architecture.</a:t>
             </a:r>
           </a:p>
         </p:txBody>
@@ -1375,7 +1805,7 @@
           <a:lstStyle/>
           <a:p>
             <a:r>
-              <a:t>From MODULE4 Verification &amp; Testing Methods.</a:t>
+              <a:t>From MODULE4 Design Architecture.</a:t>
             </a:r>
           </a:p>
         </p:txBody>
@@ -1445,7 +1875,7 @@
           <a:lstStyle/>
           <a:p>
             <a:r>
-              <a:t>From MODULE4 Verification &amp; Testing Methods.</a:t>
+              <a:t>From MODULE4 Design Architecture.</a:t>
             </a:r>
           </a:p>
         </p:txBody>
@@ -1515,7 +1945,7 @@
           <a:lstStyle/>
           <a:p>
             <a:r>
-              <a:t>From MODULE4 Topics Covered.</a:t>
+              <a:t>Trace while running module4/EXAMPLES.md labs.</a:t>
             </a:r>
           </a:p>
         </p:txBody>
@@ -1585,7 +2015,7 @@
           <a:lstStyle/>
           <a:p>
             <a:r>
-              <a:t>From MODULE4 Topics Covered.</a:t>
+              <a:t>From MODULE4 Verification &amp; Testing Methods.</a:t>
             </a:r>
           </a:p>
         </p:txBody>
@@ -1655,7 +2085,7 @@
           <a:lstStyle/>
           <a:p>
             <a:r>
-              <a:t>From MODULE4 Topics Covered.</a:t>
+              <a:t>From MODULE4 Verification &amp; Testing Methods.</a:t>
             </a:r>
           </a:p>
         </p:txBody>
@@ -1725,7 +2155,7 @@
           <a:lstStyle/>
           <a:p>
             <a:r>
-              <a:t>From MODULE4 Topics Covered.</a:t>
+              <a:t>From MODULE4 Verification &amp; Testing Methods.</a:t>
             </a:r>
           </a:p>
         </p:txBody>
@@ -4883,7 +5313,7 @@
               </a:defRPr>
             </a:pPr>
             <a:r>
-              <a:t>stream_env — build &amp; connect</a:t>
+              <a:t>1. Mature UVM environment (stream_fifo)</a:t>
             </a:r>
           </a:p>
         </p:txBody>
@@ -4896,15 +5326,13 @@
         </p:nvSpPr>
         <p:spPr>
           <a:xfrm>
-            <a:off x="548640" y="1143000"/>
-            <a:ext cx="11064240" cy="5029200"/>
+            <a:off x="548640" y="1234440"/>
+            <a:ext cx="5303520" cy="4754880"/>
           </a:xfrm>
           <a:prstGeom prst="rect">
             <a:avLst/>
           </a:prstGeom>
-          <a:solidFill>
-            <a:srgbClr val="F4F4F4"/>
-          </a:solidFill>
+          <a:noFill/>
         </p:spPr>
         <p:txBody>
           <a:bodyPr wrap="square">
@@ -4917,316 +5345,295 @@
                 <a:spcPts val="2200"/>
               </a:lnSpc>
               <a:spcAft>
-                <a:spcPts val="400"/>
-              </a:spcAft>
-              <a:defRPr sz="2000" b="0">
-                <a:solidFill>
-                  <a:srgbClr val="333333"/>
-                </a:solidFill>
-                <a:latin typeface="Consolas"/>
-              </a:defRPr>
-            </a:pPr>
-            <a:r>
-              <a:t>class stream_env extends uvm_env;</a:t>
-            </a:r>
-          </a:p>
-          <a:p>
-            <a:pPr>
-              <a:lnSpc>
-                <a:spcPts val="2200"/>
-              </a:lnSpc>
-              <a:spcAft>
-                <a:spcPts val="400"/>
-              </a:spcAft>
-              <a:defRPr sz="2000" b="0">
-                <a:solidFill>
-                  <a:srgbClr val="333333"/>
-                </a:solidFill>
-                <a:latin typeface="Consolas"/>
-              </a:defRPr>
-            </a:pPr>
-          </a:p>
-          <a:p>
-            <a:pPr>
-              <a:lnSpc>
-                <a:spcPts val="2200"/>
-              </a:lnSpc>
-              <a:spcAft>
-                <a:spcPts val="400"/>
-              </a:spcAft>
-              <a:defRPr sz="2000" b="0">
-                <a:solidFill>
-                  <a:srgbClr val="333333"/>
-                </a:solidFill>
-                <a:latin typeface="Consolas"/>
-              </a:defRPr>
-            </a:pPr>
-            <a:r>
-              <a:t>  `uvm_component_utils(stream_env)</a:t>
-            </a:r>
-          </a:p>
-          <a:p>
-            <a:pPr>
-              <a:lnSpc>
-                <a:spcPts val="2200"/>
-              </a:lnSpc>
-              <a:spcAft>
-                <a:spcPts val="400"/>
-              </a:spcAft>
-              <a:defRPr sz="2000" b="0">
-                <a:solidFill>
-                  <a:srgbClr val="333333"/>
-                </a:solidFill>
-                <a:latin typeface="Consolas"/>
-              </a:defRPr>
-            </a:pPr>
-          </a:p>
-          <a:p>
-            <a:pPr>
-              <a:lnSpc>
-                <a:spcPts val="2200"/>
-              </a:lnSpc>
-              <a:spcAft>
-                <a:spcPts val="400"/>
-              </a:spcAft>
-              <a:defRPr sz="2000" b="0">
-                <a:solidFill>
-                  <a:srgbClr val="333333"/>
-                </a:solidFill>
-                <a:latin typeface="Consolas"/>
-              </a:defRPr>
-            </a:pPr>
-            <a:r>
-              <a:t>  stream_driver     drv;</a:t>
-            </a:r>
-          </a:p>
-          <a:p>
-            <a:pPr>
-              <a:lnSpc>
-                <a:spcPts val="2200"/>
-              </a:lnSpc>
-              <a:spcAft>
-                <a:spcPts val="400"/>
-              </a:spcAft>
-              <a:defRPr sz="2000" b="0">
-                <a:solidFill>
-                  <a:srgbClr val="333333"/>
-                </a:solidFill>
-                <a:latin typeface="Consolas"/>
-              </a:defRPr>
-            </a:pPr>
-            <a:r>
-              <a:t>  stream_monitor    mon;</a:t>
-            </a:r>
-          </a:p>
-          <a:p>
-            <a:pPr>
-              <a:lnSpc>
-                <a:spcPts val="2200"/>
-              </a:lnSpc>
-              <a:spcAft>
-                <a:spcPts val="400"/>
-              </a:spcAft>
-              <a:defRPr sz="2000" b="0">
-                <a:solidFill>
-                  <a:srgbClr val="333333"/>
-                </a:solidFill>
-                <a:latin typeface="Consolas"/>
-              </a:defRPr>
-            </a:pPr>
-            <a:r>
-              <a:t>  stream_scoreboard sb;</a:t>
-            </a:r>
-          </a:p>
-          <a:p>
-            <a:pPr>
-              <a:lnSpc>
-                <a:spcPts val="2200"/>
-              </a:lnSpc>
-              <a:spcAft>
-                <a:spcPts val="400"/>
-              </a:spcAft>
-              <a:defRPr sz="2000" b="0">
-                <a:solidFill>
-                  <a:srgbClr val="333333"/>
-                </a:solidFill>
-                <a:latin typeface="Consolas"/>
-              </a:defRPr>
-            </a:pPr>
-          </a:p>
-          <a:p>
-            <a:pPr>
-              <a:lnSpc>
-                <a:spcPts val="2200"/>
-              </a:lnSpc>
-              <a:spcAft>
-                <a:spcPts val="400"/>
-              </a:spcAft>
-              <a:defRPr sz="2000" b="0">
-                <a:solidFill>
-                  <a:srgbClr val="333333"/>
-                </a:solidFill>
-                <a:latin typeface="Consolas"/>
-              </a:defRPr>
-            </a:pPr>
-            <a:r>
-              <a:t>  function new(string name, uvm_component parent);</a:t>
-            </a:r>
-          </a:p>
-          <a:p>
-            <a:pPr>
-              <a:lnSpc>
-                <a:spcPts val="2200"/>
-              </a:lnSpc>
-              <a:spcAft>
-                <a:spcPts val="400"/>
-              </a:spcAft>
-              <a:defRPr sz="2000" b="0">
-                <a:solidFill>
-                  <a:srgbClr val="333333"/>
-                </a:solidFill>
-                <a:latin typeface="Consolas"/>
-              </a:defRPr>
-            </a:pPr>
-            <a:r>
-              <a:t>    super.new(name, parent);</a:t>
-            </a:r>
-          </a:p>
-          <a:p>
-            <a:pPr>
-              <a:lnSpc>
-                <a:spcPts val="2200"/>
-              </a:lnSpc>
-              <a:spcAft>
-                <a:spcPts val="400"/>
-              </a:spcAft>
-              <a:defRPr sz="2000" b="0">
-                <a:solidFill>
-                  <a:srgbClr val="333333"/>
-                </a:solidFill>
-                <a:latin typeface="Consolas"/>
-              </a:defRPr>
-            </a:pPr>
-            <a:r>
-              <a:t>  endfunction</a:t>
-            </a:r>
-          </a:p>
-          <a:p>
-            <a:pPr>
-              <a:lnSpc>
-                <a:spcPts val="2200"/>
-              </a:lnSpc>
-              <a:spcAft>
-                <a:spcPts val="400"/>
-              </a:spcAft>
-              <a:defRPr sz="2000" b="0">
-                <a:solidFill>
-                  <a:srgbClr val="333333"/>
-                </a:solidFill>
-                <a:latin typeface="Consolas"/>
-              </a:defRPr>
-            </a:pPr>
-          </a:p>
-          <a:p>
-            <a:pPr>
-              <a:lnSpc>
-                <a:spcPts val="2200"/>
-              </a:lnSpc>
-              <a:spcAft>
-                <a:spcPts val="400"/>
-              </a:spcAft>
-              <a:defRPr sz="2000" b="0">
-                <a:solidFill>
-                  <a:srgbClr val="333333"/>
-                </a:solidFill>
-                <a:latin typeface="Consolas"/>
-              </a:defRPr>
-            </a:pPr>
-            <a:r>
-              <a:t>  function void build_phase(uvm_phase phase);</a:t>
-            </a:r>
-          </a:p>
-          <a:p>
-            <a:pPr>
-              <a:lnSpc>
-                <a:spcPts val="2200"/>
-              </a:lnSpc>
-              <a:spcAft>
-                <a:spcPts val="400"/>
-              </a:spcAft>
-              <a:defRPr sz="2000" b="0">
-                <a:solidFill>
-                  <a:srgbClr val="333333"/>
-                </a:solidFill>
-                <a:latin typeface="Consolas"/>
-              </a:defRPr>
-            </a:pPr>
-            <a:r>
-              <a:t>    super.build_phase(phase);</a:t>
-            </a:r>
-          </a:p>
-          <a:p>
-            <a:pPr>
-              <a:lnSpc>
-                <a:spcPts val="2200"/>
-              </a:lnSpc>
-              <a:spcAft>
-                <a:spcPts val="400"/>
-              </a:spcAft>
-              <a:defRPr sz="2000" b="0">
-                <a:solidFill>
-                  <a:srgbClr val="333333"/>
-                </a:solidFill>
-                <a:latin typeface="Consolas"/>
-              </a:defRPr>
-            </a:pPr>
-            <a:r>
-              <a:t>    drv = stream_driver    ::type_id::create("drv", this);</a:t>
-            </a:r>
-          </a:p>
-          <a:p>
-            <a:pPr>
-              <a:lnSpc>
-                <a:spcPts val="2200"/>
-              </a:lnSpc>
-              <a:spcAft>
-                <a:spcPts val="400"/>
-              </a:spcAft>
-              <a:defRPr sz="2000" b="0">
-                <a:solidFill>
-                  <a:srgbClr val="333333"/>
-                </a:solidFill>
-                <a:latin typeface="Consolas"/>
-              </a:defRPr>
-            </a:pPr>
-            <a:r>
-              <a:t>    mon = stream_monitor   ::type_id::create("mon", this);</a:t>
-            </a:r>
-          </a:p>
-          <a:p>
-            <a:pPr>
-              <a:lnSpc>
-                <a:spcPts val="2200"/>
-              </a:lnSpc>
-              <a:spcAft>
-                <a:spcPts val="400"/>
-              </a:spcAft>
-              <a:defRPr sz="2000" b="0">
-                <a:solidFill>
-                  <a:srgbClr val="333333"/>
-                </a:solidFill>
-                <a:latin typeface="Consolas"/>
-              </a:defRPr>
-            </a:pPr>
-            <a:r>
-              <a:t># ...</a:t>
-            </a:r>
-          </a:p>
-        </p:txBody>
-      </p:sp>
-      <p:sp>
-        <p:nvSpPr>
-          <p:cNvPr id="4" name="TextBox 3"/>
+                <a:spcPts val="1000"/>
+              </a:spcAft>
+              <a:defRPr sz="2000" b="0">
+                <a:solidFill>
+                  <a:srgbClr val="333333"/>
+                </a:solidFill>
+                <a:latin typeface="Calibri"/>
+              </a:defRPr>
+            </a:pPr>
+            <a:r>
+              <a:t>• Env (`stream_fifo_env`):</a:t>
+            </a:r>
+          </a:p>
+          <a:p>
+            <a:pPr>
+              <a:lnSpc>
+                <a:spcPts val="2200"/>
+              </a:lnSpc>
+              <a:spcAft>
+                <a:spcPts val="1000"/>
+              </a:spcAft>
+              <a:defRPr sz="2000" b="0">
+                <a:solidFill>
+                  <a:srgbClr val="333333"/>
+                </a:solidFill>
+                <a:latin typeface="Calibri"/>
+              </a:defRPr>
+            </a:pPr>
+            <a:r>
+              <a:t>      connects source/sink agents,</a:t>
+            </a:r>
+          </a:p>
+          <a:p>
+            <a:pPr>
+              <a:lnSpc>
+                <a:spcPts val="2200"/>
+              </a:lnSpc>
+              <a:spcAft>
+                <a:spcPts val="1000"/>
+              </a:spcAft>
+              <a:defRPr sz="2000" b="0">
+                <a:solidFill>
+                  <a:srgbClr val="333333"/>
+                </a:solidFill>
+                <a:latin typeface="Calibri"/>
+              </a:defRPr>
+            </a:pPr>
+            <a:r>
+              <a:t>      scoreboard, coverage</a:t>
+            </a:r>
+          </a:p>
+          <a:p>
+            <a:pPr>
+              <a:lnSpc>
+                <a:spcPts val="2200"/>
+              </a:lnSpc>
+              <a:spcAft>
+                <a:spcPts val="1000"/>
+              </a:spcAft>
+              <a:defRPr sz="2000" b="0">
+                <a:solidFill>
+                  <a:srgbClr val="333333"/>
+                </a:solidFill>
+                <a:latin typeface="Calibri"/>
+              </a:defRPr>
+            </a:pPr>
+            <a:r>
+              <a:t>      subscribers.</a:t>
+            </a:r>
+          </a:p>
+          <a:p>
+            <a:pPr>
+              <a:lnSpc>
+                <a:spcPts val="2200"/>
+              </a:lnSpc>
+              <a:spcAft>
+                <a:spcPts val="1000"/>
+              </a:spcAft>
+              <a:defRPr sz="2000" b="0">
+                <a:solidFill>
+                  <a:srgbClr val="333333"/>
+                </a:solidFill>
+                <a:latin typeface="Calibri"/>
+              </a:defRPr>
+            </a:pPr>
+            <a:r>
+              <a:t>• Agents: driver + sequencer +</a:t>
+            </a:r>
+          </a:p>
+          <a:p>
+            <a:pPr>
+              <a:lnSpc>
+                <a:spcPts val="2200"/>
+              </a:lnSpc>
+              <a:spcAft>
+                <a:spcPts val="1000"/>
+              </a:spcAft>
+              <a:defRPr sz="2000" b="0">
+                <a:solidFill>
+                  <a:srgbClr val="333333"/>
+                </a:solidFill>
+                <a:latin typeface="Calibri"/>
+              </a:defRPr>
+            </a:pPr>
+            <a:r>
+              <a:t>      monitor per interface; active vs</a:t>
+            </a:r>
+          </a:p>
+          <a:p>
+            <a:pPr>
+              <a:lnSpc>
+                <a:spcPts val="2200"/>
+              </a:lnSpc>
+              <a:spcAft>
+                <a:spcPts val="1000"/>
+              </a:spcAft>
+              <a:defRPr sz="2000" b="0">
+                <a:solidFill>
+                  <a:srgbClr val="333333"/>
+                </a:solidFill>
+                <a:latin typeface="Calibri"/>
+              </a:defRPr>
+            </a:pPr>
+            <a:r>
+              <a:t>      passive roles documented in</a:t>
+            </a:r>
+          </a:p>
+          <a:p>
+            <a:pPr>
+              <a:lnSpc>
+                <a:spcPts val="2200"/>
+              </a:lnSpc>
+              <a:spcAft>
+                <a:spcPts val="1000"/>
+              </a:spcAft>
+              <a:defRPr sz="2000" b="0">
+                <a:solidFill>
+                  <a:srgbClr val="333333"/>
+                </a:solidFill>
+                <a:latin typeface="Calibri"/>
+              </a:defRPr>
+            </a:pPr>
+            <a:r>
+              <a:t>      `ENV_DESI…</a:t>
+            </a:r>
+          </a:p>
+          <a:p>
+            <a:pPr>
+              <a:lnSpc>
+                <a:spcPts val="2200"/>
+              </a:lnSpc>
+              <a:spcAft>
+                <a:spcPts val="1000"/>
+              </a:spcAft>
+              <a:defRPr sz="2000" b="0">
+                <a:solidFill>
+                  <a:srgbClr val="333333"/>
+                </a:solidFill>
+                <a:latin typeface="Calibri"/>
+              </a:defRPr>
+            </a:pPr>
+            <a:r>
+              <a:t>• Transactions: item fields mirror</a:t>
+            </a:r>
+          </a:p>
+          <a:p>
+            <a:pPr>
+              <a:lnSpc>
+                <a:spcPts val="2200"/>
+              </a:lnSpc>
+              <a:spcAft>
+                <a:spcPts val="1000"/>
+              </a:spcAft>
+              <a:defRPr sz="2000" b="0">
+                <a:solidFill>
+                  <a:srgbClr val="333333"/>
+                </a:solidFill>
+                <a:latin typeface="Calibri"/>
+              </a:defRPr>
+            </a:pPr>
+            <a:r>
+              <a:t>      DUT handshake semantics (data,</a:t>
+            </a:r>
+          </a:p>
+          <a:p>
+            <a:pPr>
+              <a:lnSpc>
+                <a:spcPts val="2200"/>
+              </a:lnSpc>
+              <a:spcAft>
+                <a:spcPts val="1000"/>
+              </a:spcAft>
+              <a:defRPr sz="2000" b="0">
+                <a:solidFill>
+                  <a:srgbClr val="333333"/>
+                </a:solidFill>
+                <a:latin typeface="Calibri"/>
+              </a:defRPr>
+            </a:pPr>
+            <a:r>
+              <a:t>      valid/ready timing).</a:t>
+            </a:r>
+          </a:p>
+          <a:p>
+            <a:pPr>
+              <a:lnSpc>
+                <a:spcPts val="2200"/>
+              </a:lnSpc>
+              <a:spcAft>
+                <a:spcPts val="1000"/>
+              </a:spcAft>
+              <a:defRPr sz="2000" b="0">
+                <a:solidFill>
+                  <a:srgbClr val="333333"/>
+                </a:solidFill>
+                <a:latin typeface="Calibri"/>
+              </a:defRPr>
+            </a:pPr>
+            <a:r>
+              <a:t>• Reference implementation sketch:</a:t>
+            </a:r>
+          </a:p>
+          <a:p>
+            <a:pPr>
+              <a:lnSpc>
+                <a:spcPts val="2200"/>
+              </a:lnSpc>
+              <a:spcAft>
+                <a:spcPts val="1000"/>
+              </a:spcAft>
+              <a:defRPr sz="2000" b="0">
+                <a:solidFill>
+                  <a:srgbClr val="333333"/>
+                </a:solidFill>
+                <a:latin typeface="Calibri"/>
+              </a:defRPr>
+            </a:pPr>
+            <a:r>
+              <a:t>      `module4/tb/tb_stream_fifo_uvm.s</a:t>
+            </a:r>
+          </a:p>
+          <a:p>
+            <a:pPr>
+              <a:lnSpc>
+                <a:spcPts val="2200"/>
+              </a:lnSpc>
+              <a:spcAft>
+                <a:spcPts val="1000"/>
+              </a:spcAft>
+              <a:defRPr sz="2000" b="0">
+                <a:solidFill>
+                  <a:srgbClr val="333333"/>
+                </a:solidFill>
+                <a:latin typeface="Calibri"/>
+              </a:defRPr>
+            </a:pPr>
+            <a:r>
+              <a:t>      v` and `stream_pkg.sv` patterns.</a:t>
+            </a:r>
+          </a:p>
+        </p:txBody>
+      </p:sp>
+      <p:pic>
+        <p:nvPicPr>
+          <p:cNvPr id="4" name="Picture 3" descr="rtl_architecture.png"/>
+          <p:cNvPicPr>
+            <a:picLocks noChangeAspect="1"/>
+          </p:cNvPicPr>
+          <p:nvPr/>
+        </p:nvPicPr>
+        <p:blipFill>
+          <a:blip r:embed="rId2"/>
+          <a:stretch>
+            <a:fillRect/>
+          </a:stretch>
+        </p:blipFill>
+        <p:spPr>
+          <a:xfrm>
+            <a:off x="6172200" y="2094547"/>
+            <a:ext cx="5394960" cy="3034665"/>
+          </a:xfrm>
+          <a:prstGeom prst="rect">
+            <a:avLst/>
+          </a:prstGeom>
+        </p:spPr>
+      </p:pic>
+      <p:sp>
+        <p:nvSpPr>
+          <p:cNvPr id="5" name="TextBox 4"/>
           <p:cNvSpPr txBox="1"/>
           <p:nvPr/>
         </p:nvSpPr>
@@ -5315,7 +5722,7 @@
               </a:defRPr>
             </a:pPr>
             <a:r>
-              <a:t>Scoreboard write() hook</a:t>
+              <a:t>2. Checking architecture</a:t>
             </a:r>
           </a:p>
         </p:txBody>
@@ -5328,15 +5735,13 @@
         </p:nvSpPr>
         <p:spPr>
           <a:xfrm>
-            <a:off x="548640" y="1143000"/>
-            <a:ext cx="11064240" cy="5029200"/>
+            <a:off x="548640" y="1234440"/>
+            <a:ext cx="5303520" cy="4754880"/>
           </a:xfrm>
           <a:prstGeom prst="rect">
             <a:avLst/>
           </a:prstGeom>
-          <a:solidFill>
-            <a:srgbClr val="F4F4F4"/>
-          </a:solidFill>
+          <a:noFill/>
         </p:spPr>
         <p:txBody>
           <a:bodyPr wrap="square">
@@ -5349,313 +5754,200 @@
                 <a:spcPts val="2200"/>
               </a:lnSpc>
               <a:spcAft>
-                <a:spcPts val="400"/>
-              </a:spcAft>
-              <a:defRPr sz="2000" b="0">
-                <a:solidFill>
-                  <a:srgbClr val="333333"/>
-                </a:solidFill>
-                <a:latin typeface="Consolas"/>
-              </a:defRPr>
-            </a:pPr>
-            <a:r>
-              <a:t>class stream_scoreboard extends uvm_component;</a:t>
-            </a:r>
-          </a:p>
-          <a:p>
-            <a:pPr>
-              <a:lnSpc>
-                <a:spcPts val="2200"/>
-              </a:lnSpc>
-              <a:spcAft>
-                <a:spcPts val="400"/>
-              </a:spcAft>
-              <a:defRPr sz="2000" b="0">
-                <a:solidFill>
-                  <a:srgbClr val="333333"/>
-                </a:solidFill>
-                <a:latin typeface="Consolas"/>
-              </a:defRPr>
-            </a:pPr>
-          </a:p>
-          <a:p>
-            <a:pPr>
-              <a:lnSpc>
-                <a:spcPts val="2200"/>
-              </a:lnSpc>
-              <a:spcAft>
-                <a:spcPts val="400"/>
-              </a:spcAft>
-              <a:defRPr sz="2000" b="0">
-                <a:solidFill>
-                  <a:srgbClr val="333333"/>
-                </a:solidFill>
-                <a:latin typeface="Consolas"/>
-              </a:defRPr>
-            </a:pPr>
-            <a:r>
-              <a:t>  `uvm_component_utils(stream_scoreboard)</a:t>
-            </a:r>
-          </a:p>
-          <a:p>
-            <a:pPr>
-              <a:lnSpc>
-                <a:spcPts val="2200"/>
-              </a:lnSpc>
-              <a:spcAft>
-                <a:spcPts val="400"/>
-              </a:spcAft>
-              <a:defRPr sz="2000" b="0">
-                <a:solidFill>
-                  <a:srgbClr val="333333"/>
-                </a:solidFill>
-                <a:latin typeface="Consolas"/>
-              </a:defRPr>
-            </a:pPr>
-          </a:p>
-          <a:p>
-            <a:pPr>
-              <a:lnSpc>
-                <a:spcPts val="2200"/>
-              </a:lnSpc>
-              <a:spcAft>
-                <a:spcPts val="400"/>
-              </a:spcAft>
-              <a:defRPr sz="2000" b="0">
-                <a:solidFill>
-                  <a:srgbClr val="333333"/>
-                </a:solidFill>
-                <a:latin typeface="Consolas"/>
-              </a:defRPr>
-            </a:pPr>
-            <a:r>
-              <a:t>  uvm_analysis_imp #(stream_item, stream_scoreboard) imp_in;</a:t>
-            </a:r>
-          </a:p>
-          <a:p>
-            <a:pPr>
-              <a:lnSpc>
-                <a:spcPts val="2200"/>
-              </a:lnSpc>
-              <a:spcAft>
-                <a:spcPts val="400"/>
-              </a:spcAft>
-              <a:defRPr sz="2000" b="0">
-                <a:solidFill>
-                  <a:srgbClr val="333333"/>
-                </a:solidFill>
-                <a:latin typeface="Consolas"/>
-              </a:defRPr>
-            </a:pPr>
-          </a:p>
-          <a:p>
-            <a:pPr>
-              <a:lnSpc>
-                <a:spcPts val="2200"/>
-              </a:lnSpc>
-              <a:spcAft>
-                <a:spcPts val="400"/>
-              </a:spcAft>
-              <a:defRPr sz="2000" b="0">
-                <a:solidFill>
-                  <a:srgbClr val="333333"/>
-                </a:solidFill>
-                <a:latin typeface="Consolas"/>
-              </a:defRPr>
-            </a:pPr>
-            <a:r>
-              <a:t>  int unsigned num_seen;</a:t>
-            </a:r>
-          </a:p>
-          <a:p>
-            <a:pPr>
-              <a:lnSpc>
-                <a:spcPts val="2200"/>
-              </a:lnSpc>
-              <a:spcAft>
-                <a:spcPts val="400"/>
-              </a:spcAft>
-              <a:defRPr sz="2000" b="0">
-                <a:solidFill>
-                  <a:srgbClr val="333333"/>
-                </a:solidFill>
-                <a:latin typeface="Consolas"/>
-              </a:defRPr>
-            </a:pPr>
-          </a:p>
-          <a:p>
-            <a:pPr>
-              <a:lnSpc>
-                <a:spcPts val="2200"/>
-              </a:lnSpc>
-              <a:spcAft>
-                <a:spcPts val="400"/>
-              </a:spcAft>
-              <a:defRPr sz="2000" b="0">
-                <a:solidFill>
-                  <a:srgbClr val="333333"/>
-                </a:solidFill>
-                <a:latin typeface="Consolas"/>
-              </a:defRPr>
-            </a:pPr>
-            <a:r>
-              <a:t>  function new(string name, uvm_component parent);</a:t>
-            </a:r>
-          </a:p>
-          <a:p>
-            <a:pPr>
-              <a:lnSpc>
-                <a:spcPts val="2200"/>
-              </a:lnSpc>
-              <a:spcAft>
-                <a:spcPts val="400"/>
-              </a:spcAft>
-              <a:defRPr sz="2000" b="0">
-                <a:solidFill>
-                  <a:srgbClr val="333333"/>
-                </a:solidFill>
-                <a:latin typeface="Consolas"/>
-              </a:defRPr>
-            </a:pPr>
-            <a:r>
-              <a:t>    super.new(name, parent);</a:t>
-            </a:r>
-          </a:p>
-          <a:p>
-            <a:pPr>
-              <a:lnSpc>
-                <a:spcPts val="2200"/>
-              </a:lnSpc>
-              <a:spcAft>
-                <a:spcPts val="400"/>
-              </a:spcAft>
-              <a:defRPr sz="2000" b="0">
-                <a:solidFill>
-                  <a:srgbClr val="333333"/>
-                </a:solidFill>
-                <a:latin typeface="Consolas"/>
-              </a:defRPr>
-            </a:pPr>
-            <a:r>
-              <a:t>    imp_in = new("imp_in", this);</a:t>
-            </a:r>
-          </a:p>
-          <a:p>
-            <a:pPr>
-              <a:lnSpc>
-                <a:spcPts val="2200"/>
-              </a:lnSpc>
-              <a:spcAft>
-                <a:spcPts val="400"/>
-              </a:spcAft>
-              <a:defRPr sz="2000" b="0">
-                <a:solidFill>
-                  <a:srgbClr val="333333"/>
-                </a:solidFill>
-                <a:latin typeface="Consolas"/>
-              </a:defRPr>
-            </a:pPr>
-            <a:r>
-              <a:t>    num_seen = 0;</a:t>
-            </a:r>
-          </a:p>
-          <a:p>
-            <a:pPr>
-              <a:lnSpc>
-                <a:spcPts val="2200"/>
-              </a:lnSpc>
-              <a:spcAft>
-                <a:spcPts val="400"/>
-              </a:spcAft>
-              <a:defRPr sz="2000" b="0">
-                <a:solidFill>
-                  <a:srgbClr val="333333"/>
-                </a:solidFill>
-                <a:latin typeface="Consolas"/>
-              </a:defRPr>
-            </a:pPr>
-            <a:r>
-              <a:t>  endfunction</a:t>
-            </a:r>
-          </a:p>
-          <a:p>
-            <a:pPr>
-              <a:lnSpc>
-                <a:spcPts val="2200"/>
-              </a:lnSpc>
-              <a:spcAft>
-                <a:spcPts val="400"/>
-              </a:spcAft>
-              <a:defRPr sz="2000" b="0">
-                <a:solidFill>
-                  <a:srgbClr val="333333"/>
-                </a:solidFill>
-                <a:latin typeface="Consolas"/>
-              </a:defRPr>
-            </a:pPr>
-          </a:p>
-          <a:p>
-            <a:pPr>
-              <a:lnSpc>
-                <a:spcPts val="2200"/>
-              </a:lnSpc>
-              <a:spcAft>
-                <a:spcPts val="400"/>
-              </a:spcAft>
-              <a:defRPr sz="2000" b="0">
-                <a:solidFill>
-                  <a:srgbClr val="333333"/>
-                </a:solidFill>
-                <a:latin typeface="Consolas"/>
-              </a:defRPr>
-            </a:pPr>
-            <a:r>
-              <a:t>  // Called for each transaction seen by the monitor</a:t>
-            </a:r>
-          </a:p>
-          <a:p>
-            <a:pPr>
-              <a:lnSpc>
-                <a:spcPts val="2200"/>
-              </a:lnSpc>
-              <a:spcAft>
-                <a:spcPts val="400"/>
-              </a:spcAft>
-              <a:defRPr sz="2000" b="0">
-                <a:solidFill>
-                  <a:srgbClr val="333333"/>
-                </a:solidFill>
-                <a:latin typeface="Consolas"/>
-              </a:defRPr>
-            </a:pPr>
-            <a:r>
-              <a:t>  function void write(stream_item t);</a:t>
-            </a:r>
-          </a:p>
-          <a:p>
-            <a:pPr>
-              <a:lnSpc>
-                <a:spcPts val="2200"/>
-              </a:lnSpc>
-              <a:spcAft>
-                <a:spcPts val="400"/>
-              </a:spcAft>
-              <a:defRPr sz="2000" b="0">
-                <a:solidFill>
-                  <a:srgbClr val="333333"/>
-                </a:solidFill>
-                <a:latin typeface="Consolas"/>
-              </a:defRPr>
-            </a:pPr>
-            <a:r>
-              <a:t># ...</a:t>
-            </a:r>
-          </a:p>
-        </p:txBody>
-      </p:sp>
-      <p:sp>
-        <p:nvSpPr>
-          <p:cNvPr id="4" name="TextBox 3"/>
+                <a:spcPts val="1000"/>
+              </a:spcAft>
+              <a:defRPr sz="2000" b="0">
+                <a:solidFill>
+                  <a:srgbClr val="333333"/>
+                </a:solidFill>
+                <a:latin typeface="Calibri"/>
+              </a:defRPr>
+            </a:pPr>
+            <a:r>
+              <a:t>• Scoreboard / reference model —</a:t>
+            </a:r>
+          </a:p>
+          <a:p>
+            <a:pPr>
+              <a:lnSpc>
+                <a:spcPts val="2200"/>
+              </a:lnSpc>
+              <a:spcAft>
+                <a:spcPts val="1000"/>
+              </a:spcAft>
+              <a:defRPr sz="2000" b="0">
+                <a:solidFill>
+                  <a:srgbClr val="333333"/>
+                </a:solidFill>
+                <a:latin typeface="Calibri"/>
+              </a:defRPr>
+            </a:pPr>
+            <a:r>
+              <a:t>      golden data path and ordering</a:t>
+            </a:r>
+          </a:p>
+          <a:p>
+            <a:pPr>
+              <a:lnSpc>
+                <a:spcPts val="2200"/>
+              </a:lnSpc>
+              <a:spcAft>
+                <a:spcPts val="1000"/>
+              </a:spcAft>
+              <a:defRPr sz="2000" b="0">
+                <a:solidFill>
+                  <a:srgbClr val="333333"/>
+                </a:solidFill>
+                <a:latin typeface="Calibri"/>
+              </a:defRPr>
+            </a:pPr>
+            <a:r>
+              <a:t>      checks (`CHECKER_PLAN.md`).</a:t>
+            </a:r>
+          </a:p>
+          <a:p>
+            <a:pPr>
+              <a:lnSpc>
+                <a:spcPts val="2200"/>
+              </a:lnSpc>
+              <a:spcAft>
+                <a:spcPts val="1000"/>
+              </a:spcAft>
+              <a:defRPr sz="2000" b="0">
+                <a:solidFill>
+                  <a:srgbClr val="333333"/>
+                </a:solidFill>
+                <a:latin typeface="Calibri"/>
+              </a:defRPr>
+            </a:pPr>
+            <a:r>
+              <a:t>• SVA — protocol and functional</a:t>
+            </a:r>
+          </a:p>
+          <a:p>
+            <a:pPr>
+              <a:lnSpc>
+                <a:spcPts val="2200"/>
+              </a:lnSpc>
+              <a:spcAft>
+                <a:spcPts val="1000"/>
+              </a:spcAft>
+              <a:defRPr sz="2000" b="0">
+                <a:solidFill>
+                  <a:srgbClr val="333333"/>
+                </a:solidFill>
+                <a:latin typeface="Calibri"/>
+              </a:defRPr>
+            </a:pPr>
+            <a:r>
+              <a:t>      assertions on interfaces and</a:t>
+            </a:r>
+          </a:p>
+          <a:p>
+            <a:pPr>
+              <a:lnSpc>
+                <a:spcPts val="2200"/>
+              </a:lnSpc>
+              <a:spcAft>
+                <a:spcPts val="1000"/>
+              </a:spcAft>
+              <a:defRPr sz="2000" b="0">
+                <a:solidFill>
+                  <a:srgbClr val="333333"/>
+                </a:solidFill>
+                <a:latin typeface="Calibri"/>
+              </a:defRPr>
+            </a:pPr>
+            <a:r>
+              <a:t>      internal flags.</a:t>
+            </a:r>
+          </a:p>
+          <a:p>
+            <a:pPr>
+              <a:lnSpc>
+                <a:spcPts val="2200"/>
+              </a:lnSpc>
+              <a:spcAft>
+                <a:spcPts val="1000"/>
+              </a:spcAft>
+              <a:defRPr sz="2000" b="0">
+                <a:solidFill>
+                  <a:srgbClr val="333333"/>
+                </a:solidFill>
+                <a:latin typeface="Calibri"/>
+              </a:defRPr>
+            </a:pPr>
+            <a:r>
+              <a:t>• Clear split: what is checked in</a:t>
+            </a:r>
+          </a:p>
+          <a:p>
+            <a:pPr>
+              <a:lnSpc>
+                <a:spcPts val="2200"/>
+              </a:lnSpc>
+              <a:spcAft>
+                <a:spcPts val="1000"/>
+              </a:spcAft>
+              <a:defRPr sz="2000" b="0">
+                <a:solidFill>
+                  <a:srgbClr val="333333"/>
+                </a:solidFill>
+                <a:latin typeface="Calibri"/>
+              </a:defRPr>
+            </a:pPr>
+            <a:r>
+              <a:t>      SVA vs scoreboard vs test self-</a:t>
+            </a:r>
+          </a:p>
+          <a:p>
+            <a:pPr>
+              <a:lnSpc>
+                <a:spcPts val="2200"/>
+              </a:lnSpc>
+              <a:spcAft>
+                <a:spcPts val="1000"/>
+              </a:spcAft>
+              <a:defRPr sz="2000" b="0">
+                <a:solidFill>
+                  <a:srgbClr val="333333"/>
+                </a:solidFill>
+                <a:latin typeface="Calibri"/>
+              </a:defRPr>
+            </a:pPr>
+            <a:r>
+              <a:t>      check.</a:t>
+            </a:r>
+          </a:p>
+        </p:txBody>
+      </p:sp>
+      <p:pic>
+        <p:nvPicPr>
+          <p:cNvPr id="4" name="Picture 3" descr="verification_architecture.png"/>
+          <p:cNvPicPr>
+            <a:picLocks noChangeAspect="1"/>
+          </p:cNvPicPr>
+          <p:nvPr/>
+        </p:nvPicPr>
+        <p:blipFill>
+          <a:blip r:embed="rId2"/>
+          <a:stretch>
+            <a:fillRect/>
+          </a:stretch>
+        </p:blipFill>
+        <p:spPr>
+          <a:xfrm>
+            <a:off x="6172200" y="2094547"/>
+            <a:ext cx="5394960" cy="3034665"/>
+          </a:xfrm>
+          <a:prstGeom prst="rect">
+            <a:avLst/>
+          </a:prstGeom>
+        </p:spPr>
+      </p:pic>
+      <p:sp>
+        <p:nvSpPr>
+          <p:cNvPr id="5" name="TextBox 4"/>
           <p:cNvSpPr txBox="1"/>
           <p:nvPr/>
         </p:nvSpPr>
@@ -5718,8 +6010,8 @@
         </p:nvSpPr>
         <p:spPr>
           <a:xfrm>
-            <a:off x="548640" y="2743200"/>
-            <a:ext cx="11064240" cy="1371600"/>
+            <a:off x="548640" y="411480"/>
+            <a:ext cx="11064240" cy="777240"/>
           </a:xfrm>
           <a:prstGeom prst="rect">
             <a:avLst/>
@@ -5732,11 +6024,11 @@
           </a:bodyPr>
           <a:lstStyle/>
           <a:p>
-            <a:pPr algn="ctr">
-              <a:lnSpc>
-                <a:spcPts val="2200"/>
-              </a:lnSpc>
-              <a:defRPr sz="3600" b="1">
+            <a:pPr>
+              <a:lnSpc>
+                <a:spcPts val="2200"/>
+              </a:lnSpc>
+              <a:defRPr sz="2800" b="1">
                 <a:solidFill>
                   <a:srgbClr val="1A1A2E"/>
                 </a:solidFill>
@@ -5744,7 +6036,7 @@
               </a:defRPr>
             </a:pPr>
             <a:r>
-              <a:t>Verification &amp; testing methods</a:t>
+              <a:t>3. UVM phase execution flow</a:t>
             </a:r>
           </a:p>
         </p:txBody>
@@ -5752,6 +6044,219 @@
       <p:sp>
         <p:nvSpPr>
           <p:cNvPr id="3" name="TextBox 2"/>
+          <p:cNvSpPr txBox="1"/>
+          <p:nvPr/>
+        </p:nvSpPr>
+        <p:spPr>
+          <a:xfrm>
+            <a:off x="548640" y="1234440"/>
+            <a:ext cx="11064240" cy="4937760"/>
+          </a:xfrm>
+          <a:prstGeom prst="rect">
+            <a:avLst/>
+          </a:prstGeom>
+          <a:noFill/>
+        </p:spPr>
+        <p:txBody>
+          <a:bodyPr wrap="square">
+            <a:noAutofit/>
+          </a:bodyPr>
+          <a:lstStyle/>
+          <a:p>
+            <a:pPr>
+              <a:lnSpc>
+                <a:spcPts val="2200"/>
+              </a:lnSpc>
+              <a:spcAft>
+                <a:spcPts val="1000"/>
+              </a:spcAft>
+              <a:defRPr sz="2000" b="0">
+                <a:solidFill>
+                  <a:srgbClr val="333333"/>
+                </a:solidFill>
+                <a:latin typeface="Calibri"/>
+              </a:defRPr>
+            </a:pPr>
+            <a:r>
+              <a:t>• build_phase: create env, agents, scoreboard,</a:t>
+            </a:r>
+          </a:p>
+          <a:p>
+            <a:pPr>
+              <a:lnSpc>
+                <a:spcPts val="2200"/>
+              </a:lnSpc>
+              <a:spcAft>
+                <a:spcPts val="1000"/>
+              </a:spcAft>
+              <a:defRPr sz="2000" b="0">
+                <a:solidFill>
+                  <a:srgbClr val="333333"/>
+                </a:solidFill>
+                <a:latin typeface="Calibri"/>
+              </a:defRPr>
+            </a:pPr>
+            <a:r>
+              <a:t>      coverage subscribers via factory.</a:t>
+            </a:r>
+          </a:p>
+          <a:p>
+            <a:pPr>
+              <a:lnSpc>
+                <a:spcPts val="2200"/>
+              </a:lnSpc>
+              <a:spcAft>
+                <a:spcPts val="1000"/>
+              </a:spcAft>
+              <a:defRPr sz="2000" b="0">
+                <a:solidFill>
+                  <a:srgbClr val="333333"/>
+                </a:solidFill>
+                <a:latin typeface="Calibri"/>
+              </a:defRPr>
+            </a:pPr>
+            <a:r>
+              <a:t>• connect_phase: connect monitor analysis ports to</a:t>
+            </a:r>
+          </a:p>
+          <a:p>
+            <a:pPr>
+              <a:lnSpc>
+                <a:spcPts val="2200"/>
+              </a:lnSpc>
+              <a:spcAft>
+                <a:spcPts val="1000"/>
+              </a:spcAft>
+              <a:defRPr sz="2000" b="0">
+                <a:solidFill>
+                  <a:srgbClr val="333333"/>
+                </a:solidFill>
+                <a:latin typeface="Calibri"/>
+              </a:defRPr>
+            </a:pPr>
+            <a:r>
+              <a:t>      scoreboard and coverage; tie virtual interfaces.</a:t>
+            </a:r>
+          </a:p>
+          <a:p>
+            <a:pPr>
+              <a:lnSpc>
+                <a:spcPts val="2200"/>
+              </a:lnSpc>
+              <a:spcAft>
+                <a:spcPts val="1000"/>
+              </a:spcAft>
+              <a:defRPr sz="2000" b="0">
+                <a:solidFill>
+                  <a:srgbClr val="333333"/>
+                </a:solidFill>
+                <a:latin typeface="Calibri"/>
+              </a:defRPr>
+            </a:pPr>
+            <a:r>
+              <a:t>• run_phase: raise objection, start sequences on</a:t>
+            </a:r>
+          </a:p>
+          <a:p>
+            <a:pPr>
+              <a:lnSpc>
+                <a:spcPts val="2200"/>
+              </a:lnSpc>
+              <a:spcAft>
+                <a:spcPts val="1000"/>
+              </a:spcAft>
+              <a:defRPr sz="2000" b="0">
+                <a:solidFill>
+                  <a:srgbClr val="333333"/>
+                </a:solidFill>
+                <a:latin typeface="Calibri"/>
+              </a:defRPr>
+            </a:pPr>
+            <a:r>
+              <a:t>      sequencers, wait for drain, drop objection.</a:t>
+            </a:r>
+          </a:p>
+          <a:p>
+            <a:pPr>
+              <a:lnSpc>
+                <a:spcPts val="2200"/>
+              </a:lnSpc>
+              <a:spcAft>
+                <a:spcPts val="1000"/>
+              </a:spcAft>
+              <a:defRPr sz="2000" b="0">
+                <a:solidFill>
+                  <a:srgbClr val="333333"/>
+                </a:solidFill>
+                <a:latin typeface="Calibri"/>
+              </a:defRPr>
+            </a:pPr>
+            <a:r>
+              <a:t>• report_phase: summarize errors, assertion failures,</a:t>
+            </a:r>
+          </a:p>
+          <a:p>
+            <a:pPr>
+              <a:lnSpc>
+                <a:spcPts val="2200"/>
+              </a:lnSpc>
+              <a:spcAft>
+                <a:spcPts val="1000"/>
+              </a:spcAft>
+              <a:defRPr sz="2000" b="0">
+                <a:solidFill>
+                  <a:srgbClr val="333333"/>
+                </a:solidFill>
+                <a:latin typeface="Calibri"/>
+              </a:defRPr>
+            </a:pPr>
+            <a:r>
+              <a:t>      and coverage sampling status.</a:t>
+            </a:r>
+          </a:p>
+          <a:p>
+            <a:pPr>
+              <a:lnSpc>
+                <a:spcPts val="2200"/>
+              </a:lnSpc>
+              <a:spcAft>
+                <a:spcPts val="1000"/>
+              </a:spcAft>
+              <a:defRPr sz="2000" b="0">
+                <a:solidFill>
+                  <a:srgbClr val="333333"/>
+                </a:solidFill>
+                <a:latin typeface="Calibri"/>
+              </a:defRPr>
+            </a:pPr>
+            <a:r>
+              <a:t>• Top module `module4/tb/tb_stream_fifo_uvm.sv`</a:t>
+            </a:r>
+          </a:p>
+          <a:p>
+            <a:pPr>
+              <a:lnSpc>
+                <a:spcPts val="2200"/>
+              </a:lnSpc>
+              <a:spcAft>
+                <a:spcPts val="1000"/>
+              </a:spcAft>
+              <a:defRPr sz="2000" b="0">
+                <a:solidFill>
+                  <a:srgbClr val="333333"/>
+                </a:solidFill>
+                <a:latin typeface="Calibri"/>
+              </a:defRPr>
+            </a:pPr>
+            <a:r>
+              <a:t>      instantiates DUT and calls `run_test()`.</a:t>
+            </a:r>
+          </a:p>
+        </p:txBody>
+      </p:sp>
+      <p:sp>
+        <p:nvSpPr>
+          <p:cNvPr id="4" name="TextBox 3"/>
           <p:cNvSpPr txBox="1"/>
           <p:nvPr/>
         </p:nvSpPr>
@@ -5840,7 +6345,7 @@
               </a:defRPr>
             </a:pPr>
             <a:r>
-              <a:t>1. Stimulus and checking flow</a:t>
+              <a:t>DUT instantiation in UVM top</a:t>
             </a:r>
           </a:p>
         </p:txBody>
@@ -5853,13 +6358,15 @@
         </p:nvSpPr>
         <p:spPr>
           <a:xfrm>
-            <a:off x="548640" y="1234440"/>
-            <a:ext cx="5303520" cy="4754880"/>
+            <a:off x="548640" y="1143000"/>
+            <a:ext cx="11064240" cy="5029200"/>
           </a:xfrm>
           <a:prstGeom prst="rect">
             <a:avLst/>
           </a:prstGeom>
-          <a:noFill/>
+          <a:solidFill>
+            <a:srgbClr val="F4F4F4"/>
+          </a:solidFill>
         </p:spPr>
         <p:txBody>
           <a:bodyPr wrap="square">
@@ -5872,143 +6379,328 @@
                 <a:spcPts val="2200"/>
               </a:lnSpc>
               <a:spcAft>
-                <a:spcPts val="1000"/>
-              </a:spcAft>
-              <a:defRPr sz="2000" b="0">
-                <a:solidFill>
-                  <a:srgbClr val="333333"/>
-                </a:solidFill>
-                <a:latin typeface="Calibri"/>
-              </a:defRPr>
-            </a:pPr>
-            <a:r>
-              <a:t>• Sequences → driver → DUT →</a:t>
-            </a:r>
-          </a:p>
-          <a:p>
-            <a:pPr>
-              <a:lnSpc>
-                <a:spcPts val="2200"/>
-              </a:lnSpc>
-              <a:spcAft>
-                <a:spcPts val="1000"/>
-              </a:spcAft>
-              <a:defRPr sz="2000" b="0">
-                <a:solidFill>
-                  <a:srgbClr val="333333"/>
-                </a:solidFill>
-                <a:latin typeface="Calibri"/>
-              </a:defRPr>
-            </a:pPr>
-            <a:r>
-              <a:t>      monitor → scoreboard compare and</a:t>
-            </a:r>
-          </a:p>
-          <a:p>
-            <a:pPr>
-              <a:lnSpc>
-                <a:spcPts val="2200"/>
-              </a:lnSpc>
-              <a:spcAft>
-                <a:spcPts val="1000"/>
-              </a:spcAft>
-              <a:defRPr sz="2000" b="0">
-                <a:solidFill>
-                  <a:srgbClr val="333333"/>
-                </a:solidFill>
-                <a:latin typeface="Calibri"/>
-              </a:defRPr>
-            </a:pPr>
-            <a:r>
-              <a:t>      assertion sampling.</a:t>
-            </a:r>
-          </a:p>
-          <a:p>
-            <a:pPr>
-              <a:lnSpc>
-                <a:spcPts val="2200"/>
-              </a:lnSpc>
-              <a:spcAft>
-                <a:spcPts val="1000"/>
-              </a:spcAft>
-              <a:defRPr sz="2000" b="0">
-                <a:solidFill>
-                  <a:srgbClr val="333333"/>
-                </a:solidFill>
-                <a:latin typeface="Calibri"/>
-              </a:defRPr>
-            </a:pPr>
-            <a:r>
-              <a:t>• Reset, backpressure, and error-</a:t>
-            </a:r>
-          </a:p>
-          <a:p>
-            <a:pPr>
-              <a:lnSpc>
-                <a:spcPts val="2200"/>
-              </a:lnSpc>
-              <a:spcAft>
-                <a:spcPts val="1000"/>
-              </a:spcAft>
-              <a:defRPr sz="2000" b="0">
-                <a:solidFill>
-                  <a:srgbClr val="333333"/>
-                </a:solidFill>
-                <a:latin typeface="Calibri"/>
-              </a:defRPr>
-            </a:pPr>
-            <a:r>
-              <a:t>      injection scenarios exercised</a:t>
-            </a:r>
-          </a:p>
-          <a:p>
-            <a:pPr>
-              <a:lnSpc>
-                <a:spcPts val="2200"/>
-              </a:lnSpc>
-              <a:spcAft>
-                <a:spcPts val="1000"/>
-              </a:spcAft>
-              <a:defRPr sz="2000" b="0">
-                <a:solidFill>
-                  <a:srgbClr val="333333"/>
-                </a:solidFill>
-                <a:latin typeface="Calibri"/>
-              </a:defRPr>
-            </a:pPr>
-            <a:r>
-              <a:t>      per `TEST_PLAN.md`.</a:t>
-            </a:r>
-          </a:p>
-        </p:txBody>
-      </p:sp>
-      <p:pic>
-        <p:nvPicPr>
-          <p:cNvPr id="4" name="Picture 3" descr="testing_methods.png"/>
-          <p:cNvPicPr>
-            <a:picLocks noChangeAspect="1"/>
-          </p:cNvPicPr>
-          <p:nvPr/>
-        </p:nvPicPr>
-        <p:blipFill>
-          <a:blip r:embed="rId2"/>
-          <a:stretch>
-            <a:fillRect/>
-          </a:stretch>
-        </p:blipFill>
-        <p:spPr>
-          <a:xfrm>
-            <a:off x="6172200" y="2094547"/>
-            <a:ext cx="5394960" cy="3034665"/>
-          </a:xfrm>
-          <a:prstGeom prst="rect">
-            <a:avLst/>
-          </a:prstGeom>
-        </p:spPr>
-      </p:pic>
-      <p:sp>
-        <p:nvSpPr>
-          <p:cNvPr id="5" name="TextBox 4"/>
+                <a:spcPts val="400"/>
+              </a:spcAft>
+              <a:defRPr sz="2000" b="0">
+                <a:solidFill>
+                  <a:srgbClr val="333333"/>
+                </a:solidFill>
+                <a:latin typeface="Consolas"/>
+              </a:defRPr>
+            </a:pPr>
+            <a:r>
+              <a:t>// DUT instance</a:t>
+            </a:r>
+          </a:p>
+          <a:p>
+            <a:pPr>
+              <a:lnSpc>
+                <a:spcPts val="2200"/>
+              </a:lnSpc>
+              <a:spcAft>
+                <a:spcPts val="400"/>
+              </a:spcAft>
+              <a:defRPr sz="2000" b="0">
+                <a:solidFill>
+                  <a:srgbClr val="333333"/>
+                </a:solidFill>
+                <a:latin typeface="Consolas"/>
+              </a:defRPr>
+            </a:pPr>
+            <a:r>
+              <a:t>  stream_fifo #(</a:t>
+            </a:r>
+          </a:p>
+          <a:p>
+            <a:pPr>
+              <a:lnSpc>
+                <a:spcPts val="2200"/>
+              </a:lnSpc>
+              <a:spcAft>
+                <a:spcPts val="400"/>
+              </a:spcAft>
+              <a:defRPr sz="2000" b="0">
+                <a:solidFill>
+                  <a:srgbClr val="333333"/>
+                </a:solidFill>
+                <a:latin typeface="Consolas"/>
+              </a:defRPr>
+            </a:pPr>
+            <a:r>
+              <a:t>    .DATA_WIDTH (DATA_WIDTH),</a:t>
+            </a:r>
+          </a:p>
+          <a:p>
+            <a:pPr>
+              <a:lnSpc>
+                <a:spcPts val="2200"/>
+              </a:lnSpc>
+              <a:spcAft>
+                <a:spcPts val="400"/>
+              </a:spcAft>
+              <a:defRPr sz="2000" b="0">
+                <a:solidFill>
+                  <a:srgbClr val="333333"/>
+                </a:solidFill>
+                <a:latin typeface="Consolas"/>
+              </a:defRPr>
+            </a:pPr>
+            <a:r>
+              <a:t>    .DEPTH      (DEPTH)</a:t>
+            </a:r>
+          </a:p>
+          <a:p>
+            <a:pPr>
+              <a:lnSpc>
+                <a:spcPts val="2200"/>
+              </a:lnSpc>
+              <a:spcAft>
+                <a:spcPts val="400"/>
+              </a:spcAft>
+              <a:defRPr sz="2000" b="0">
+                <a:solidFill>
+                  <a:srgbClr val="333333"/>
+                </a:solidFill>
+                <a:latin typeface="Consolas"/>
+              </a:defRPr>
+            </a:pPr>
+            <a:r>
+              <a:t>  ) dut (</a:t>
+            </a:r>
+          </a:p>
+          <a:p>
+            <a:pPr>
+              <a:lnSpc>
+                <a:spcPts val="2200"/>
+              </a:lnSpc>
+              <a:spcAft>
+                <a:spcPts val="400"/>
+              </a:spcAft>
+              <a:defRPr sz="2000" b="0">
+                <a:solidFill>
+                  <a:srgbClr val="333333"/>
+                </a:solidFill>
+                <a:latin typeface="Consolas"/>
+              </a:defRPr>
+            </a:pPr>
+            <a:r>
+              <a:t>    .clk       (clk),</a:t>
+            </a:r>
+          </a:p>
+          <a:p>
+            <a:pPr>
+              <a:lnSpc>
+                <a:spcPts val="2200"/>
+              </a:lnSpc>
+              <a:spcAft>
+                <a:spcPts val="400"/>
+              </a:spcAft>
+              <a:defRPr sz="2000" b="0">
+                <a:solidFill>
+                  <a:srgbClr val="333333"/>
+                </a:solidFill>
+                <a:latin typeface="Consolas"/>
+              </a:defRPr>
+            </a:pPr>
+            <a:r>
+              <a:t>    .rst_n     (rst_n),</a:t>
+            </a:r>
+          </a:p>
+          <a:p>
+            <a:pPr>
+              <a:lnSpc>
+                <a:spcPts val="2200"/>
+              </a:lnSpc>
+              <a:spcAft>
+                <a:spcPts val="400"/>
+              </a:spcAft>
+              <a:defRPr sz="2000" b="0">
+                <a:solidFill>
+                  <a:srgbClr val="333333"/>
+                </a:solidFill>
+                <a:latin typeface="Consolas"/>
+              </a:defRPr>
+            </a:pPr>
+            <a:r>
+              <a:t>    // source side</a:t>
+            </a:r>
+          </a:p>
+          <a:p>
+            <a:pPr>
+              <a:lnSpc>
+                <a:spcPts val="2200"/>
+              </a:lnSpc>
+              <a:spcAft>
+                <a:spcPts val="400"/>
+              </a:spcAft>
+              <a:defRPr sz="2000" b="0">
+                <a:solidFill>
+                  <a:srgbClr val="333333"/>
+                </a:solidFill>
+                <a:latin typeface="Consolas"/>
+              </a:defRPr>
+            </a:pPr>
+            <a:r>
+              <a:t>    .s_valid   (s_if.valid),</a:t>
+            </a:r>
+          </a:p>
+          <a:p>
+            <a:pPr>
+              <a:lnSpc>
+                <a:spcPts val="2200"/>
+              </a:lnSpc>
+              <a:spcAft>
+                <a:spcPts val="400"/>
+              </a:spcAft>
+              <a:defRPr sz="2000" b="0">
+                <a:solidFill>
+                  <a:srgbClr val="333333"/>
+                </a:solidFill>
+                <a:latin typeface="Consolas"/>
+              </a:defRPr>
+            </a:pPr>
+            <a:r>
+              <a:t>    .s_data    (s_if.data),</a:t>
+            </a:r>
+          </a:p>
+          <a:p>
+            <a:pPr>
+              <a:lnSpc>
+                <a:spcPts val="2200"/>
+              </a:lnSpc>
+              <a:spcAft>
+                <a:spcPts val="400"/>
+              </a:spcAft>
+              <a:defRPr sz="2000" b="0">
+                <a:solidFill>
+                  <a:srgbClr val="333333"/>
+                </a:solidFill>
+                <a:latin typeface="Consolas"/>
+              </a:defRPr>
+            </a:pPr>
+            <a:r>
+              <a:t>    .s_ready   (s_if.ready),</a:t>
+            </a:r>
+          </a:p>
+          <a:p>
+            <a:pPr>
+              <a:lnSpc>
+                <a:spcPts val="2200"/>
+              </a:lnSpc>
+              <a:spcAft>
+                <a:spcPts val="400"/>
+              </a:spcAft>
+              <a:defRPr sz="2000" b="0">
+                <a:solidFill>
+                  <a:srgbClr val="333333"/>
+                </a:solidFill>
+                <a:latin typeface="Consolas"/>
+              </a:defRPr>
+            </a:pPr>
+            <a:r>
+              <a:t>    // sink side</a:t>
+            </a:r>
+          </a:p>
+          <a:p>
+            <a:pPr>
+              <a:lnSpc>
+                <a:spcPts val="2200"/>
+              </a:lnSpc>
+              <a:spcAft>
+                <a:spcPts val="400"/>
+              </a:spcAft>
+              <a:defRPr sz="2000" b="0">
+                <a:solidFill>
+                  <a:srgbClr val="333333"/>
+                </a:solidFill>
+                <a:latin typeface="Consolas"/>
+              </a:defRPr>
+            </a:pPr>
+            <a:r>
+              <a:t>    .m_valid   (m_if.valid),</a:t>
+            </a:r>
+          </a:p>
+          <a:p>
+            <a:pPr>
+              <a:lnSpc>
+                <a:spcPts val="2200"/>
+              </a:lnSpc>
+              <a:spcAft>
+                <a:spcPts val="400"/>
+              </a:spcAft>
+              <a:defRPr sz="2000" b="0">
+                <a:solidFill>
+                  <a:srgbClr val="333333"/>
+                </a:solidFill>
+                <a:latin typeface="Consolas"/>
+              </a:defRPr>
+            </a:pPr>
+            <a:r>
+              <a:t>    .m_data    (m_if.data),</a:t>
+            </a:r>
+          </a:p>
+          <a:p>
+            <a:pPr>
+              <a:lnSpc>
+                <a:spcPts val="2200"/>
+              </a:lnSpc>
+              <a:spcAft>
+                <a:spcPts val="400"/>
+              </a:spcAft>
+              <a:defRPr sz="2000" b="0">
+                <a:solidFill>
+                  <a:srgbClr val="333333"/>
+                </a:solidFill>
+                <a:latin typeface="Consolas"/>
+              </a:defRPr>
+            </a:pPr>
+            <a:r>
+              <a:t>    .m_ready   (m_if.ready),</a:t>
+            </a:r>
+          </a:p>
+          <a:p>
+            <a:pPr>
+              <a:lnSpc>
+                <a:spcPts val="2200"/>
+              </a:lnSpc>
+              <a:spcAft>
+                <a:spcPts val="400"/>
+              </a:spcAft>
+              <a:defRPr sz="2000" b="0">
+                <a:solidFill>
+                  <a:srgbClr val="333333"/>
+                </a:solidFill>
+                <a:latin typeface="Consolas"/>
+              </a:defRPr>
+            </a:pPr>
+            <a:r>
+              <a:t>    // status</a:t>
+            </a:r>
+          </a:p>
+          <a:p>
+            <a:pPr>
+              <a:lnSpc>
+                <a:spcPts val="2200"/>
+              </a:lnSpc>
+              <a:spcAft>
+                <a:spcPts val="400"/>
+              </a:spcAft>
+              <a:defRPr sz="2000" b="0">
+                <a:solidFill>
+                  <a:srgbClr val="333333"/>
+                </a:solidFill>
+                <a:latin typeface="Consolas"/>
+              </a:defRPr>
+            </a:pPr>
+            <a:r>
+              <a:t># ...</a:t>
+            </a:r>
+          </a:p>
+        </p:txBody>
+      </p:sp>
+      <p:sp>
+        <p:nvSpPr>
+          <p:cNvPr id="4" name="TextBox 3"/>
           <p:cNvSpPr txBox="1"/>
           <p:nvPr/>
         </p:nvSpPr>
@@ -6097,7 +6789,7 @@
               </a:defRPr>
             </a:pPr>
             <a:r>
-              <a:t>2. Assertion-based verification (ABV)</a:t>
+              <a:t>stream_env — build &amp; connect</a:t>
             </a:r>
           </a:p>
         </p:txBody>
@@ -6110,13 +6802,15 @@
         </p:nvSpPr>
         <p:spPr>
           <a:xfrm>
-            <a:off x="548640" y="1234440"/>
-            <a:ext cx="11064240" cy="4937760"/>
+            <a:off x="548640" y="1143000"/>
+            <a:ext cx="11064240" cy="5029200"/>
           </a:xfrm>
           <a:prstGeom prst="rect">
             <a:avLst/>
           </a:prstGeom>
-          <a:noFill/>
+          <a:solidFill>
+            <a:srgbClr val="F4F4F4"/>
+          </a:solidFill>
         </p:spPr>
         <p:txBody>
           <a:bodyPr wrap="square">
@@ -6129,93 +6823,309 @@
                 <a:spcPts val="2200"/>
               </a:lnSpc>
               <a:spcAft>
-                <a:spcPts val="1000"/>
-              </a:spcAft>
-              <a:defRPr sz="2000" b="0">
-                <a:solidFill>
-                  <a:srgbClr val="333333"/>
-                </a:solidFill>
-                <a:latin typeface="Calibri"/>
-              </a:defRPr>
-            </a:pPr>
-            <a:r>
-              <a:t>• Place assertions close to interfaces; use</a:t>
-            </a:r>
-          </a:p>
-          <a:p>
-            <a:pPr>
-              <a:lnSpc>
-                <a:spcPts val="2200"/>
-              </a:lnSpc>
-              <a:spcAft>
-                <a:spcPts val="1000"/>
-              </a:spcAft>
-              <a:defRPr sz="2000" b="0">
-                <a:solidFill>
-                  <a:srgbClr val="333333"/>
-                </a:solidFill>
-                <a:latin typeface="Calibri"/>
-              </a:defRPr>
-            </a:pPr>
-            <a:r>
-              <a:t>      `assert`/`assume` policy consistent with your</a:t>
-            </a:r>
-          </a:p>
-          <a:p>
-            <a:pPr>
-              <a:lnSpc>
-                <a:spcPts val="2200"/>
-              </a:lnSpc>
-              <a:spcAft>
-                <a:spcPts val="1000"/>
-              </a:spcAft>
-              <a:defRPr sz="2000" b="0">
-                <a:solidFill>
-                  <a:srgbClr val="333333"/>
-                </a:solidFill>
-                <a:latin typeface="Calibri"/>
-              </a:defRPr>
-            </a:pPr>
-            <a:r>
-              <a:t>      simulator f…</a:t>
-            </a:r>
-          </a:p>
-          <a:p>
-            <a:pPr>
-              <a:lnSpc>
-                <a:spcPts val="2200"/>
-              </a:lnSpc>
-              <a:spcAft>
-                <a:spcPts val="1000"/>
-              </a:spcAft>
-              <a:defRPr sz="2000" b="0">
-                <a:solidFill>
-                  <a:srgbClr val="333333"/>
-                </a:solidFill>
-                <a:latin typeface="Calibri"/>
-              </a:defRPr>
-            </a:pPr>
-            <a:r>
-              <a:t>• Document waiver and severity policy for known benign</a:t>
-            </a:r>
-          </a:p>
-          <a:p>
-            <a:pPr>
-              <a:lnSpc>
-                <a:spcPts val="2200"/>
-              </a:lnSpc>
-              <a:spcAft>
-                <a:spcPts val="1000"/>
-              </a:spcAft>
-              <a:defRPr sz="2000" b="0">
-                <a:solidFill>
-                  <a:srgbClr val="333333"/>
-                </a:solidFill>
-                <a:latin typeface="Calibri"/>
-              </a:defRPr>
-            </a:pPr>
-            <a:r>
-              <a:t>      cases.</a:t>
+                <a:spcPts val="400"/>
+              </a:spcAft>
+              <a:defRPr sz="2000" b="0">
+                <a:solidFill>
+                  <a:srgbClr val="333333"/>
+                </a:solidFill>
+                <a:latin typeface="Consolas"/>
+              </a:defRPr>
+            </a:pPr>
+            <a:r>
+              <a:t>class stream_env extends uvm_env;</a:t>
+            </a:r>
+          </a:p>
+          <a:p>
+            <a:pPr>
+              <a:lnSpc>
+                <a:spcPts val="2200"/>
+              </a:lnSpc>
+              <a:spcAft>
+                <a:spcPts val="400"/>
+              </a:spcAft>
+              <a:defRPr sz="2000" b="0">
+                <a:solidFill>
+                  <a:srgbClr val="333333"/>
+                </a:solidFill>
+                <a:latin typeface="Consolas"/>
+              </a:defRPr>
+            </a:pPr>
+          </a:p>
+          <a:p>
+            <a:pPr>
+              <a:lnSpc>
+                <a:spcPts val="2200"/>
+              </a:lnSpc>
+              <a:spcAft>
+                <a:spcPts val="400"/>
+              </a:spcAft>
+              <a:defRPr sz="2000" b="0">
+                <a:solidFill>
+                  <a:srgbClr val="333333"/>
+                </a:solidFill>
+                <a:latin typeface="Consolas"/>
+              </a:defRPr>
+            </a:pPr>
+            <a:r>
+              <a:t>  `uvm_component_utils(stream_env)</a:t>
+            </a:r>
+          </a:p>
+          <a:p>
+            <a:pPr>
+              <a:lnSpc>
+                <a:spcPts val="2200"/>
+              </a:lnSpc>
+              <a:spcAft>
+                <a:spcPts val="400"/>
+              </a:spcAft>
+              <a:defRPr sz="2000" b="0">
+                <a:solidFill>
+                  <a:srgbClr val="333333"/>
+                </a:solidFill>
+                <a:latin typeface="Consolas"/>
+              </a:defRPr>
+            </a:pPr>
+          </a:p>
+          <a:p>
+            <a:pPr>
+              <a:lnSpc>
+                <a:spcPts val="2200"/>
+              </a:lnSpc>
+              <a:spcAft>
+                <a:spcPts val="400"/>
+              </a:spcAft>
+              <a:defRPr sz="2000" b="0">
+                <a:solidFill>
+                  <a:srgbClr val="333333"/>
+                </a:solidFill>
+                <a:latin typeface="Consolas"/>
+              </a:defRPr>
+            </a:pPr>
+            <a:r>
+              <a:t>  stream_driver     drv;</a:t>
+            </a:r>
+          </a:p>
+          <a:p>
+            <a:pPr>
+              <a:lnSpc>
+                <a:spcPts val="2200"/>
+              </a:lnSpc>
+              <a:spcAft>
+                <a:spcPts val="400"/>
+              </a:spcAft>
+              <a:defRPr sz="2000" b="0">
+                <a:solidFill>
+                  <a:srgbClr val="333333"/>
+                </a:solidFill>
+                <a:latin typeface="Consolas"/>
+              </a:defRPr>
+            </a:pPr>
+            <a:r>
+              <a:t>  stream_monitor    mon;</a:t>
+            </a:r>
+          </a:p>
+          <a:p>
+            <a:pPr>
+              <a:lnSpc>
+                <a:spcPts val="2200"/>
+              </a:lnSpc>
+              <a:spcAft>
+                <a:spcPts val="400"/>
+              </a:spcAft>
+              <a:defRPr sz="2000" b="0">
+                <a:solidFill>
+                  <a:srgbClr val="333333"/>
+                </a:solidFill>
+                <a:latin typeface="Consolas"/>
+              </a:defRPr>
+            </a:pPr>
+            <a:r>
+              <a:t>  stream_scoreboard sb;</a:t>
+            </a:r>
+          </a:p>
+          <a:p>
+            <a:pPr>
+              <a:lnSpc>
+                <a:spcPts val="2200"/>
+              </a:lnSpc>
+              <a:spcAft>
+                <a:spcPts val="400"/>
+              </a:spcAft>
+              <a:defRPr sz="2000" b="0">
+                <a:solidFill>
+                  <a:srgbClr val="333333"/>
+                </a:solidFill>
+                <a:latin typeface="Consolas"/>
+              </a:defRPr>
+            </a:pPr>
+          </a:p>
+          <a:p>
+            <a:pPr>
+              <a:lnSpc>
+                <a:spcPts val="2200"/>
+              </a:lnSpc>
+              <a:spcAft>
+                <a:spcPts val="400"/>
+              </a:spcAft>
+              <a:defRPr sz="2000" b="0">
+                <a:solidFill>
+                  <a:srgbClr val="333333"/>
+                </a:solidFill>
+                <a:latin typeface="Consolas"/>
+              </a:defRPr>
+            </a:pPr>
+            <a:r>
+              <a:t>  function new(string name, uvm_component parent);</a:t>
+            </a:r>
+          </a:p>
+          <a:p>
+            <a:pPr>
+              <a:lnSpc>
+                <a:spcPts val="2200"/>
+              </a:lnSpc>
+              <a:spcAft>
+                <a:spcPts val="400"/>
+              </a:spcAft>
+              <a:defRPr sz="2000" b="0">
+                <a:solidFill>
+                  <a:srgbClr val="333333"/>
+                </a:solidFill>
+                <a:latin typeface="Consolas"/>
+              </a:defRPr>
+            </a:pPr>
+            <a:r>
+              <a:t>    super.new(name, parent);</a:t>
+            </a:r>
+          </a:p>
+          <a:p>
+            <a:pPr>
+              <a:lnSpc>
+                <a:spcPts val="2200"/>
+              </a:lnSpc>
+              <a:spcAft>
+                <a:spcPts val="400"/>
+              </a:spcAft>
+              <a:defRPr sz="2000" b="0">
+                <a:solidFill>
+                  <a:srgbClr val="333333"/>
+                </a:solidFill>
+                <a:latin typeface="Consolas"/>
+              </a:defRPr>
+            </a:pPr>
+            <a:r>
+              <a:t>  endfunction</a:t>
+            </a:r>
+          </a:p>
+          <a:p>
+            <a:pPr>
+              <a:lnSpc>
+                <a:spcPts val="2200"/>
+              </a:lnSpc>
+              <a:spcAft>
+                <a:spcPts val="400"/>
+              </a:spcAft>
+              <a:defRPr sz="2000" b="0">
+                <a:solidFill>
+                  <a:srgbClr val="333333"/>
+                </a:solidFill>
+                <a:latin typeface="Consolas"/>
+              </a:defRPr>
+            </a:pPr>
+          </a:p>
+          <a:p>
+            <a:pPr>
+              <a:lnSpc>
+                <a:spcPts val="2200"/>
+              </a:lnSpc>
+              <a:spcAft>
+                <a:spcPts val="400"/>
+              </a:spcAft>
+              <a:defRPr sz="2000" b="0">
+                <a:solidFill>
+                  <a:srgbClr val="333333"/>
+                </a:solidFill>
+                <a:latin typeface="Consolas"/>
+              </a:defRPr>
+            </a:pPr>
+            <a:r>
+              <a:t>  function void build_phase(uvm_phase phase);</a:t>
+            </a:r>
+          </a:p>
+          <a:p>
+            <a:pPr>
+              <a:lnSpc>
+                <a:spcPts val="2200"/>
+              </a:lnSpc>
+              <a:spcAft>
+                <a:spcPts val="400"/>
+              </a:spcAft>
+              <a:defRPr sz="2000" b="0">
+                <a:solidFill>
+                  <a:srgbClr val="333333"/>
+                </a:solidFill>
+                <a:latin typeface="Consolas"/>
+              </a:defRPr>
+            </a:pPr>
+            <a:r>
+              <a:t>    super.build_phase(phase);</a:t>
+            </a:r>
+          </a:p>
+          <a:p>
+            <a:pPr>
+              <a:lnSpc>
+                <a:spcPts val="2200"/>
+              </a:lnSpc>
+              <a:spcAft>
+                <a:spcPts val="400"/>
+              </a:spcAft>
+              <a:defRPr sz="2000" b="0">
+                <a:solidFill>
+                  <a:srgbClr val="333333"/>
+                </a:solidFill>
+                <a:latin typeface="Consolas"/>
+              </a:defRPr>
+            </a:pPr>
+            <a:r>
+              <a:t>    drv = stream_driver    ::type_id::create("drv", this);</a:t>
+            </a:r>
+          </a:p>
+          <a:p>
+            <a:pPr>
+              <a:lnSpc>
+                <a:spcPts val="2200"/>
+              </a:lnSpc>
+              <a:spcAft>
+                <a:spcPts val="400"/>
+              </a:spcAft>
+              <a:defRPr sz="2000" b="0">
+                <a:solidFill>
+                  <a:srgbClr val="333333"/>
+                </a:solidFill>
+                <a:latin typeface="Consolas"/>
+              </a:defRPr>
+            </a:pPr>
+            <a:r>
+              <a:t>    mon = stream_monitor   ::type_id::create("mon", this);</a:t>
+            </a:r>
+          </a:p>
+          <a:p>
+            <a:pPr>
+              <a:lnSpc>
+                <a:spcPts val="2200"/>
+              </a:lnSpc>
+              <a:spcAft>
+                <a:spcPts val="400"/>
+              </a:spcAft>
+              <a:defRPr sz="2000" b="0">
+                <a:solidFill>
+                  <a:srgbClr val="333333"/>
+                </a:solidFill>
+                <a:latin typeface="Consolas"/>
+              </a:defRPr>
+            </a:pPr>
+            <a:r>
+              <a:t># ...</a:t>
             </a:r>
           </a:p>
         </p:txBody>
@@ -6311,7 +7221,7 @@
               </a:defRPr>
             </a:pPr>
             <a:r>
-              <a:t>3. Environment review</a:t>
+              <a:t>Scoreboard write() hook</a:t>
             </a:r>
           </a:p>
         </p:txBody>
@@ -6324,13 +7234,15 @@
         </p:nvSpPr>
         <p:spPr>
           <a:xfrm>
-            <a:off x="548640" y="1234440"/>
-            <a:ext cx="11064240" cy="4937760"/>
+            <a:off x="548640" y="1143000"/>
+            <a:ext cx="11064240" cy="5029200"/>
           </a:xfrm>
           <a:prstGeom prst="rect">
             <a:avLst/>
           </a:prstGeom>
-          <a:noFill/>
+          <a:solidFill>
+            <a:srgbClr val="F4F4F4"/>
+          </a:solidFill>
         </p:spPr>
         <p:txBody>
           <a:bodyPr wrap="square">
@@ -6343,74 +7255,306 @@
                 <a:spcPts val="2200"/>
               </a:lnSpc>
               <a:spcAft>
-                <a:spcPts val="1000"/>
-              </a:spcAft>
-              <a:defRPr sz="2000" b="0">
-                <a:solidFill>
-                  <a:srgbClr val="333333"/>
-                </a:solidFill>
-                <a:latin typeface="Calibri"/>
-              </a:defRPr>
-            </a:pPr>
-            <a:r>
-              <a:t>• Peer/self review of `ENV_DESIGN.md` and</a:t>
-            </a:r>
-          </a:p>
-          <a:p>
-            <a:pPr>
-              <a:lnSpc>
-                <a:spcPts val="2200"/>
-              </a:lnSpc>
-              <a:spcAft>
-                <a:spcPts val="1000"/>
-              </a:spcAft>
-              <a:defRPr sz="2000" b="0">
-                <a:solidFill>
-                  <a:srgbClr val="333333"/>
-                </a:solidFill>
-                <a:latin typeface="Calibri"/>
-              </a:defRPr>
-            </a:pPr>
-            <a:r>
-              <a:t>      `CHECKER_PLAN.md` before expanding regression scope.</a:t>
-            </a:r>
-          </a:p>
-          <a:p>
-            <a:pPr>
-              <a:lnSpc>
-                <a:spcPts val="2200"/>
-              </a:lnSpc>
-              <a:spcAft>
-                <a:spcPts val="1000"/>
-              </a:spcAft>
-              <a:defRPr sz="2000" b="0">
-                <a:solidFill>
-                  <a:srgbClr val="333333"/>
-                </a:solidFill>
-                <a:latin typeface="Calibri"/>
-              </a:defRPr>
-            </a:pPr>
-            <a:r>
-              <a:t>• `./scripts/module4.sh --check` validates design docs</a:t>
-            </a:r>
-          </a:p>
-          <a:p>
-            <a:pPr>
-              <a:lnSpc>
-                <a:spcPts val="2200"/>
-              </a:lnSpc>
-              <a:spcAft>
-                <a:spcPts val="1000"/>
-              </a:spcAft>
-              <a:defRPr sz="2000" b="0">
-                <a:solidFill>
-                  <a:srgbClr val="333333"/>
-                </a:solidFill>
-                <a:latin typeface="Calibri"/>
-              </a:defRPr>
-            </a:pPr>
-            <a:r>
-              <a:t>      and TB file presence.</a:t>
+                <a:spcPts val="400"/>
+              </a:spcAft>
+              <a:defRPr sz="2000" b="0">
+                <a:solidFill>
+                  <a:srgbClr val="333333"/>
+                </a:solidFill>
+                <a:latin typeface="Consolas"/>
+              </a:defRPr>
+            </a:pPr>
+            <a:r>
+              <a:t>class stream_scoreboard extends uvm_component;</a:t>
+            </a:r>
+          </a:p>
+          <a:p>
+            <a:pPr>
+              <a:lnSpc>
+                <a:spcPts val="2200"/>
+              </a:lnSpc>
+              <a:spcAft>
+                <a:spcPts val="400"/>
+              </a:spcAft>
+              <a:defRPr sz="2000" b="0">
+                <a:solidFill>
+                  <a:srgbClr val="333333"/>
+                </a:solidFill>
+                <a:latin typeface="Consolas"/>
+              </a:defRPr>
+            </a:pPr>
+          </a:p>
+          <a:p>
+            <a:pPr>
+              <a:lnSpc>
+                <a:spcPts val="2200"/>
+              </a:lnSpc>
+              <a:spcAft>
+                <a:spcPts val="400"/>
+              </a:spcAft>
+              <a:defRPr sz="2000" b="0">
+                <a:solidFill>
+                  <a:srgbClr val="333333"/>
+                </a:solidFill>
+                <a:latin typeface="Consolas"/>
+              </a:defRPr>
+            </a:pPr>
+            <a:r>
+              <a:t>  `uvm_component_utils(stream_scoreboard)</a:t>
+            </a:r>
+          </a:p>
+          <a:p>
+            <a:pPr>
+              <a:lnSpc>
+                <a:spcPts val="2200"/>
+              </a:lnSpc>
+              <a:spcAft>
+                <a:spcPts val="400"/>
+              </a:spcAft>
+              <a:defRPr sz="2000" b="0">
+                <a:solidFill>
+                  <a:srgbClr val="333333"/>
+                </a:solidFill>
+                <a:latin typeface="Consolas"/>
+              </a:defRPr>
+            </a:pPr>
+          </a:p>
+          <a:p>
+            <a:pPr>
+              <a:lnSpc>
+                <a:spcPts val="2200"/>
+              </a:lnSpc>
+              <a:spcAft>
+                <a:spcPts val="400"/>
+              </a:spcAft>
+              <a:defRPr sz="2000" b="0">
+                <a:solidFill>
+                  <a:srgbClr val="333333"/>
+                </a:solidFill>
+                <a:latin typeface="Consolas"/>
+              </a:defRPr>
+            </a:pPr>
+            <a:r>
+              <a:t>  uvm_analysis_imp #(stream_item, stream_scoreboard) imp_in;</a:t>
+            </a:r>
+          </a:p>
+          <a:p>
+            <a:pPr>
+              <a:lnSpc>
+                <a:spcPts val="2200"/>
+              </a:lnSpc>
+              <a:spcAft>
+                <a:spcPts val="400"/>
+              </a:spcAft>
+              <a:defRPr sz="2000" b="0">
+                <a:solidFill>
+                  <a:srgbClr val="333333"/>
+                </a:solidFill>
+                <a:latin typeface="Consolas"/>
+              </a:defRPr>
+            </a:pPr>
+          </a:p>
+          <a:p>
+            <a:pPr>
+              <a:lnSpc>
+                <a:spcPts val="2200"/>
+              </a:lnSpc>
+              <a:spcAft>
+                <a:spcPts val="400"/>
+              </a:spcAft>
+              <a:defRPr sz="2000" b="0">
+                <a:solidFill>
+                  <a:srgbClr val="333333"/>
+                </a:solidFill>
+                <a:latin typeface="Consolas"/>
+              </a:defRPr>
+            </a:pPr>
+            <a:r>
+              <a:t>  int unsigned num_seen;</a:t>
+            </a:r>
+          </a:p>
+          <a:p>
+            <a:pPr>
+              <a:lnSpc>
+                <a:spcPts val="2200"/>
+              </a:lnSpc>
+              <a:spcAft>
+                <a:spcPts val="400"/>
+              </a:spcAft>
+              <a:defRPr sz="2000" b="0">
+                <a:solidFill>
+                  <a:srgbClr val="333333"/>
+                </a:solidFill>
+                <a:latin typeface="Consolas"/>
+              </a:defRPr>
+            </a:pPr>
+          </a:p>
+          <a:p>
+            <a:pPr>
+              <a:lnSpc>
+                <a:spcPts val="2200"/>
+              </a:lnSpc>
+              <a:spcAft>
+                <a:spcPts val="400"/>
+              </a:spcAft>
+              <a:defRPr sz="2000" b="0">
+                <a:solidFill>
+                  <a:srgbClr val="333333"/>
+                </a:solidFill>
+                <a:latin typeface="Consolas"/>
+              </a:defRPr>
+            </a:pPr>
+            <a:r>
+              <a:t>  function new(string name, uvm_component parent);</a:t>
+            </a:r>
+          </a:p>
+          <a:p>
+            <a:pPr>
+              <a:lnSpc>
+                <a:spcPts val="2200"/>
+              </a:lnSpc>
+              <a:spcAft>
+                <a:spcPts val="400"/>
+              </a:spcAft>
+              <a:defRPr sz="2000" b="0">
+                <a:solidFill>
+                  <a:srgbClr val="333333"/>
+                </a:solidFill>
+                <a:latin typeface="Consolas"/>
+              </a:defRPr>
+            </a:pPr>
+            <a:r>
+              <a:t>    super.new(name, parent);</a:t>
+            </a:r>
+          </a:p>
+          <a:p>
+            <a:pPr>
+              <a:lnSpc>
+                <a:spcPts val="2200"/>
+              </a:lnSpc>
+              <a:spcAft>
+                <a:spcPts val="400"/>
+              </a:spcAft>
+              <a:defRPr sz="2000" b="0">
+                <a:solidFill>
+                  <a:srgbClr val="333333"/>
+                </a:solidFill>
+                <a:latin typeface="Consolas"/>
+              </a:defRPr>
+            </a:pPr>
+            <a:r>
+              <a:t>    imp_in = new("imp_in", this);</a:t>
+            </a:r>
+          </a:p>
+          <a:p>
+            <a:pPr>
+              <a:lnSpc>
+                <a:spcPts val="2200"/>
+              </a:lnSpc>
+              <a:spcAft>
+                <a:spcPts val="400"/>
+              </a:spcAft>
+              <a:defRPr sz="2000" b="0">
+                <a:solidFill>
+                  <a:srgbClr val="333333"/>
+                </a:solidFill>
+                <a:latin typeface="Consolas"/>
+              </a:defRPr>
+            </a:pPr>
+            <a:r>
+              <a:t>    num_seen = 0;</a:t>
+            </a:r>
+          </a:p>
+          <a:p>
+            <a:pPr>
+              <a:lnSpc>
+                <a:spcPts val="2200"/>
+              </a:lnSpc>
+              <a:spcAft>
+                <a:spcPts val="400"/>
+              </a:spcAft>
+              <a:defRPr sz="2000" b="0">
+                <a:solidFill>
+                  <a:srgbClr val="333333"/>
+                </a:solidFill>
+                <a:latin typeface="Consolas"/>
+              </a:defRPr>
+            </a:pPr>
+            <a:r>
+              <a:t>  endfunction</a:t>
+            </a:r>
+          </a:p>
+          <a:p>
+            <a:pPr>
+              <a:lnSpc>
+                <a:spcPts val="2200"/>
+              </a:lnSpc>
+              <a:spcAft>
+                <a:spcPts val="400"/>
+              </a:spcAft>
+              <a:defRPr sz="2000" b="0">
+                <a:solidFill>
+                  <a:srgbClr val="333333"/>
+                </a:solidFill>
+                <a:latin typeface="Consolas"/>
+              </a:defRPr>
+            </a:pPr>
+          </a:p>
+          <a:p>
+            <a:pPr>
+              <a:lnSpc>
+                <a:spcPts val="2200"/>
+              </a:lnSpc>
+              <a:spcAft>
+                <a:spcPts val="400"/>
+              </a:spcAft>
+              <a:defRPr sz="2000" b="0">
+                <a:solidFill>
+                  <a:srgbClr val="333333"/>
+                </a:solidFill>
+                <a:latin typeface="Consolas"/>
+              </a:defRPr>
+            </a:pPr>
+            <a:r>
+              <a:t>  // Called for each transaction seen by the monitor</a:t>
+            </a:r>
+          </a:p>
+          <a:p>
+            <a:pPr>
+              <a:lnSpc>
+                <a:spcPts val="2200"/>
+              </a:lnSpc>
+              <a:spcAft>
+                <a:spcPts val="400"/>
+              </a:spcAft>
+              <a:defRPr sz="2000" b="0">
+                <a:solidFill>
+                  <a:srgbClr val="333333"/>
+                </a:solidFill>
+                <a:latin typeface="Consolas"/>
+              </a:defRPr>
+            </a:pPr>
+            <a:r>
+              <a:t>  function void write(stream_item t);</a:t>
+            </a:r>
+          </a:p>
+          <a:p>
+            <a:pPr>
+              <a:lnSpc>
+                <a:spcPts val="2200"/>
+              </a:lnSpc>
+              <a:spcAft>
+                <a:spcPts val="400"/>
+              </a:spcAft>
+              <a:defRPr sz="2000" b="0">
+                <a:solidFill>
+                  <a:srgbClr val="333333"/>
+                </a:solidFill>
+                <a:latin typeface="Consolas"/>
+              </a:defRPr>
+            </a:pPr>
+            <a:r>
+              <a:t># ...</a:t>
             </a:r>
           </a:p>
         </p:txBody>
@@ -6506,7 +7650,7 @@
               </a:defRPr>
             </a:pPr>
             <a:r>
-              <a:t>Syllabus topics</a:t>
+              <a:t>Key files to study</a:t>
             </a:r>
           </a:p>
         </p:txBody>
@@ -6602,7 +7746,7 @@
               </a:defRPr>
             </a:pPr>
             <a:r>
-              <a:t>1. Environment and Agent Architecture</a:t>
+              <a:t>Open these in the repo</a:t>
             </a:r>
           </a:p>
         </p:txBody>
@@ -6644,7 +7788,7 @@
               </a:defRPr>
             </a:pPr>
             <a:r>
-              <a:t>• Environment and agent architecture (env vs agents vs</a:t>
+              <a:t>• `module4/ENV_DESIGN.md` — env, agent, driver,</a:t>
             </a:r>
           </a:p>
           <a:p>
@@ -6663,7 +7807,7 @@
               </a:defRPr>
             </a:pPr>
             <a:r>
-              <a:t>      tests).</a:t>
+              <a:t>      monitor, sequencer design</a:t>
             </a:r>
           </a:p>
           <a:p>
@@ -6682,7 +7826,7 @@
               </a:defRPr>
             </a:pPr>
             <a:r>
-              <a:t>• Layered testbench structure and reuse across tiers</a:t>
+              <a:t>• `module4/CHECKER_PLAN.md` — scoreboard, reference</a:t>
             </a:r>
           </a:p>
           <a:p>
@@ -6701,7 +7845,159 @@
               </a:defRPr>
             </a:pPr>
             <a:r>
-              <a:t>      and DUT variants.</a:t>
+              <a:t>      model, and assertion strategy</a:t>
+            </a:r>
+          </a:p>
+          <a:p>
+            <a:pPr>
+              <a:lnSpc>
+                <a:spcPts val="2200"/>
+              </a:lnSpc>
+              <a:spcAft>
+                <a:spcPts val="1000"/>
+              </a:spcAft>
+              <a:defRPr sz="2000" b="0">
+                <a:solidFill>
+                  <a:srgbClr val="333333"/>
+                </a:solidFill>
+                <a:latin typeface="Calibri"/>
+              </a:defRPr>
+            </a:pPr>
+            <a:r>
+              <a:t>• `module4/tb/stream_pkg.sv` — reference UVM package</a:t>
+            </a:r>
+          </a:p>
+          <a:p>
+            <a:pPr>
+              <a:lnSpc>
+                <a:spcPts val="2200"/>
+              </a:lnSpc>
+              <a:spcAft>
+                <a:spcPts val="1000"/>
+              </a:spcAft>
+              <a:defRPr sz="2000" b="0">
+                <a:solidFill>
+                  <a:srgbClr val="333333"/>
+                </a:solidFill>
+                <a:latin typeface="Calibri"/>
+              </a:defRPr>
+            </a:pPr>
+            <a:r>
+              <a:t>      (env, agents, scoreboard)</a:t>
+            </a:r>
+          </a:p>
+          <a:p>
+            <a:pPr>
+              <a:lnSpc>
+                <a:spcPts val="2200"/>
+              </a:lnSpc>
+              <a:spcAft>
+                <a:spcPts val="1000"/>
+              </a:spcAft>
+              <a:defRPr sz="2000" b="0">
+                <a:solidFill>
+                  <a:srgbClr val="333333"/>
+                </a:solidFill>
+                <a:latin typeface="Calibri"/>
+              </a:defRPr>
+            </a:pPr>
+            <a:r>
+              <a:t>• `module4/tb/tb_stream_fifo_uvm.sv` — top-level UVM</a:t>
+            </a:r>
+          </a:p>
+          <a:p>
+            <a:pPr>
+              <a:lnSpc>
+                <a:spcPts val="2200"/>
+              </a:lnSpc>
+              <a:spcAft>
+                <a:spcPts val="1000"/>
+              </a:spcAft>
+              <a:defRPr sz="2000" b="0">
+                <a:solidFill>
+                  <a:srgbClr val="333333"/>
+                </a:solidFill>
+                <a:latin typeface="Calibri"/>
+              </a:defRPr>
+            </a:pPr>
+            <a:r>
+              <a:t>      testbench and DUT hookup</a:t>
+            </a:r>
+          </a:p>
+          <a:p>
+            <a:pPr>
+              <a:lnSpc>
+                <a:spcPts val="2200"/>
+              </a:lnSpc>
+              <a:spcAft>
+                <a:spcPts val="1000"/>
+              </a:spcAft>
+              <a:defRPr sz="2000" b="0">
+                <a:solidFill>
+                  <a:srgbClr val="333333"/>
+                </a:solidFill>
+                <a:latin typeface="Calibri"/>
+              </a:defRPr>
+            </a:pPr>
+            <a:r>
+              <a:t>• `common_dut/rtl/stream_fifo.sv` — DUT under</a:t>
+            </a:r>
+          </a:p>
+          <a:p>
+            <a:pPr>
+              <a:lnSpc>
+                <a:spcPts val="2200"/>
+              </a:lnSpc>
+              <a:spcAft>
+                <a:spcPts val="1000"/>
+              </a:spcAft>
+              <a:defRPr sz="2000" b="0">
+                <a:solidFill>
+                  <a:srgbClr val="333333"/>
+                </a:solidFill>
+                <a:latin typeface="Calibri"/>
+              </a:defRPr>
+            </a:pPr>
+            <a:r>
+              <a:t>      verification</a:t>
+            </a:r>
+          </a:p>
+          <a:p>
+            <a:pPr>
+              <a:lnSpc>
+                <a:spcPts val="2200"/>
+              </a:lnSpc>
+              <a:spcAft>
+                <a:spcPts val="1000"/>
+              </a:spcAft>
+              <a:defRPr sz="2000" b="0">
+                <a:solidFill>
+                  <a:srgbClr val="333333"/>
+                </a:solidFill>
+                <a:latin typeface="Calibri"/>
+              </a:defRPr>
+            </a:pPr>
+            <a:r>
+              <a:t>• `scripts/module4.sh` — env/checker doc and TB file</a:t>
+            </a:r>
+          </a:p>
+          <a:p>
+            <a:pPr>
+              <a:lnSpc>
+                <a:spcPts val="2200"/>
+              </a:lnSpc>
+              <a:spcAft>
+                <a:spcPts val="1000"/>
+              </a:spcAft>
+              <a:defRPr sz="2000" b="0">
+                <a:solidFill>
+                  <a:srgbClr val="333333"/>
+                </a:solidFill>
+                <a:latin typeface="Calibri"/>
+              </a:defRPr>
+            </a:pPr>
+            <a:r>
+              <a:t>      checks</a:t>
             </a:r>
           </a:p>
         </p:txBody>
@@ -6771,8 +8067,8 @@
         </p:nvSpPr>
         <p:spPr>
           <a:xfrm>
-            <a:off x="548640" y="411480"/>
-            <a:ext cx="11064240" cy="777240"/>
+            <a:off x="548640" y="2743200"/>
+            <a:ext cx="11064240" cy="1371600"/>
           </a:xfrm>
           <a:prstGeom prst="rect">
             <a:avLst/>
@@ -6785,11 +8081,11 @@
           </a:bodyPr>
           <a:lstStyle/>
           <a:p>
-            <a:pPr>
-              <a:lnSpc>
-                <a:spcPts val="2200"/>
-              </a:lnSpc>
-              <a:defRPr sz="2800" b="1">
+            <a:pPr algn="ctr">
+              <a:lnSpc>
+                <a:spcPts val="2200"/>
+              </a:lnSpc>
+              <a:defRPr sz="3600" b="1">
                 <a:solidFill>
                   <a:srgbClr val="1A1A2E"/>
                 </a:solidFill>
@@ -6797,7 +8093,7 @@
               </a:defRPr>
             </a:pPr>
             <a:r>
-              <a:t>2. Transactions and Sequences</a:t>
+              <a:t>Verification &amp; testing methods</a:t>
             </a:r>
           </a:p>
         </p:txBody>
@@ -6805,105 +8101,6 @@
       <p:sp>
         <p:nvSpPr>
           <p:cNvPr id="3" name="TextBox 2"/>
-          <p:cNvSpPr txBox="1"/>
-          <p:nvPr/>
-        </p:nvSpPr>
-        <p:spPr>
-          <a:xfrm>
-            <a:off x="548640" y="1234440"/>
-            <a:ext cx="11064240" cy="4937760"/>
-          </a:xfrm>
-          <a:prstGeom prst="rect">
-            <a:avLst/>
-          </a:prstGeom>
-          <a:noFill/>
-        </p:spPr>
-        <p:txBody>
-          <a:bodyPr wrap="square">
-            <a:noAutofit/>
-          </a:bodyPr>
-          <a:lstStyle/>
-          <a:p>
-            <a:pPr>
-              <a:lnSpc>
-                <a:spcPts val="2200"/>
-              </a:lnSpc>
-              <a:spcAft>
-                <a:spcPts val="1000"/>
-              </a:spcAft>
-              <a:defRPr sz="2000" b="0">
-                <a:solidFill>
-                  <a:srgbClr val="333333"/>
-                </a:solidFill>
-                <a:latin typeface="Calibri"/>
-              </a:defRPr>
-            </a:pPr>
-            <a:r>
-              <a:t>• Transaction and sequence design aligned with your</a:t>
-            </a:r>
-          </a:p>
-          <a:p>
-            <a:pPr>
-              <a:lnSpc>
-                <a:spcPts val="2200"/>
-              </a:lnSpc>
-              <a:spcAft>
-                <a:spcPts val="1000"/>
-              </a:spcAft>
-              <a:defRPr sz="2000" b="0">
-                <a:solidFill>
-                  <a:srgbClr val="333333"/>
-                </a:solidFill>
-                <a:latin typeface="Calibri"/>
-              </a:defRPr>
-            </a:pPr>
-            <a:r>
-              <a:t>      test plan.</a:t>
-            </a:r>
-          </a:p>
-          <a:p>
-            <a:pPr>
-              <a:lnSpc>
-                <a:spcPts val="2200"/>
-              </a:lnSpc>
-              <a:spcAft>
-                <a:spcPts val="1000"/>
-              </a:spcAft>
-              <a:defRPr sz="2000" b="0">
-                <a:solidFill>
-                  <a:srgbClr val="333333"/>
-                </a:solidFill>
-                <a:latin typeface="Calibri"/>
-              </a:defRPr>
-            </a:pPr>
-            <a:r>
-              <a:t>• Mapping test intents to UVM sequences and</a:t>
-            </a:r>
-          </a:p>
-          <a:p>
-            <a:pPr>
-              <a:lnSpc>
-                <a:spcPts val="2200"/>
-              </a:lnSpc>
-              <a:spcAft>
-                <a:spcPts val="1000"/>
-              </a:spcAft>
-              <a:defRPr sz="2000" b="0">
-                <a:solidFill>
-                  <a:srgbClr val="333333"/>
-                </a:solidFill>
-                <a:latin typeface="Calibri"/>
-              </a:defRPr>
-            </a:pPr>
-            <a:r>
-              <a:t>      configuration.</a:t>
-            </a:r>
-          </a:p>
-        </p:txBody>
-      </p:sp>
-      <p:sp>
-        <p:nvSpPr>
-          <p:cNvPr id="4" name="TextBox 3"/>
           <p:cNvSpPr txBox="1"/>
           <p:nvPr/>
         </p:nvSpPr>
@@ -6992,7 +8189,7 @@
               </a:defRPr>
             </a:pPr>
             <a:r>
-              <a:t>3. Drivers and Monitors</a:t>
+              <a:t>1. Stimulus and checking flow</a:t>
             </a:r>
           </a:p>
         </p:txBody>
@@ -7006,7 +8203,7 @@
         <p:spPr>
           <a:xfrm>
             <a:off x="548640" y="1234440"/>
-            <a:ext cx="11064240" cy="4937760"/>
+            <a:ext cx="5303520" cy="4754880"/>
           </a:xfrm>
           <a:prstGeom prst="rect">
             <a:avLst/>
@@ -7034,7 +8231,7 @@
               </a:defRPr>
             </a:pPr>
             <a:r>
-              <a:t>• Driver and monitor behavior, including resets,</a:t>
+              <a:t>• Sequences → driver → DUT →</a:t>
             </a:r>
           </a:p>
           <a:p>
@@ -7053,14 +8250,114 @@
               </a:defRPr>
             </a:pPr>
             <a:r>
-              <a:t>      backpressure, and error handling.</a:t>
-            </a:r>
-          </a:p>
-        </p:txBody>
-      </p:sp>
-      <p:sp>
-        <p:nvSpPr>
-          <p:cNvPr id="4" name="TextBox 3"/>
+              <a:t>      monitor → scoreboard compare and</a:t>
+            </a:r>
+          </a:p>
+          <a:p>
+            <a:pPr>
+              <a:lnSpc>
+                <a:spcPts val="2200"/>
+              </a:lnSpc>
+              <a:spcAft>
+                <a:spcPts val="1000"/>
+              </a:spcAft>
+              <a:defRPr sz="2000" b="0">
+                <a:solidFill>
+                  <a:srgbClr val="333333"/>
+                </a:solidFill>
+                <a:latin typeface="Calibri"/>
+              </a:defRPr>
+            </a:pPr>
+            <a:r>
+              <a:t>      assertion sampling.</a:t>
+            </a:r>
+          </a:p>
+          <a:p>
+            <a:pPr>
+              <a:lnSpc>
+                <a:spcPts val="2200"/>
+              </a:lnSpc>
+              <a:spcAft>
+                <a:spcPts val="1000"/>
+              </a:spcAft>
+              <a:defRPr sz="2000" b="0">
+                <a:solidFill>
+                  <a:srgbClr val="333333"/>
+                </a:solidFill>
+                <a:latin typeface="Calibri"/>
+              </a:defRPr>
+            </a:pPr>
+            <a:r>
+              <a:t>• Reset, backpressure, and error-</a:t>
+            </a:r>
+          </a:p>
+          <a:p>
+            <a:pPr>
+              <a:lnSpc>
+                <a:spcPts val="2200"/>
+              </a:lnSpc>
+              <a:spcAft>
+                <a:spcPts val="1000"/>
+              </a:spcAft>
+              <a:defRPr sz="2000" b="0">
+                <a:solidFill>
+                  <a:srgbClr val="333333"/>
+                </a:solidFill>
+                <a:latin typeface="Calibri"/>
+              </a:defRPr>
+            </a:pPr>
+            <a:r>
+              <a:t>      injection scenarios exercised</a:t>
+            </a:r>
+          </a:p>
+          <a:p>
+            <a:pPr>
+              <a:lnSpc>
+                <a:spcPts val="2200"/>
+              </a:lnSpc>
+              <a:spcAft>
+                <a:spcPts val="1000"/>
+              </a:spcAft>
+              <a:defRPr sz="2000" b="0">
+                <a:solidFill>
+                  <a:srgbClr val="333333"/>
+                </a:solidFill>
+                <a:latin typeface="Calibri"/>
+              </a:defRPr>
+            </a:pPr>
+            <a:r>
+              <a:t>      per `TEST_PLAN.md`.</a:t>
+            </a:r>
+          </a:p>
+        </p:txBody>
+      </p:sp>
+      <p:pic>
+        <p:nvPicPr>
+          <p:cNvPr id="4" name="Picture 3" descr="testing_methods.png"/>
+          <p:cNvPicPr>
+            <a:picLocks noChangeAspect="1"/>
+          </p:cNvPicPr>
+          <p:nvPr/>
+        </p:nvPicPr>
+        <p:blipFill>
+          <a:blip r:embed="rId2"/>
+          <a:stretch>
+            <a:fillRect/>
+          </a:stretch>
+        </p:blipFill>
+        <p:spPr>
+          <a:xfrm>
+            <a:off x="6172200" y="2094547"/>
+            <a:ext cx="5394960" cy="3034665"/>
+          </a:xfrm>
+          <a:prstGeom prst="rect">
+            <a:avLst/>
+          </a:prstGeom>
+        </p:spPr>
+      </p:pic>
+      <p:sp>
+        <p:nvSpPr>
+          <p:cNvPr id="5" name="TextBox 4"/>
           <p:cNvSpPr txBox="1"/>
           <p:nvPr/>
         </p:nvSpPr>
@@ -7306,7 +8603,7 @@
               </a:defRPr>
             </a:pPr>
             <a:r>
-              <a:t>4. Scoreboards and Reference Models</a:t>
+              <a:t>2. Assertion-based verification (ABV)</a:t>
             </a:r>
           </a:p>
         </p:txBody>
@@ -7348,7 +8645,83 @@
               </a:defRPr>
             </a:pPr>
             <a:r>
-              <a:t>• Scoreboard and reference model design.</a:t>
+              <a:t>• Place assertions close to interfaces; use</a:t>
+            </a:r>
+          </a:p>
+          <a:p>
+            <a:pPr>
+              <a:lnSpc>
+                <a:spcPts val="2200"/>
+              </a:lnSpc>
+              <a:spcAft>
+                <a:spcPts val="1000"/>
+              </a:spcAft>
+              <a:defRPr sz="2000" b="0">
+                <a:solidFill>
+                  <a:srgbClr val="333333"/>
+                </a:solidFill>
+                <a:latin typeface="Calibri"/>
+              </a:defRPr>
+            </a:pPr>
+            <a:r>
+              <a:t>      `assert`/`assume` policy consistent with your</a:t>
+            </a:r>
+          </a:p>
+          <a:p>
+            <a:pPr>
+              <a:lnSpc>
+                <a:spcPts val="2200"/>
+              </a:lnSpc>
+              <a:spcAft>
+                <a:spcPts val="1000"/>
+              </a:spcAft>
+              <a:defRPr sz="2000" b="0">
+                <a:solidFill>
+                  <a:srgbClr val="333333"/>
+                </a:solidFill>
+                <a:latin typeface="Calibri"/>
+              </a:defRPr>
+            </a:pPr>
+            <a:r>
+              <a:t>      simulator f…</a:t>
+            </a:r>
+          </a:p>
+          <a:p>
+            <a:pPr>
+              <a:lnSpc>
+                <a:spcPts val="2200"/>
+              </a:lnSpc>
+              <a:spcAft>
+                <a:spcPts val="1000"/>
+              </a:spcAft>
+              <a:defRPr sz="2000" b="0">
+                <a:solidFill>
+                  <a:srgbClr val="333333"/>
+                </a:solidFill>
+                <a:latin typeface="Calibri"/>
+              </a:defRPr>
+            </a:pPr>
+            <a:r>
+              <a:t>• Document waiver and severity policy for known benign</a:t>
+            </a:r>
+          </a:p>
+          <a:p>
+            <a:pPr>
+              <a:lnSpc>
+                <a:spcPts val="2200"/>
+              </a:lnSpc>
+              <a:spcAft>
+                <a:spcPts val="1000"/>
+              </a:spcAft>
+              <a:defRPr sz="2000" b="0">
+                <a:solidFill>
+                  <a:srgbClr val="333333"/>
+                </a:solidFill>
+                <a:latin typeface="Calibri"/>
+              </a:defRPr>
+            </a:pPr>
+            <a:r>
+              <a:t>      cases.</a:t>
             </a:r>
           </a:p>
         </p:txBody>
@@ -7444,7 +8817,7 @@
               </a:defRPr>
             </a:pPr>
             <a:r>
-              <a:t>5. Assertions and Checking Strategy</a:t>
+              <a:t>3. Environment review</a:t>
             </a:r>
           </a:p>
         </p:txBody>
@@ -7486,7 +8859,7 @@
               </a:defRPr>
             </a:pPr>
             <a:r>
-              <a:t>• Assertion strategy: what to check with SVA vs</a:t>
+              <a:t>• Peer/self review of `ENV_DESIGN.md` and</a:t>
             </a:r>
           </a:p>
           <a:p>
@@ -7505,7 +8878,45 @@
               </a:defRPr>
             </a:pPr>
             <a:r>
-              <a:t>      scoreboards vs tests.</a:t>
+              <a:t>      `CHECKER_PLAN.md` before expanding regression scope.</a:t>
+            </a:r>
+          </a:p>
+          <a:p>
+            <a:pPr>
+              <a:lnSpc>
+                <a:spcPts val="2200"/>
+              </a:lnSpc>
+              <a:spcAft>
+                <a:spcPts val="1000"/>
+              </a:spcAft>
+              <a:defRPr sz="2000" b="0">
+                <a:solidFill>
+                  <a:srgbClr val="333333"/>
+                </a:solidFill>
+                <a:latin typeface="Calibri"/>
+              </a:defRPr>
+            </a:pPr>
+            <a:r>
+              <a:t>• `./scripts/module4.sh --check` validates design docs</a:t>
+            </a:r>
+          </a:p>
+          <a:p>
+            <a:pPr>
+              <a:lnSpc>
+                <a:spcPts val="2200"/>
+              </a:lnSpc>
+              <a:spcAft>
+                <a:spcPts val="1000"/>
+              </a:spcAft>
+              <a:defRPr sz="2000" b="0">
+                <a:solidFill>
+                  <a:srgbClr val="333333"/>
+                </a:solidFill>
+                <a:latin typeface="Calibri"/>
+              </a:defRPr>
+            </a:pPr>
+            <a:r>
+              <a:t>      and TB file presence.</a:t>
             </a:r>
           </a:p>
         </p:txBody>
@@ -7575,8 +8986,8 @@
         </p:nvSpPr>
         <p:spPr>
           <a:xfrm>
-            <a:off x="548640" y="2743200"/>
-            <a:ext cx="11064240" cy="1371600"/>
+            <a:off x="548640" y="411480"/>
+            <a:ext cx="11064240" cy="777240"/>
           </a:xfrm>
           <a:prstGeom prst="rect">
             <a:avLst/>
@@ -7589,11 +9000,11 @@
           </a:bodyPr>
           <a:lstStyle/>
           <a:p>
-            <a:pPr algn="ctr">
-              <a:lnSpc>
-                <a:spcPts val="2200"/>
-              </a:lnSpc>
-              <a:defRPr sz="3600" b="1">
+            <a:pPr>
+              <a:lnSpc>
+                <a:spcPts val="2200"/>
+              </a:lnSpc>
+              <a:defRPr sz="2800" b="1">
                 <a:solidFill>
                   <a:srgbClr val="1A1A2E"/>
                 </a:solidFill>
@@ -7601,7 +9012,7 @@
               </a:defRPr>
             </a:pPr>
             <a:r>
-              <a:t>Hands-on examples</a:t>
+              <a:t>stream_test — run_phase</a:t>
             </a:r>
           </a:p>
         </p:txBody>
@@ -7609,6 +9020,339 @@
       <p:sp>
         <p:nvSpPr>
           <p:cNvPr id="3" name="TextBox 2"/>
+          <p:cNvSpPr txBox="1"/>
+          <p:nvPr/>
+        </p:nvSpPr>
+        <p:spPr>
+          <a:xfrm>
+            <a:off x="548640" y="1143000"/>
+            <a:ext cx="11064240" cy="5029200"/>
+          </a:xfrm>
+          <a:prstGeom prst="rect">
+            <a:avLst/>
+          </a:prstGeom>
+          <a:solidFill>
+            <a:srgbClr val="F4F4F4"/>
+          </a:solidFill>
+        </p:spPr>
+        <p:txBody>
+          <a:bodyPr wrap="square">
+            <a:noAutofit/>
+          </a:bodyPr>
+          <a:lstStyle/>
+          <a:p>
+            <a:pPr>
+              <a:lnSpc>
+                <a:spcPts val="2200"/>
+              </a:lnSpc>
+              <a:spcAft>
+                <a:spcPts val="400"/>
+              </a:spcAft>
+              <a:defRPr sz="2000" b="0">
+                <a:solidFill>
+                  <a:srgbClr val="333333"/>
+                </a:solidFill>
+                <a:latin typeface="Consolas"/>
+              </a:defRPr>
+            </a:pPr>
+            <a:r>
+              <a:t>class stream_test extends uvm_test;</a:t>
+            </a:r>
+          </a:p>
+          <a:p>
+            <a:pPr>
+              <a:lnSpc>
+                <a:spcPts val="2200"/>
+              </a:lnSpc>
+              <a:spcAft>
+                <a:spcPts val="400"/>
+              </a:spcAft>
+              <a:defRPr sz="2000" b="0">
+                <a:solidFill>
+                  <a:srgbClr val="333333"/>
+                </a:solidFill>
+                <a:latin typeface="Consolas"/>
+              </a:defRPr>
+            </a:pPr>
+          </a:p>
+          <a:p>
+            <a:pPr>
+              <a:lnSpc>
+                <a:spcPts val="2200"/>
+              </a:lnSpc>
+              <a:spcAft>
+                <a:spcPts val="400"/>
+              </a:spcAft>
+              <a:defRPr sz="2000" b="0">
+                <a:solidFill>
+                  <a:srgbClr val="333333"/>
+                </a:solidFill>
+                <a:latin typeface="Consolas"/>
+              </a:defRPr>
+            </a:pPr>
+            <a:r>
+              <a:t>  `uvm_component_utils(stream_test)</a:t>
+            </a:r>
+          </a:p>
+          <a:p>
+            <a:pPr>
+              <a:lnSpc>
+                <a:spcPts val="2200"/>
+              </a:lnSpc>
+              <a:spcAft>
+                <a:spcPts val="400"/>
+              </a:spcAft>
+              <a:defRPr sz="2000" b="0">
+                <a:solidFill>
+                  <a:srgbClr val="333333"/>
+                </a:solidFill>
+                <a:latin typeface="Consolas"/>
+              </a:defRPr>
+            </a:pPr>
+          </a:p>
+          <a:p>
+            <a:pPr>
+              <a:lnSpc>
+                <a:spcPts val="2200"/>
+              </a:lnSpc>
+              <a:spcAft>
+                <a:spcPts val="400"/>
+              </a:spcAft>
+              <a:defRPr sz="2000" b="0">
+                <a:solidFill>
+                  <a:srgbClr val="333333"/>
+                </a:solidFill>
+                <a:latin typeface="Consolas"/>
+              </a:defRPr>
+            </a:pPr>
+            <a:r>
+              <a:t>  stream_env env;</a:t>
+            </a:r>
+          </a:p>
+          <a:p>
+            <a:pPr>
+              <a:lnSpc>
+                <a:spcPts val="2200"/>
+              </a:lnSpc>
+              <a:spcAft>
+                <a:spcPts val="400"/>
+              </a:spcAft>
+              <a:defRPr sz="2000" b="0">
+                <a:solidFill>
+                  <a:srgbClr val="333333"/>
+                </a:solidFill>
+                <a:latin typeface="Consolas"/>
+              </a:defRPr>
+            </a:pPr>
+          </a:p>
+          <a:p>
+            <a:pPr>
+              <a:lnSpc>
+                <a:spcPts val="2200"/>
+              </a:lnSpc>
+              <a:spcAft>
+                <a:spcPts val="400"/>
+              </a:spcAft>
+              <a:defRPr sz="2000" b="0">
+                <a:solidFill>
+                  <a:srgbClr val="333333"/>
+                </a:solidFill>
+                <a:latin typeface="Consolas"/>
+              </a:defRPr>
+            </a:pPr>
+            <a:r>
+              <a:t>  function new(string name, uvm_component parent);</a:t>
+            </a:r>
+          </a:p>
+          <a:p>
+            <a:pPr>
+              <a:lnSpc>
+                <a:spcPts val="2200"/>
+              </a:lnSpc>
+              <a:spcAft>
+                <a:spcPts val="400"/>
+              </a:spcAft>
+              <a:defRPr sz="2000" b="0">
+                <a:solidFill>
+                  <a:srgbClr val="333333"/>
+                </a:solidFill>
+                <a:latin typeface="Consolas"/>
+              </a:defRPr>
+            </a:pPr>
+            <a:r>
+              <a:t>    super.new(name, parent);</a:t>
+            </a:r>
+          </a:p>
+          <a:p>
+            <a:pPr>
+              <a:lnSpc>
+                <a:spcPts val="2200"/>
+              </a:lnSpc>
+              <a:spcAft>
+                <a:spcPts val="400"/>
+              </a:spcAft>
+              <a:defRPr sz="2000" b="0">
+                <a:solidFill>
+                  <a:srgbClr val="333333"/>
+                </a:solidFill>
+                <a:latin typeface="Consolas"/>
+              </a:defRPr>
+            </a:pPr>
+            <a:r>
+              <a:t>  endfunction</a:t>
+            </a:r>
+          </a:p>
+          <a:p>
+            <a:pPr>
+              <a:lnSpc>
+                <a:spcPts val="2200"/>
+              </a:lnSpc>
+              <a:spcAft>
+                <a:spcPts val="400"/>
+              </a:spcAft>
+              <a:defRPr sz="2000" b="0">
+                <a:solidFill>
+                  <a:srgbClr val="333333"/>
+                </a:solidFill>
+                <a:latin typeface="Consolas"/>
+              </a:defRPr>
+            </a:pPr>
+          </a:p>
+          <a:p>
+            <a:pPr>
+              <a:lnSpc>
+                <a:spcPts val="2200"/>
+              </a:lnSpc>
+              <a:spcAft>
+                <a:spcPts val="400"/>
+              </a:spcAft>
+              <a:defRPr sz="2000" b="0">
+                <a:solidFill>
+                  <a:srgbClr val="333333"/>
+                </a:solidFill>
+                <a:latin typeface="Consolas"/>
+              </a:defRPr>
+            </a:pPr>
+            <a:r>
+              <a:t>  function void build_phase(uvm_phase phase);</a:t>
+            </a:r>
+          </a:p>
+          <a:p>
+            <a:pPr>
+              <a:lnSpc>
+                <a:spcPts val="2200"/>
+              </a:lnSpc>
+              <a:spcAft>
+                <a:spcPts val="400"/>
+              </a:spcAft>
+              <a:defRPr sz="2000" b="0">
+                <a:solidFill>
+                  <a:srgbClr val="333333"/>
+                </a:solidFill>
+                <a:latin typeface="Consolas"/>
+              </a:defRPr>
+            </a:pPr>
+            <a:r>
+              <a:t>    super.build_phase(phase);</a:t>
+            </a:r>
+          </a:p>
+          <a:p>
+            <a:pPr>
+              <a:lnSpc>
+                <a:spcPts val="2200"/>
+              </a:lnSpc>
+              <a:spcAft>
+                <a:spcPts val="400"/>
+              </a:spcAft>
+              <a:defRPr sz="2000" b="0">
+                <a:solidFill>
+                  <a:srgbClr val="333333"/>
+                </a:solidFill>
+                <a:latin typeface="Consolas"/>
+              </a:defRPr>
+            </a:pPr>
+            <a:r>
+              <a:t>    env = stream_env::type_id::create("env", this);</a:t>
+            </a:r>
+          </a:p>
+          <a:p>
+            <a:pPr>
+              <a:lnSpc>
+                <a:spcPts val="2200"/>
+              </a:lnSpc>
+              <a:spcAft>
+                <a:spcPts val="400"/>
+              </a:spcAft>
+              <a:defRPr sz="2000" b="0">
+                <a:solidFill>
+                  <a:srgbClr val="333333"/>
+                </a:solidFill>
+                <a:latin typeface="Consolas"/>
+              </a:defRPr>
+            </a:pPr>
+            <a:r>
+              <a:t>  endfunction</a:t>
+            </a:r>
+          </a:p>
+          <a:p>
+            <a:pPr>
+              <a:lnSpc>
+                <a:spcPts val="2200"/>
+              </a:lnSpc>
+              <a:spcAft>
+                <a:spcPts val="400"/>
+              </a:spcAft>
+              <a:defRPr sz="2000" b="0">
+                <a:solidFill>
+                  <a:srgbClr val="333333"/>
+                </a:solidFill>
+                <a:latin typeface="Consolas"/>
+              </a:defRPr>
+            </a:pPr>
+          </a:p>
+          <a:p>
+            <a:pPr>
+              <a:lnSpc>
+                <a:spcPts val="2200"/>
+              </a:lnSpc>
+              <a:spcAft>
+                <a:spcPts val="400"/>
+              </a:spcAft>
+              <a:defRPr sz="2000" b="0">
+                <a:solidFill>
+                  <a:srgbClr val="333333"/>
+                </a:solidFill>
+                <a:latin typeface="Consolas"/>
+              </a:defRPr>
+            </a:pPr>
+            <a:r>
+              <a:t>  task run_phase(uvm_phase phase);</a:t>
+            </a:r>
+          </a:p>
+          <a:p>
+            <a:pPr>
+              <a:lnSpc>
+                <a:spcPts val="2200"/>
+              </a:lnSpc>
+              <a:spcAft>
+                <a:spcPts val="400"/>
+              </a:spcAft>
+              <a:defRPr sz="2000" b="0">
+                <a:solidFill>
+                  <a:srgbClr val="333333"/>
+                </a:solidFill>
+                <a:latin typeface="Consolas"/>
+              </a:defRPr>
+            </a:pPr>
+            <a:r>
+              <a:t># ...</a:t>
+            </a:r>
+          </a:p>
+        </p:txBody>
+      </p:sp>
+      <p:sp>
+        <p:nvSpPr>
+          <p:cNvPr id="4" name="TextBox 3"/>
           <p:cNvSpPr txBox="1"/>
           <p:nvPr/>
         </p:nvSpPr>
@@ -7671,8 +9415,8 @@
         </p:nvSpPr>
         <p:spPr>
           <a:xfrm>
-            <a:off x="548640" y="411480"/>
-            <a:ext cx="11064240" cy="777240"/>
+            <a:off x="548640" y="2743200"/>
+            <a:ext cx="11064240" cy="1371600"/>
           </a:xfrm>
           <a:prstGeom prst="rect">
             <a:avLst/>
@@ -7685,11 +9429,11 @@
           </a:bodyPr>
           <a:lstStyle/>
           <a:p>
-            <a:pPr>
-              <a:lnSpc>
-                <a:spcPts val="2200"/>
-              </a:lnSpc>
-              <a:defRPr sz="2800" b="1">
+            <a:pPr algn="ctr">
+              <a:lnSpc>
+                <a:spcPts val="2200"/>
+              </a:lnSpc>
+              <a:defRPr sz="3600" b="1">
                 <a:solidFill>
                   <a:srgbClr val="1A1A2E"/>
                 </a:solidFill>
@@ -7697,7 +9441,7 @@
               </a:defRPr>
             </a:pPr>
             <a:r>
-              <a:t>Module 4 self-check</a:t>
+              <a:t>Syllabus topics</a:t>
             </a:r>
           </a:p>
         </p:txBody>
@@ -7705,74 +9449,6 @@
       <p:sp>
         <p:nvSpPr>
           <p:cNvPr id="3" name="TextBox 2"/>
-          <p:cNvSpPr txBox="1"/>
-          <p:nvPr/>
-        </p:nvSpPr>
-        <p:spPr>
-          <a:xfrm>
-            <a:off x="548640" y="1051560"/>
-            <a:ext cx="11064240" cy="914400"/>
-          </a:xfrm>
-          <a:prstGeom prst="rect">
-            <a:avLst/>
-          </a:prstGeom>
-          <a:solidFill>
-            <a:srgbClr val="F4F4F4"/>
-          </a:solidFill>
-        </p:spPr>
-        <p:txBody>
-          <a:bodyPr wrap="square">
-            <a:noAutofit/>
-          </a:bodyPr>
-          <a:lstStyle/>
-          <a:p>
-            <a:pPr>
-              <a:lnSpc>
-                <a:spcPts val="2200"/>
-              </a:lnSpc>
-              <a:spcAft>
-                <a:spcPts val="200"/>
-              </a:spcAft>
-              <a:defRPr sz="2000" b="0">
-                <a:solidFill>
-                  <a:srgbClr val="333333"/>
-                </a:solidFill>
-                <a:latin typeface="Consolas"/>
-              </a:defRPr>
-            </a:pPr>
-            <a:r>
-              <a:t>$ ./scripts/module4.sh --help</a:t>
-            </a:r>
-          </a:p>
-        </p:txBody>
-      </p:sp>
-      <p:pic>
-        <p:nvPicPr>
-          <p:cNvPr id="4" name="Picture 3" descr="module4_check.png"/>
-          <p:cNvPicPr>
-            <a:picLocks noChangeAspect="1"/>
-          </p:cNvPicPr>
-          <p:nvPr/>
-        </p:nvPicPr>
-        <p:blipFill>
-          <a:blip r:embed="rId2"/>
-          <a:stretch>
-            <a:fillRect/>
-          </a:stretch>
-        </p:blipFill>
-        <p:spPr>
-          <a:xfrm>
-            <a:off x="548640" y="1965960"/>
-            <a:ext cx="7071358" cy="3977639"/>
-          </a:xfrm>
-          <a:prstGeom prst="rect">
-            <a:avLst/>
-          </a:prstGeom>
-        </p:spPr>
-      </p:pic>
-      <p:sp>
-        <p:nvSpPr>
-          <p:cNvPr id="5" name="TextBox 4"/>
           <p:cNvSpPr txBox="1"/>
           <p:nvPr/>
         </p:nvSpPr>
@@ -7861,7 +9537,7 @@
               </a:defRPr>
             </a:pPr>
             <a:r>
-              <a:t>Exercise scaffold</a:t>
+              <a:t>1. Environment and Agent Architecture</a:t>
             </a:r>
           </a:p>
         </p:txBody>
@@ -7874,15 +9550,13 @@
         </p:nvSpPr>
         <p:spPr>
           <a:xfrm>
-            <a:off x="548640" y="1143000"/>
-            <a:ext cx="11064240" cy="5029200"/>
+            <a:off x="548640" y="1234440"/>
+            <a:ext cx="11064240" cy="4937760"/>
           </a:xfrm>
           <a:prstGeom prst="rect">
             <a:avLst/>
           </a:prstGeom>
-          <a:solidFill>
-            <a:srgbClr val="F4F4F4"/>
-          </a:solidFill>
+          <a:noFill/>
         </p:spPr>
         <p:txBody>
           <a:bodyPr wrap="square">
@@ -7895,17 +9569,74 @@
                 <a:spcPts val="2200"/>
               </a:lnSpc>
               <a:spcAft>
-                <a:spcPts val="400"/>
-              </a:spcAft>
-              <a:defRPr sz="2000" b="0">
-                <a:solidFill>
-                  <a:srgbClr val="333333"/>
-                </a:solidFill>
-                <a:latin typeface="Consolas"/>
-              </a:defRPr>
-            </a:pPr>
-            <a:r>
-              <a:t>./scripts/module4.sh --scaffold</a:t>
+                <a:spcPts val="1000"/>
+              </a:spcAft>
+              <a:defRPr sz="2000" b="0">
+                <a:solidFill>
+                  <a:srgbClr val="333333"/>
+                </a:solidFill>
+                <a:latin typeface="Calibri"/>
+              </a:defRPr>
+            </a:pPr>
+            <a:r>
+              <a:t>• Environment and agent architecture (env vs agents vs</a:t>
+            </a:r>
+          </a:p>
+          <a:p>
+            <a:pPr>
+              <a:lnSpc>
+                <a:spcPts val="2200"/>
+              </a:lnSpc>
+              <a:spcAft>
+                <a:spcPts val="1000"/>
+              </a:spcAft>
+              <a:defRPr sz="2000" b="0">
+                <a:solidFill>
+                  <a:srgbClr val="333333"/>
+                </a:solidFill>
+                <a:latin typeface="Calibri"/>
+              </a:defRPr>
+            </a:pPr>
+            <a:r>
+              <a:t>      tests).</a:t>
+            </a:r>
+          </a:p>
+          <a:p>
+            <a:pPr>
+              <a:lnSpc>
+                <a:spcPts val="2200"/>
+              </a:lnSpc>
+              <a:spcAft>
+                <a:spcPts val="1000"/>
+              </a:spcAft>
+              <a:defRPr sz="2000" b="0">
+                <a:solidFill>
+                  <a:srgbClr val="333333"/>
+                </a:solidFill>
+                <a:latin typeface="Calibri"/>
+              </a:defRPr>
+            </a:pPr>
+            <a:r>
+              <a:t>• Layered testbench structure and reuse across tiers</a:t>
+            </a:r>
+          </a:p>
+          <a:p>
+            <a:pPr>
+              <a:lnSpc>
+                <a:spcPts val="2200"/>
+              </a:lnSpc>
+              <a:spcAft>
+                <a:spcPts val="1000"/>
+              </a:spcAft>
+              <a:defRPr sz="2000" b="0">
+                <a:solidFill>
+                  <a:srgbClr val="333333"/>
+                </a:solidFill>
+                <a:latin typeface="Calibri"/>
+              </a:defRPr>
+            </a:pPr>
+            <a:r>
+              <a:t>      and DUT variants.</a:t>
             </a:r>
           </a:p>
         </p:txBody>
@@ -8001,7 +9732,7 @@
               </a:defRPr>
             </a:pPr>
             <a:r>
-              <a:t>Demo: Environment design template</a:t>
+              <a:t>2. Transactions and Sequences</a:t>
             </a:r>
           </a:p>
         </p:txBody>
@@ -8014,15 +9745,13 @@
         </p:nvSpPr>
         <p:spPr>
           <a:xfrm>
-            <a:off x="548640" y="1051560"/>
-            <a:ext cx="11064240" cy="914400"/>
+            <a:off x="548640" y="1234440"/>
+            <a:ext cx="11064240" cy="4937760"/>
           </a:xfrm>
           <a:prstGeom prst="rect">
             <a:avLst/>
           </a:prstGeom>
-          <a:solidFill>
-            <a:srgbClr val="F4F4F4"/>
-          </a:solidFill>
+          <a:noFill/>
         </p:spPr>
         <p:txBody>
           <a:bodyPr wrap="square">
@@ -8035,48 +9764,81 @@
                 <a:spcPts val="2200"/>
               </a:lnSpc>
               <a:spcAft>
-                <a:spcPts val="200"/>
-              </a:spcAft>
-              <a:defRPr sz="2000" b="0">
-                <a:solidFill>
-                  <a:srgbClr val="333333"/>
-                </a:solidFill>
-                <a:latin typeface="Consolas"/>
-              </a:defRPr>
-            </a:pPr>
-            <a:r>
-              <a:t>$ head -30 module4/templates/ENV_DESIGN.md</a:t>
-            </a:r>
-          </a:p>
-        </p:txBody>
-      </p:sp>
-      <p:pic>
-        <p:nvPicPr>
-          <p:cNvPr id="4" name="Picture 3" descr="ex01_env_design.png"/>
-          <p:cNvPicPr>
-            <a:picLocks noChangeAspect="1"/>
-          </p:cNvPicPr>
-          <p:nvPr/>
-        </p:nvPicPr>
-        <p:blipFill>
-          <a:blip r:embed="rId2"/>
-          <a:stretch>
-            <a:fillRect/>
-          </a:stretch>
-        </p:blipFill>
-        <p:spPr>
-          <a:xfrm>
-            <a:off x="548640" y="1965960"/>
-            <a:ext cx="7071358" cy="3977639"/>
-          </a:xfrm>
-          <a:prstGeom prst="rect">
-            <a:avLst/>
-          </a:prstGeom>
-        </p:spPr>
-      </p:pic>
-      <p:sp>
-        <p:nvSpPr>
-          <p:cNvPr id="5" name="TextBox 4"/>
+                <a:spcPts val="1000"/>
+              </a:spcAft>
+              <a:defRPr sz="2000" b="0">
+                <a:solidFill>
+                  <a:srgbClr val="333333"/>
+                </a:solidFill>
+                <a:latin typeface="Calibri"/>
+              </a:defRPr>
+            </a:pPr>
+            <a:r>
+              <a:t>• Transaction and sequence design aligned with your</a:t>
+            </a:r>
+          </a:p>
+          <a:p>
+            <a:pPr>
+              <a:lnSpc>
+                <a:spcPts val="2200"/>
+              </a:lnSpc>
+              <a:spcAft>
+                <a:spcPts val="1000"/>
+              </a:spcAft>
+              <a:defRPr sz="2000" b="0">
+                <a:solidFill>
+                  <a:srgbClr val="333333"/>
+                </a:solidFill>
+                <a:latin typeface="Calibri"/>
+              </a:defRPr>
+            </a:pPr>
+            <a:r>
+              <a:t>      test plan.</a:t>
+            </a:r>
+          </a:p>
+          <a:p>
+            <a:pPr>
+              <a:lnSpc>
+                <a:spcPts val="2200"/>
+              </a:lnSpc>
+              <a:spcAft>
+                <a:spcPts val="1000"/>
+              </a:spcAft>
+              <a:defRPr sz="2000" b="0">
+                <a:solidFill>
+                  <a:srgbClr val="333333"/>
+                </a:solidFill>
+                <a:latin typeface="Calibri"/>
+              </a:defRPr>
+            </a:pPr>
+            <a:r>
+              <a:t>• Mapping test intents to UVM sequences and</a:t>
+            </a:r>
+          </a:p>
+          <a:p>
+            <a:pPr>
+              <a:lnSpc>
+                <a:spcPts val="2200"/>
+              </a:lnSpc>
+              <a:spcAft>
+                <a:spcPts val="1000"/>
+              </a:spcAft>
+              <a:defRPr sz="2000" b="0">
+                <a:solidFill>
+                  <a:srgbClr val="333333"/>
+                </a:solidFill>
+                <a:latin typeface="Calibri"/>
+              </a:defRPr>
+            </a:pPr>
+            <a:r>
+              <a:t>      configuration.</a:t>
+            </a:r>
+          </a:p>
+        </p:txBody>
+      </p:sp>
+      <p:sp>
+        <p:nvSpPr>
+          <p:cNvPr id="4" name="TextBox 3"/>
           <p:cNvSpPr txBox="1"/>
           <p:nvPr/>
         </p:nvSpPr>
@@ -8165,7 +9927,7 @@
               </a:defRPr>
             </a:pPr>
             <a:r>
-              <a:t>Demo: Checker plan template</a:t>
+              <a:t>3. Drivers and Monitors</a:t>
             </a:r>
           </a:p>
         </p:txBody>
@@ -8178,15 +9940,13 @@
         </p:nvSpPr>
         <p:spPr>
           <a:xfrm>
-            <a:off x="548640" y="1051560"/>
-            <a:ext cx="11064240" cy="914400"/>
+            <a:off x="548640" y="1234440"/>
+            <a:ext cx="11064240" cy="4937760"/>
           </a:xfrm>
           <a:prstGeom prst="rect">
             <a:avLst/>
           </a:prstGeom>
-          <a:solidFill>
-            <a:srgbClr val="F4F4F4"/>
-          </a:solidFill>
+          <a:noFill/>
         </p:spPr>
         <p:txBody>
           <a:bodyPr wrap="square">
@@ -8199,48 +9959,43 @@
                 <a:spcPts val="2200"/>
               </a:lnSpc>
               <a:spcAft>
-                <a:spcPts val="200"/>
-              </a:spcAft>
-              <a:defRPr sz="2000" b="0">
-                <a:solidFill>
-                  <a:srgbClr val="333333"/>
-                </a:solidFill>
-                <a:latin typeface="Consolas"/>
-              </a:defRPr>
-            </a:pPr>
-            <a:r>
-              <a:t>$ head -25 module4/templates/CHECKER_PLAN.md</a:t>
-            </a:r>
-          </a:p>
-        </p:txBody>
-      </p:sp>
-      <p:pic>
-        <p:nvPicPr>
-          <p:cNvPr id="4" name="Picture 3" descr="ex02_checker_plan.png"/>
-          <p:cNvPicPr>
-            <a:picLocks noChangeAspect="1"/>
-          </p:cNvPicPr>
-          <p:nvPr/>
-        </p:nvPicPr>
-        <p:blipFill>
-          <a:blip r:embed="rId2"/>
-          <a:stretch>
-            <a:fillRect/>
-          </a:stretch>
-        </p:blipFill>
-        <p:spPr>
-          <a:xfrm>
-            <a:off x="548640" y="1965960"/>
-            <a:ext cx="7071358" cy="3977639"/>
-          </a:xfrm>
-          <a:prstGeom prst="rect">
-            <a:avLst/>
-          </a:prstGeom>
-        </p:spPr>
-      </p:pic>
-      <p:sp>
-        <p:nvSpPr>
-          <p:cNvPr id="5" name="TextBox 4"/>
+                <a:spcPts val="1000"/>
+              </a:spcAft>
+              <a:defRPr sz="2000" b="0">
+                <a:solidFill>
+                  <a:srgbClr val="333333"/>
+                </a:solidFill>
+                <a:latin typeface="Calibri"/>
+              </a:defRPr>
+            </a:pPr>
+            <a:r>
+              <a:t>• Driver and monitor behavior, including resets,</a:t>
+            </a:r>
+          </a:p>
+          <a:p>
+            <a:pPr>
+              <a:lnSpc>
+                <a:spcPts val="2200"/>
+              </a:lnSpc>
+              <a:spcAft>
+                <a:spcPts val="1000"/>
+              </a:spcAft>
+              <a:defRPr sz="2000" b="0">
+                <a:solidFill>
+                  <a:srgbClr val="333333"/>
+                </a:solidFill>
+                <a:latin typeface="Calibri"/>
+              </a:defRPr>
+            </a:pPr>
+            <a:r>
+              <a:t>      backpressure, and error handling.</a:t>
+            </a:r>
+          </a:p>
+        </p:txBody>
+      </p:sp>
+      <p:sp>
+        <p:nvSpPr>
+          <p:cNvPr id="4" name="TextBox 3"/>
           <p:cNvSpPr txBox="1"/>
           <p:nvPr/>
         </p:nvSpPr>
@@ -8329,7 +10084,7 @@
               </a:defRPr>
             </a:pPr>
             <a:r>
-              <a:t>Demo: Module-local UVM TB</a:t>
+              <a:t>4. Scoreboards and Reference Models</a:t>
             </a:r>
           </a:p>
         </p:txBody>
@@ -8342,15 +10097,13 @@
         </p:nvSpPr>
         <p:spPr>
           <a:xfrm>
-            <a:off x="548640" y="1051560"/>
-            <a:ext cx="11064240" cy="914400"/>
+            <a:off x="548640" y="1234440"/>
+            <a:ext cx="11064240" cy="4937760"/>
           </a:xfrm>
           <a:prstGeom prst="rect">
             <a:avLst/>
           </a:prstGeom>
-          <a:solidFill>
-            <a:srgbClr val="F4F4F4"/>
-          </a:solidFill>
+          <a:noFill/>
         </p:spPr>
         <p:txBody>
           <a:bodyPr wrap="square">
@@ -8363,48 +10116,24 @@
                 <a:spcPts val="2200"/>
               </a:lnSpc>
               <a:spcAft>
-                <a:spcPts val="200"/>
-              </a:spcAft>
-              <a:defRPr sz="2000" b="0">
-                <a:solidFill>
-                  <a:srgbClr val="333333"/>
-                </a:solidFill>
-                <a:latin typeface="Consolas"/>
-              </a:defRPr>
-            </a:pPr>
-            <a:r>
-              <a:t>$ head -35 module4/tb/tb_stream_fifo_uvm.sv</a:t>
-            </a:r>
-          </a:p>
-        </p:txBody>
-      </p:sp>
-      <p:pic>
-        <p:nvPicPr>
-          <p:cNvPr id="4" name="Picture 3" descr="ex03_module_tb.png"/>
-          <p:cNvPicPr>
-            <a:picLocks noChangeAspect="1"/>
-          </p:cNvPicPr>
-          <p:nvPr/>
-        </p:nvPicPr>
-        <p:blipFill>
-          <a:blip r:embed="rId2"/>
-          <a:stretch>
-            <a:fillRect/>
-          </a:stretch>
-        </p:blipFill>
-        <p:spPr>
-          <a:xfrm>
-            <a:off x="548640" y="1965960"/>
-            <a:ext cx="7071358" cy="3977639"/>
-          </a:xfrm>
-          <a:prstGeom prst="rect">
-            <a:avLst/>
-          </a:prstGeom>
-        </p:spPr>
-      </p:pic>
-      <p:sp>
-        <p:nvSpPr>
-          <p:cNvPr id="5" name="TextBox 4"/>
+                <a:spcPts val="1000"/>
+              </a:spcAft>
+              <a:defRPr sz="2000" b="0">
+                <a:solidFill>
+                  <a:srgbClr val="333333"/>
+                </a:solidFill>
+                <a:latin typeface="Calibri"/>
+              </a:defRPr>
+            </a:pPr>
+            <a:r>
+              <a:t>• Scoreboard and reference model design.</a:t>
+            </a:r>
+          </a:p>
+        </p:txBody>
+      </p:sp>
+      <p:sp>
+        <p:nvSpPr>
+          <p:cNvPr id="4" name="TextBox 3"/>
           <p:cNvSpPr txBox="1"/>
           <p:nvPr/>
         </p:nvSpPr>
@@ -8493,7 +10222,7 @@
               </a:defRPr>
             </a:pPr>
             <a:r>
-              <a:t>Demo: Reference env design</a:t>
+              <a:t>5. Assertions and Checking Strategy</a:t>
             </a:r>
           </a:p>
         </p:txBody>
@@ -8506,15 +10235,13 @@
         </p:nvSpPr>
         <p:spPr>
           <a:xfrm>
-            <a:off x="548640" y="1051560"/>
-            <a:ext cx="11064240" cy="914400"/>
+            <a:off x="548640" y="1234440"/>
+            <a:ext cx="11064240" cy="4937760"/>
           </a:xfrm>
           <a:prstGeom prst="rect">
             <a:avLst/>
           </a:prstGeom>
-          <a:solidFill>
-            <a:srgbClr val="F4F4F4"/>
-          </a:solidFill>
+          <a:noFill/>
         </p:spPr>
         <p:txBody>
           <a:bodyPr wrap="square">
@@ -8527,48 +10254,43 @@
                 <a:spcPts val="2200"/>
               </a:lnSpc>
               <a:spcAft>
-                <a:spcPts val="200"/>
-              </a:spcAft>
-              <a:defRPr sz="2000" b="0">
-                <a:solidFill>
-                  <a:srgbClr val="333333"/>
-                </a:solidFill>
-                <a:latin typeface="Consolas"/>
-              </a:defRPr>
-            </a:pPr>
-            <a:r>
-              <a:t>$ head -20 module4/.solutions/ENV_DESIGN.md</a:t>
-            </a:r>
-          </a:p>
-        </p:txBody>
-      </p:sp>
-      <p:pic>
-        <p:nvPicPr>
-          <p:cNvPr id="4" name="Picture 3" descr="ex04_solutions.png"/>
-          <p:cNvPicPr>
-            <a:picLocks noChangeAspect="1"/>
-          </p:cNvPicPr>
-          <p:nvPr/>
-        </p:nvPicPr>
-        <p:blipFill>
-          <a:blip r:embed="rId2"/>
-          <a:stretch>
-            <a:fillRect/>
-          </a:stretch>
-        </p:blipFill>
-        <p:spPr>
-          <a:xfrm>
-            <a:off x="548640" y="1965960"/>
-            <a:ext cx="7071358" cy="3977639"/>
-          </a:xfrm>
-          <a:prstGeom prst="rect">
-            <a:avLst/>
-          </a:prstGeom>
-        </p:spPr>
-      </p:pic>
-      <p:sp>
-        <p:nvSpPr>
-          <p:cNvPr id="5" name="TextBox 4"/>
+                <a:spcPts val="1000"/>
+              </a:spcAft>
+              <a:defRPr sz="2000" b="0">
+                <a:solidFill>
+                  <a:srgbClr val="333333"/>
+                </a:solidFill>
+                <a:latin typeface="Calibri"/>
+              </a:defRPr>
+            </a:pPr>
+            <a:r>
+              <a:t>• Assertion strategy: what to check with SVA vs</a:t>
+            </a:r>
+          </a:p>
+          <a:p>
+            <a:pPr>
+              <a:lnSpc>
+                <a:spcPts val="2200"/>
+              </a:lnSpc>
+              <a:spcAft>
+                <a:spcPts val="1000"/>
+              </a:spcAft>
+              <a:defRPr sz="2000" b="0">
+                <a:solidFill>
+                  <a:srgbClr val="333333"/>
+                </a:solidFill>
+                <a:latin typeface="Calibri"/>
+              </a:defRPr>
+            </a:pPr>
+            <a:r>
+              <a:t>      scoreboards vs tests.</a:t>
+            </a:r>
+          </a:p>
+        </p:txBody>
+      </p:sp>
+      <p:sp>
+        <p:nvSpPr>
+          <p:cNvPr id="4" name="TextBox 3"/>
           <p:cNvSpPr txBox="1"/>
           <p:nvPr/>
         </p:nvSpPr>
@@ -8631,8 +10353,8 @@
         </p:nvSpPr>
         <p:spPr>
           <a:xfrm>
-            <a:off x="548640" y="411480"/>
-            <a:ext cx="11064240" cy="777240"/>
+            <a:off x="548640" y="2743200"/>
+            <a:ext cx="11064240" cy="1371600"/>
           </a:xfrm>
           <a:prstGeom prst="rect">
             <a:avLst/>
@@ -8645,11 +10367,11 @@
           </a:bodyPr>
           <a:lstStyle/>
           <a:p>
-            <a:pPr>
-              <a:lnSpc>
-                <a:spcPts val="2200"/>
-              </a:lnSpc>
-              <a:defRPr sz="2800" b="1">
+            <a:pPr algn="ctr">
+              <a:lnSpc>
+                <a:spcPts val="2200"/>
+              </a:lnSpc>
+              <a:defRPr sz="3600" b="1">
                 <a:solidFill>
                   <a:srgbClr val="1A1A2E"/>
                 </a:solidFill>
@@ -8657,7 +10379,7 @@
               </a:defRPr>
             </a:pPr>
             <a:r>
-              <a:t>Demo: Module validation</a:t>
+              <a:t>Command reference highlights</a:t>
             </a:r>
           </a:p>
         </p:txBody>
@@ -8665,74 +10387,6 @@
       <p:sp>
         <p:nvSpPr>
           <p:cNvPr id="3" name="TextBox 2"/>
-          <p:cNvSpPr txBox="1"/>
-          <p:nvPr/>
-        </p:nvSpPr>
-        <p:spPr>
-          <a:xfrm>
-            <a:off x="548640" y="1051560"/>
-            <a:ext cx="11064240" cy="914400"/>
-          </a:xfrm>
-          <a:prstGeom prst="rect">
-            <a:avLst/>
-          </a:prstGeom>
-          <a:solidFill>
-            <a:srgbClr val="F4F4F4"/>
-          </a:solidFill>
-        </p:spPr>
-        <p:txBody>
-          <a:bodyPr wrap="square">
-            <a:noAutofit/>
-          </a:bodyPr>
-          <a:lstStyle/>
-          <a:p>
-            <a:pPr>
-              <a:lnSpc>
-                <a:spcPts val="2200"/>
-              </a:lnSpc>
-              <a:spcAft>
-                <a:spcPts val="200"/>
-              </a:spcAft>
-              <a:defRPr sz="2000" b="0">
-                <a:solidFill>
-                  <a:srgbClr val="333333"/>
-                </a:solidFill>
-                <a:latin typeface="Consolas"/>
-              </a:defRPr>
-            </a:pPr>
-            <a:r>
-              <a:t>$ ./scripts/module4.sh --check</a:t>
-            </a:r>
-          </a:p>
-        </p:txBody>
-      </p:sp>
-      <p:pic>
-        <p:nvPicPr>
-          <p:cNvPr id="4" name="Picture 3" descr="ex05_validate.png"/>
-          <p:cNvPicPr>
-            <a:picLocks noChangeAspect="1"/>
-          </p:cNvPicPr>
-          <p:nvPr/>
-        </p:nvPicPr>
-        <p:blipFill>
-          <a:blip r:embed="rId2"/>
-          <a:stretch>
-            <a:fillRect/>
-          </a:stretch>
-        </p:blipFill>
-        <p:spPr>
-          <a:xfrm>
-            <a:off x="548640" y="1965960"/>
-            <a:ext cx="7071358" cy="3977639"/>
-          </a:xfrm>
-          <a:prstGeom prst="rect">
-            <a:avLst/>
-          </a:prstGeom>
-        </p:spPr>
-      </p:pic>
-      <p:sp>
-        <p:nvSpPr>
-          <p:cNvPr id="5" name="TextBox 4"/>
           <p:cNvSpPr txBox="1"/>
           <p:nvPr/>
         </p:nvSpPr>
@@ -8933,8 +10587,8 @@
         </p:nvSpPr>
         <p:spPr>
           <a:xfrm>
-            <a:off x="548640" y="2743200"/>
-            <a:ext cx="11064240" cy="1371600"/>
+            <a:off x="548640" y="411480"/>
+            <a:ext cx="11064240" cy="777240"/>
           </a:xfrm>
           <a:prstGeom prst="rect">
             <a:avLst/>
@@ -8947,11 +10601,11 @@
           </a:bodyPr>
           <a:lstStyle/>
           <a:p>
-            <a:pPr algn="ctr">
-              <a:lnSpc>
-                <a:spcPts val="2200"/>
-              </a:lnSpc>
-              <a:defRPr sz="3600" b="1">
+            <a:pPr>
+              <a:lnSpc>
+                <a:spcPts val="2200"/>
+              </a:lnSpc>
+              <a:defRPr sz="2800" b="1">
                 <a:solidFill>
                   <a:srgbClr val="1A1A2E"/>
                 </a:solidFill>
@@ -8959,7 +10613,7 @@
               </a:defRPr>
             </a:pPr>
             <a:r>
-              <a:t>Practice &amp; assessment</a:t>
+              <a:t>Scaffold and validate Module 4</a:t>
             </a:r>
           </a:p>
         </p:txBody>
@@ -8967,6 +10621,48 @@
       <p:sp>
         <p:nvSpPr>
           <p:cNvPr id="3" name="TextBox 2"/>
+          <p:cNvSpPr txBox="1"/>
+          <p:nvPr/>
+        </p:nvSpPr>
+        <p:spPr>
+          <a:xfrm>
+            <a:off x="548640" y="1234440"/>
+            <a:ext cx="11064240" cy="4937760"/>
+          </a:xfrm>
+          <a:prstGeom prst="rect">
+            <a:avLst/>
+          </a:prstGeom>
+          <a:noFill/>
+        </p:spPr>
+        <p:txBody>
+          <a:bodyPr wrap="square">
+            <a:noAutofit/>
+          </a:bodyPr>
+          <a:lstStyle/>
+          <a:p>
+            <a:pPr>
+              <a:lnSpc>
+                <a:spcPts val="2200"/>
+              </a:lnSpc>
+              <a:spcAft>
+                <a:spcPts val="1000"/>
+              </a:spcAft>
+              <a:defRPr sz="2000" b="0">
+                <a:solidFill>
+                  <a:srgbClr val="333333"/>
+                </a:solidFill>
+                <a:latin typeface="Calibri"/>
+              </a:defRPr>
+            </a:pPr>
+            <a:r>
+              <a:t>• ./scripts/module4.sh --scaffold</a:t>
+            </a:r>
+          </a:p>
+        </p:txBody>
+      </p:sp>
+      <p:sp>
+        <p:nvSpPr>
+          <p:cNvPr id="4" name="TextBox 3"/>
           <p:cNvSpPr txBox="1"/>
           <p:nvPr/>
         </p:nvSpPr>
@@ -9055,7 +10751,7 @@
               </a:defRPr>
             </a:pPr>
             <a:r>
-              <a:t>What you should know (1/2)</a:t>
+              <a:t>Inspect UVM env and scoreboard</a:t>
             </a:r>
           </a:p>
         </p:txBody>
@@ -9097,235 +10793,7 @@
               </a:defRPr>
             </a:pPr>
             <a:r>
-              <a:t>• Describe and justify your UVM environment and agent</a:t>
-            </a:r>
-          </a:p>
-          <a:p>
-            <a:pPr>
-              <a:lnSpc>
-                <a:spcPts val="2200"/>
-              </a:lnSpc>
-              <a:spcAft>
-                <a:spcPts val="1000"/>
-              </a:spcAft>
-              <a:defRPr sz="2000" b="0">
-                <a:solidFill>
-                  <a:srgbClr val="333333"/>
-                </a:solidFill>
-                <a:latin typeface="Calibri"/>
-              </a:defRPr>
-            </a:pPr>
-            <a:r>
-              <a:t>      architecture.</a:t>
-            </a:r>
-          </a:p>
-          <a:p>
-            <a:pPr>
-              <a:lnSpc>
-                <a:spcPts val="2200"/>
-              </a:lnSpc>
-              <a:spcAft>
-                <a:spcPts val="1000"/>
-              </a:spcAft>
-              <a:defRPr sz="2000" b="0">
-                <a:solidFill>
-                  <a:srgbClr val="333333"/>
-                </a:solidFill>
-                <a:latin typeface="Calibri"/>
-              </a:defRPr>
-            </a:pPr>
-            <a:r>
-              <a:t>• Implement and maintain drivers, monitors,</a:t>
-            </a:r>
-          </a:p>
-          <a:p>
-            <a:pPr>
-              <a:lnSpc>
-                <a:spcPts val="2200"/>
-              </a:lnSpc>
-              <a:spcAft>
-                <a:spcPts val="1000"/>
-              </a:spcAft>
-              <a:defRPr sz="2000" b="0">
-                <a:solidFill>
-                  <a:srgbClr val="333333"/>
-                </a:solidFill>
-                <a:latin typeface="Calibri"/>
-              </a:defRPr>
-            </a:pPr>
-            <a:r>
-              <a:t>      sequencers, and transactions that match your DUT and</a:t>
-            </a:r>
-          </a:p>
-          <a:p>
-            <a:pPr>
-              <a:lnSpc>
-                <a:spcPts val="2200"/>
-              </a:lnSpc>
-              <a:spcAft>
-                <a:spcPts val="1000"/>
-              </a:spcAft>
-              <a:defRPr sz="2000" b="0">
-                <a:solidFill>
-                  <a:srgbClr val="333333"/>
-                </a:solidFill>
-                <a:latin typeface="Calibri"/>
-              </a:defRPr>
-            </a:pPr>
-            <a:r>
-              <a:t>      test…</a:t>
-            </a:r>
-          </a:p>
-          <a:p>
-            <a:pPr>
-              <a:lnSpc>
-                <a:spcPts val="2200"/>
-              </a:lnSpc>
-              <a:spcAft>
-                <a:spcPts val="1000"/>
-              </a:spcAft>
-              <a:defRPr sz="2000" b="0">
-                <a:solidFill>
-                  <a:srgbClr val="333333"/>
-                </a:solidFill>
-                <a:latin typeface="Calibri"/>
-              </a:defRPr>
-            </a:pPr>
-            <a:r>
-              <a:t>• Implement or integrate scoreboards and reference</a:t>
-            </a:r>
-          </a:p>
-          <a:p>
-            <a:pPr>
-              <a:lnSpc>
-                <a:spcPts val="2200"/>
-              </a:lnSpc>
-              <a:spcAft>
-                <a:spcPts val="1000"/>
-              </a:spcAft>
-              <a:defRPr sz="2000" b="0">
-                <a:solidFill>
-                  <a:srgbClr val="333333"/>
-                </a:solidFill>
-                <a:latin typeface="Calibri"/>
-              </a:defRPr>
-            </a:pPr>
-            <a:r>
-              <a:t>      models for robust checking.</a:t>
-            </a:r>
-          </a:p>
-          <a:p>
-            <a:pPr>
-              <a:lnSpc>
-                <a:spcPts val="2200"/>
-              </a:lnSpc>
-              <a:spcAft>
-                <a:spcPts val="1000"/>
-              </a:spcAft>
-              <a:defRPr sz="2000" b="0">
-                <a:solidFill>
-                  <a:srgbClr val="333333"/>
-                </a:solidFill>
-                <a:latin typeface="Calibri"/>
-              </a:defRPr>
-            </a:pPr>
-            <a:r>
-              <a:t>• Design and place protocol and functional assertions</a:t>
-            </a:r>
-          </a:p>
-          <a:p>
-            <a:pPr>
-              <a:lnSpc>
-                <a:spcPts val="2200"/>
-              </a:lnSpc>
-              <a:spcAft>
-                <a:spcPts val="1000"/>
-              </a:spcAft>
-              <a:defRPr sz="2000" b="0">
-                <a:solidFill>
-                  <a:srgbClr val="333333"/>
-                </a:solidFill>
-                <a:latin typeface="Calibri"/>
-              </a:defRPr>
-            </a:pPr>
-            <a:r>
-              <a:t>      that support your verification goals.</a:t>
-            </a:r>
-          </a:p>
-          <a:p>
-            <a:pPr>
-              <a:lnSpc>
-                <a:spcPts val="2200"/>
-              </a:lnSpc>
-              <a:spcAft>
-                <a:spcPts val="1000"/>
-              </a:spcAft>
-              <a:defRPr sz="2000" b="0">
-                <a:solidFill>
-                  <a:srgbClr val="333333"/>
-                </a:solidFill>
-                <a:latin typeface="Calibri"/>
-              </a:defRPr>
-            </a:pPr>
-            <a:r>
-              <a:t>• Configure your environment for different modes and</a:t>
-            </a:r>
-          </a:p>
-          <a:p>
-            <a:pPr>
-              <a:lnSpc>
-                <a:spcPts val="2200"/>
-              </a:lnSpc>
-              <a:spcAft>
-                <a:spcPts val="1000"/>
-              </a:spcAft>
-              <a:defRPr sz="2000" b="0">
-                <a:solidFill>
-                  <a:srgbClr val="333333"/>
-                </a:solidFill>
-                <a:latin typeface="Calibri"/>
-              </a:defRPr>
-            </a:pPr>
-            <a:r>
-              <a:t>      regression tiers.</a:t>
-            </a:r>
-          </a:p>
-          <a:p>
-            <a:pPr>
-              <a:lnSpc>
-                <a:spcPts val="2200"/>
-              </a:lnSpc>
-              <a:spcAft>
-                <a:spcPts val="1000"/>
-              </a:spcAft>
-              <a:defRPr sz="2000" b="0">
-                <a:solidFill>
-                  <a:srgbClr val="333333"/>
-                </a:solidFill>
-                <a:latin typeface="Calibri"/>
-              </a:defRPr>
-            </a:pPr>
-            <a:r>
-              <a:t>• UVM env/agent architecture documented in</a:t>
-            </a:r>
-          </a:p>
-          <a:p>
-            <a:pPr>
-              <a:lnSpc>
-                <a:spcPts val="2200"/>
-              </a:lnSpc>
-              <a:spcAft>
-                <a:spcPts val="1000"/>
-              </a:spcAft>
-              <a:defRPr sz="2000" b="0">
-                <a:solidFill>
-                  <a:srgbClr val="333333"/>
-                </a:solidFill>
-                <a:latin typeface="Calibri"/>
-              </a:defRPr>
-            </a:pPr>
-            <a:r>
-              <a:t>      `module4/ENV_DESIGN.md`.</a:t>
+              <a:t>• head -80 module4/tb/stream_pkg.sv</a:t>
             </a:r>
           </a:p>
         </p:txBody>
@@ -9395,8 +10863,8 @@
         </p:nvSpPr>
         <p:spPr>
           <a:xfrm>
-            <a:off x="548640" y="411480"/>
-            <a:ext cx="11064240" cy="777240"/>
+            <a:off x="548640" y="2743200"/>
+            <a:ext cx="11064240" cy="1371600"/>
           </a:xfrm>
           <a:prstGeom prst="rect">
             <a:avLst/>
@@ -9409,11 +10877,11 @@
           </a:bodyPr>
           <a:lstStyle/>
           <a:p>
-            <a:pPr>
-              <a:lnSpc>
-                <a:spcPts val="2200"/>
-              </a:lnSpc>
-              <a:defRPr sz="2800" b="1">
+            <a:pPr algn="ctr">
+              <a:lnSpc>
+                <a:spcPts val="2200"/>
+              </a:lnSpc>
+              <a:defRPr sz="3600" b="1">
                 <a:solidFill>
                   <a:srgbClr val="1A1A2E"/>
                 </a:solidFill>
@@ -9421,7 +10889,7 @@
               </a:defRPr>
             </a:pPr>
             <a:r>
-              <a:t>What you should know (2/2)</a:t>
+              <a:t>Hands-on examples</a:t>
             </a:r>
           </a:p>
         </p:txBody>
@@ -9429,181 +10897,6 @@
       <p:sp>
         <p:nvSpPr>
           <p:cNvPr id="3" name="TextBox 2"/>
-          <p:cNvSpPr txBox="1"/>
-          <p:nvPr/>
-        </p:nvSpPr>
-        <p:spPr>
-          <a:xfrm>
-            <a:off x="548640" y="1234440"/>
-            <a:ext cx="11064240" cy="4937760"/>
-          </a:xfrm>
-          <a:prstGeom prst="rect">
-            <a:avLst/>
-          </a:prstGeom>
-          <a:noFill/>
-        </p:spPr>
-        <p:txBody>
-          <a:bodyPr wrap="square">
-            <a:noAutofit/>
-          </a:bodyPr>
-          <a:lstStyle/>
-          <a:p>
-            <a:pPr>
-              <a:lnSpc>
-                <a:spcPts val="2200"/>
-              </a:lnSpc>
-              <a:spcAft>
-                <a:spcPts val="1000"/>
-              </a:spcAft>
-              <a:defRPr sz="2000" b="0">
-                <a:solidFill>
-                  <a:srgbClr val="333333"/>
-                </a:solidFill>
-                <a:latin typeface="Calibri"/>
-              </a:defRPr>
-            </a:pPr>
-            <a:r>
-              <a:t>• Transaction and sequence designs documented and</a:t>
-            </a:r>
-          </a:p>
-          <a:p>
-            <a:pPr>
-              <a:lnSpc>
-                <a:spcPts val="2200"/>
-              </a:lnSpc>
-              <a:spcAft>
-                <a:spcPts val="1000"/>
-              </a:spcAft>
-              <a:defRPr sz="2000" b="0">
-                <a:solidFill>
-                  <a:srgbClr val="333333"/>
-                </a:solidFill>
-                <a:latin typeface="Calibri"/>
-              </a:defRPr>
-            </a:pPr>
-            <a:r>
-              <a:t>      aligned with `module2/TEST_PLAN.md`.</a:t>
-            </a:r>
-          </a:p>
-          <a:p>
-            <a:pPr>
-              <a:lnSpc>
-                <a:spcPts val="2200"/>
-              </a:lnSpc>
-              <a:spcAft>
-                <a:spcPts val="1000"/>
-              </a:spcAft>
-              <a:defRPr sz="2000" b="0">
-                <a:solidFill>
-                  <a:srgbClr val="333333"/>
-                </a:solidFill>
-                <a:latin typeface="Calibri"/>
-              </a:defRPr>
-            </a:pPr>
-            <a:r>
-              <a:t>• Scoreboards and reference models specified in</a:t>
-            </a:r>
-          </a:p>
-          <a:p>
-            <a:pPr>
-              <a:lnSpc>
-                <a:spcPts val="2200"/>
-              </a:lnSpc>
-              <a:spcAft>
-                <a:spcPts val="1000"/>
-              </a:spcAft>
-              <a:defRPr sz="2000" b="0">
-                <a:solidFill>
-                  <a:srgbClr val="333333"/>
-                </a:solidFill>
-                <a:latin typeface="Calibri"/>
-              </a:defRPr>
-            </a:pPr>
-            <a:r>
-              <a:t>      `module4/CHECKER_PLAN.md`.</a:t>
-            </a:r>
-          </a:p>
-          <a:p>
-            <a:pPr>
-              <a:lnSpc>
-                <a:spcPts val="2200"/>
-              </a:lnSpc>
-              <a:spcAft>
-                <a:spcPts val="1000"/>
-              </a:spcAft>
-              <a:defRPr sz="2000" b="0">
-                <a:solidFill>
-                  <a:srgbClr val="333333"/>
-                </a:solidFill>
-                <a:latin typeface="Calibri"/>
-              </a:defRPr>
-            </a:pPr>
-            <a:r>
-              <a:t>• Key protocol/functional assertions listed and</a:t>
-            </a:r>
-          </a:p>
-          <a:p>
-            <a:pPr>
-              <a:lnSpc>
-                <a:spcPts val="2200"/>
-              </a:lnSpc>
-              <a:spcAft>
-                <a:spcPts val="1000"/>
-              </a:spcAft>
-              <a:defRPr sz="2000" b="0">
-                <a:solidFill>
-                  <a:srgbClr val="333333"/>
-                </a:solidFill>
-                <a:latin typeface="Calibri"/>
-              </a:defRPr>
-            </a:pPr>
-            <a:r>
-              <a:t>      placed.</a:t>
-            </a:r>
-          </a:p>
-          <a:p>
-            <a:pPr>
-              <a:lnSpc>
-                <a:spcPts val="2200"/>
-              </a:lnSpc>
-              <a:spcAft>
-                <a:spcPts val="1000"/>
-              </a:spcAft>
-              <a:defRPr sz="2000" b="0">
-                <a:solidFill>
-                  <a:srgbClr val="333333"/>
-                </a:solidFill>
-                <a:latin typeface="Calibri"/>
-              </a:defRPr>
-            </a:pPr>
-            <a:r>
-              <a:t>• At least one env/checker review (self or peer)</a:t>
-            </a:r>
-          </a:p>
-          <a:p>
-            <a:pPr>
-              <a:lnSpc>
-                <a:spcPts val="2200"/>
-              </a:lnSpc>
-              <a:spcAft>
-                <a:spcPts val="1000"/>
-              </a:spcAft>
-              <a:defRPr sz="2000" b="0">
-                <a:solidFill>
-                  <a:srgbClr val="333333"/>
-                </a:solidFill>
-                <a:latin typeface="Calibri"/>
-              </a:defRPr>
-            </a:pPr>
-            <a:r>
-              <a:t>      completed; action items captured.</a:t>
-            </a:r>
-          </a:p>
-        </p:txBody>
-      </p:sp>
-      <p:sp>
-        <p:nvSpPr>
-          <p:cNvPr id="4" name="TextBox 3"/>
           <p:cNvSpPr txBox="1"/>
           <p:nvPr/>
         </p:nvSpPr>
@@ -9692,7 +10985,7 @@
               </a:defRPr>
             </a:pPr>
             <a:r>
-              <a:t>Assessment checklist</a:t>
+              <a:t>Module 4 self-check</a:t>
             </a:r>
           </a:p>
         </p:txBody>
@@ -9705,13 +10998,15 @@
         </p:nvSpPr>
         <p:spPr>
           <a:xfrm>
-            <a:off x="548640" y="1234440"/>
-            <a:ext cx="11064240" cy="4937760"/>
+            <a:off x="548640" y="1051560"/>
+            <a:ext cx="11064240" cy="914400"/>
           </a:xfrm>
           <a:prstGeom prst="rect">
             <a:avLst/>
           </a:prstGeom>
-          <a:noFill/>
+          <a:solidFill>
+            <a:srgbClr val="F4F4F4"/>
+          </a:solidFill>
         </p:spPr>
         <p:txBody>
           <a:bodyPr wrap="square">
@@ -9724,195 +11019,48 @@
                 <a:spcPts val="2200"/>
               </a:lnSpc>
               <a:spcAft>
-                <a:spcPts val="1000"/>
-              </a:spcAft>
-              <a:defRPr sz="2000" b="0">
-                <a:solidFill>
-                  <a:srgbClr val="333333"/>
-                </a:solidFill>
-                <a:latin typeface="Calibri"/>
-              </a:defRPr>
-            </a:pPr>
-            <a:r>
-              <a:t>• UVM env/agent architecture documented in</a:t>
-            </a:r>
-          </a:p>
-          <a:p>
-            <a:pPr>
-              <a:lnSpc>
-                <a:spcPts val="2200"/>
-              </a:lnSpc>
-              <a:spcAft>
-                <a:spcPts val="1000"/>
-              </a:spcAft>
-              <a:defRPr sz="2000" b="0">
-                <a:solidFill>
-                  <a:srgbClr val="333333"/>
-                </a:solidFill>
-                <a:latin typeface="Calibri"/>
-              </a:defRPr>
-            </a:pPr>
-            <a:r>
-              <a:t>      `module4/ENV_DESIGN.md`.</a:t>
-            </a:r>
-          </a:p>
-          <a:p>
-            <a:pPr>
-              <a:lnSpc>
-                <a:spcPts val="2200"/>
-              </a:lnSpc>
-              <a:spcAft>
-                <a:spcPts val="1000"/>
-              </a:spcAft>
-              <a:defRPr sz="2000" b="0">
-                <a:solidFill>
-                  <a:srgbClr val="333333"/>
-                </a:solidFill>
-                <a:latin typeface="Calibri"/>
-              </a:defRPr>
-            </a:pPr>
-            <a:r>
-              <a:t>• Transaction and sequence designs documented and</a:t>
-            </a:r>
-          </a:p>
-          <a:p>
-            <a:pPr>
-              <a:lnSpc>
-                <a:spcPts val="2200"/>
-              </a:lnSpc>
-              <a:spcAft>
-                <a:spcPts val="1000"/>
-              </a:spcAft>
-              <a:defRPr sz="2000" b="0">
-                <a:solidFill>
-                  <a:srgbClr val="333333"/>
-                </a:solidFill>
-                <a:latin typeface="Calibri"/>
-              </a:defRPr>
-            </a:pPr>
-            <a:r>
-              <a:t>      aligned with `module2/TEST_PLAN.md`.</a:t>
-            </a:r>
-          </a:p>
-          <a:p>
-            <a:pPr>
-              <a:lnSpc>
-                <a:spcPts val="2200"/>
-              </a:lnSpc>
-              <a:spcAft>
-                <a:spcPts val="1000"/>
-              </a:spcAft>
-              <a:defRPr sz="2000" b="0">
-                <a:solidFill>
-                  <a:srgbClr val="333333"/>
-                </a:solidFill>
-                <a:latin typeface="Calibri"/>
-              </a:defRPr>
-            </a:pPr>
-            <a:r>
-              <a:t>• Scoreboards and reference models specified in</a:t>
-            </a:r>
-          </a:p>
-          <a:p>
-            <a:pPr>
-              <a:lnSpc>
-                <a:spcPts val="2200"/>
-              </a:lnSpc>
-              <a:spcAft>
-                <a:spcPts val="1000"/>
-              </a:spcAft>
-              <a:defRPr sz="2000" b="0">
-                <a:solidFill>
-                  <a:srgbClr val="333333"/>
-                </a:solidFill>
-                <a:latin typeface="Calibri"/>
-              </a:defRPr>
-            </a:pPr>
-            <a:r>
-              <a:t>      `module4/CHECKER_PLAN.md`.</a:t>
-            </a:r>
-          </a:p>
-          <a:p>
-            <a:pPr>
-              <a:lnSpc>
-                <a:spcPts val="2200"/>
-              </a:lnSpc>
-              <a:spcAft>
-                <a:spcPts val="1000"/>
-              </a:spcAft>
-              <a:defRPr sz="2000" b="0">
-                <a:solidFill>
-                  <a:srgbClr val="333333"/>
-                </a:solidFill>
-                <a:latin typeface="Calibri"/>
-              </a:defRPr>
-            </a:pPr>
-            <a:r>
-              <a:t>• Key protocol/functional assertions listed and</a:t>
-            </a:r>
-          </a:p>
-          <a:p>
-            <a:pPr>
-              <a:lnSpc>
-                <a:spcPts val="2200"/>
-              </a:lnSpc>
-              <a:spcAft>
-                <a:spcPts val="1000"/>
-              </a:spcAft>
-              <a:defRPr sz="2000" b="0">
-                <a:solidFill>
-                  <a:srgbClr val="333333"/>
-                </a:solidFill>
-                <a:latin typeface="Calibri"/>
-              </a:defRPr>
-            </a:pPr>
-            <a:r>
-              <a:t>      placed.</a:t>
-            </a:r>
-          </a:p>
-          <a:p>
-            <a:pPr>
-              <a:lnSpc>
-                <a:spcPts val="2200"/>
-              </a:lnSpc>
-              <a:spcAft>
-                <a:spcPts val="1000"/>
-              </a:spcAft>
-              <a:defRPr sz="2000" b="0">
-                <a:solidFill>
-                  <a:srgbClr val="333333"/>
-                </a:solidFill>
-                <a:latin typeface="Calibri"/>
-              </a:defRPr>
-            </a:pPr>
-            <a:r>
-              <a:t>• At least one env/checker review (self or peer)</a:t>
-            </a:r>
-          </a:p>
-          <a:p>
-            <a:pPr>
-              <a:lnSpc>
-                <a:spcPts val="2200"/>
-              </a:lnSpc>
-              <a:spcAft>
-                <a:spcPts val="1000"/>
-              </a:spcAft>
-              <a:defRPr sz="2000" b="0">
-                <a:solidFill>
-                  <a:srgbClr val="333333"/>
-                </a:solidFill>
-                <a:latin typeface="Calibri"/>
-              </a:defRPr>
-            </a:pPr>
-            <a:r>
-              <a:t>      completed; action items captured.</a:t>
-            </a:r>
-          </a:p>
-        </p:txBody>
-      </p:sp>
-      <p:sp>
-        <p:nvSpPr>
-          <p:cNvPr id="4" name="TextBox 3"/>
+                <a:spcPts val="200"/>
+              </a:spcAft>
+              <a:defRPr sz="2000" b="0">
+                <a:solidFill>
+                  <a:srgbClr val="333333"/>
+                </a:solidFill>
+                <a:latin typeface="Consolas"/>
+              </a:defRPr>
+            </a:pPr>
+            <a:r>
+              <a:t>$ ./scripts/module4.sh --help</a:t>
+            </a:r>
+          </a:p>
+        </p:txBody>
+      </p:sp>
+      <p:pic>
+        <p:nvPicPr>
+          <p:cNvPr id="4" name="Picture 3" descr="module4_check.png"/>
+          <p:cNvPicPr>
+            <a:picLocks noChangeAspect="1"/>
+          </p:cNvPicPr>
+          <p:nvPr/>
+        </p:nvPicPr>
+        <p:blipFill>
+          <a:blip r:embed="rId2"/>
+          <a:stretch>
+            <a:fillRect/>
+          </a:stretch>
+        </p:blipFill>
+        <p:spPr>
+          <a:xfrm>
+            <a:off x="548640" y="1965960"/>
+            <a:ext cx="7071358" cy="3977639"/>
+          </a:xfrm>
+          <a:prstGeom prst="rect">
+            <a:avLst/>
+          </a:prstGeom>
+        </p:spPr>
+      </p:pic>
+      <p:sp>
+        <p:nvSpPr>
+          <p:cNvPr id="5" name="TextBox 4"/>
           <p:cNvSpPr txBox="1"/>
           <p:nvPr/>
         </p:nvSpPr>
@@ -10001,7 +11149,7 @@
               </a:defRPr>
             </a:pPr>
             <a:r>
-              <a:t>Summary &amp; next steps</a:t>
+              <a:t>Exercise scaffold</a:t>
             </a:r>
           </a:p>
         </p:txBody>
@@ -10014,8 +11162,52 @@
         </p:nvSpPr>
         <p:spPr>
           <a:xfrm>
-            <a:off x="548640" y="1234440"/>
-            <a:ext cx="11064240" cy="4937760"/>
+            <a:off x="548640" y="1143000"/>
+            <a:ext cx="11064240" cy="5029200"/>
+          </a:xfrm>
+          <a:prstGeom prst="rect">
+            <a:avLst/>
+          </a:prstGeom>
+          <a:solidFill>
+            <a:srgbClr val="F4F4F4"/>
+          </a:solidFill>
+        </p:spPr>
+        <p:txBody>
+          <a:bodyPr wrap="square">
+            <a:noAutofit/>
+          </a:bodyPr>
+          <a:lstStyle/>
+          <a:p>
+            <a:pPr>
+              <a:lnSpc>
+                <a:spcPts val="2200"/>
+              </a:lnSpc>
+              <a:spcAft>
+                <a:spcPts val="400"/>
+              </a:spcAft>
+              <a:defRPr sz="2000" b="0">
+                <a:solidFill>
+                  <a:srgbClr val="333333"/>
+                </a:solidFill>
+                <a:latin typeface="Consolas"/>
+              </a:defRPr>
+            </a:pPr>
+            <a:r>
+              <a:t>./scripts/module4.sh --scaffold</a:t>
+            </a:r>
+          </a:p>
+        </p:txBody>
+      </p:sp>
+      <p:sp>
+        <p:nvSpPr>
+          <p:cNvPr id="4" name="TextBox 3"/>
+          <p:cNvSpPr txBox="1"/>
+          <p:nvPr/>
+        </p:nvSpPr>
+        <p:spPr>
+          <a:xfrm>
+            <a:off x="548640" y="6355080"/>
+            <a:ext cx="11064240" cy="320040"/>
           </a:xfrm>
           <a:prstGeom prst="rect">
             <a:avLst/>
@@ -10028,105 +11220,807 @@
           </a:bodyPr>
           <a:lstStyle/>
           <a:p>
-            <a:pPr>
-              <a:lnSpc>
-                <a:spcPts val="2200"/>
-              </a:lnSpc>
-              <a:spcAft>
-                <a:spcPts val="1000"/>
-              </a:spcAft>
-              <a:defRPr sz="2000" b="0">
-                <a:solidFill>
-                  <a:srgbClr val="333333"/>
-                </a:solidFill>
-                <a:latin typeface="Calibri"/>
-              </a:defRPr>
-            </a:pPr>
-            <a:r>
-              <a:t>• Design and mature your **UVM environment** (env,</a:t>
-            </a:r>
-          </a:p>
-          <a:p>
-            <a:pPr>
-              <a:lnSpc>
-                <a:spcPts val="2200"/>
-              </a:lnSpc>
-              <a:spcAft>
-                <a:spcPts val="1000"/>
-              </a:spcAft>
-              <a:defRPr sz="2000" b="0">
-                <a:solidFill>
-                  <a:srgbClr val="333333"/>
-                </a:solidFill>
-                <a:latin typeface="Calibri"/>
-              </a:defRPr>
-            </a:pPr>
-            <a:r>
-              <a:t>      agents, drivers, monitors, sequencers) and **check…</a:t>
-            </a:r>
-          </a:p>
-          <a:p>
-            <a:pPr>
-              <a:lnSpc>
-                <a:spcPts val="2200"/>
-              </a:lnSpc>
-              <a:spcAft>
-                <a:spcPts val="1000"/>
-              </a:spcAft>
-              <a:defRPr sz="2000" b="0">
-                <a:solidFill>
-                  <a:srgbClr val="333333"/>
-                </a:solidFill>
-                <a:latin typeface="Calibri"/>
-              </a:defRPr>
-            </a:pPr>
-            <a:r>
-              <a:t>• Complete module4/CHECKLIST.md</a:t>
-            </a:r>
-          </a:p>
-          <a:p>
-            <a:pPr>
-              <a:lnSpc>
-                <a:spcPts val="2200"/>
-              </a:lnSpc>
-              <a:spcAft>
-                <a:spcPts val="1000"/>
-              </a:spcAft>
-              <a:defRPr sz="2000" b="0">
-                <a:solidFill>
-                  <a:srgbClr val="333333"/>
-                </a:solidFill>
-                <a:latin typeface="Calibri"/>
-              </a:defRPr>
-            </a:pPr>
-            <a:r>
-              <a:t>• Review module4/EXAMPLES.md and run each lab</a:t>
-            </a:r>
-          </a:p>
-          <a:p>
-            <a:pPr>
-              <a:lnSpc>
-                <a:spcPts val="2200"/>
-              </a:lnSpc>
-              <a:spcAft>
-                <a:spcPts val="1000"/>
-              </a:spcAft>
-              <a:defRPr sz="2000" b="0">
-                <a:solidFill>
-                  <a:srgbClr val="333333"/>
-                </a:solidFill>
-                <a:latin typeface="Calibri"/>
-              </a:defRPr>
-            </a:pPr>
-            <a:r>
-              <a:t>• Next: Next module in course</a:t>
-            </a:r>
-          </a:p>
-        </p:txBody>
-      </p:sp>
-      <p:sp>
-        <p:nvSpPr>
-          <p:cNvPr id="4" name="TextBox 3"/>
+            <a:pPr algn="r">
+              <a:lnSpc>
+                <a:spcPts val="2200"/>
+              </a:lnSpc>
+              <a:defRPr sz="1000" b="0">
+                <a:solidFill>
+                  <a:srgbClr val="666666"/>
+                </a:solidFill>
+                <a:latin typeface="Calibri"/>
+              </a:defRPr>
+            </a:pPr>
+            <a:r>
+              <a:t>verification_planning_management / Module 4</a:t>
+            </a:r>
+          </a:p>
+        </p:txBody>
+      </p:sp>
+    </p:spTree>
+  </p:cSld>
+  <p:clrMapOvr>
+    <a:masterClrMapping/>
+  </p:clrMapOvr>
+</p:sld>
+</file>
+
+<file path=ppt/slides/slide35.xml><?xml version="1.0" encoding="utf-8"?>
+<p:sld xmlns:a="http://schemas.openxmlformats.org/drawingml/2006/main" xmlns:p="http://schemas.openxmlformats.org/presentationml/2006/main" xmlns:r="http://schemas.openxmlformats.org/officeDocument/2006/relationships">
+  <p:cSld>
+    <p:spTree>
+      <p:nvGrpSpPr>
+        <p:cNvPr id="1" name=""/>
+        <p:cNvGrpSpPr/>
+        <p:nvPr/>
+      </p:nvGrpSpPr>
+      <p:grpSpPr/>
+      <p:sp>
+        <p:nvSpPr>
+          <p:cNvPr id="2" name="TextBox 1"/>
+          <p:cNvSpPr txBox="1"/>
+          <p:nvPr/>
+        </p:nvSpPr>
+        <p:spPr>
+          <a:xfrm>
+            <a:off x="548640" y="411480"/>
+            <a:ext cx="11064240" cy="777240"/>
+          </a:xfrm>
+          <a:prstGeom prst="rect">
+            <a:avLst/>
+          </a:prstGeom>
+          <a:noFill/>
+        </p:spPr>
+        <p:txBody>
+          <a:bodyPr wrap="square">
+            <a:noAutofit/>
+          </a:bodyPr>
+          <a:lstStyle/>
+          <a:p>
+            <a:pPr>
+              <a:lnSpc>
+                <a:spcPts val="2200"/>
+              </a:lnSpc>
+              <a:defRPr sz="2800" b="1">
+                <a:solidFill>
+                  <a:srgbClr val="1A1A2E"/>
+                </a:solidFill>
+                <a:latin typeface="Calibri"/>
+              </a:defRPr>
+            </a:pPr>
+            <a:r>
+              <a:t>Demo: Environment design template</a:t>
+            </a:r>
+          </a:p>
+        </p:txBody>
+      </p:sp>
+      <p:sp>
+        <p:nvSpPr>
+          <p:cNvPr id="3" name="TextBox 2"/>
+          <p:cNvSpPr txBox="1"/>
+          <p:nvPr/>
+        </p:nvSpPr>
+        <p:spPr>
+          <a:xfrm>
+            <a:off x="548640" y="1051560"/>
+            <a:ext cx="11064240" cy="914400"/>
+          </a:xfrm>
+          <a:prstGeom prst="rect">
+            <a:avLst/>
+          </a:prstGeom>
+          <a:solidFill>
+            <a:srgbClr val="F4F4F4"/>
+          </a:solidFill>
+        </p:spPr>
+        <p:txBody>
+          <a:bodyPr wrap="square">
+            <a:noAutofit/>
+          </a:bodyPr>
+          <a:lstStyle/>
+          <a:p>
+            <a:pPr>
+              <a:lnSpc>
+                <a:spcPts val="2200"/>
+              </a:lnSpc>
+              <a:spcAft>
+                <a:spcPts val="200"/>
+              </a:spcAft>
+              <a:defRPr sz="2000" b="0">
+                <a:solidFill>
+                  <a:srgbClr val="333333"/>
+                </a:solidFill>
+                <a:latin typeface="Consolas"/>
+              </a:defRPr>
+            </a:pPr>
+            <a:r>
+              <a:t>$ head -30 module4/templates/ENV_DESIGN.md</a:t>
+            </a:r>
+          </a:p>
+        </p:txBody>
+      </p:sp>
+      <p:pic>
+        <p:nvPicPr>
+          <p:cNvPr id="4" name="Picture 3" descr="ex01_env_design.png"/>
+          <p:cNvPicPr>
+            <a:picLocks noChangeAspect="1"/>
+          </p:cNvPicPr>
+          <p:nvPr/>
+        </p:nvPicPr>
+        <p:blipFill>
+          <a:blip r:embed="rId2"/>
+          <a:stretch>
+            <a:fillRect/>
+          </a:stretch>
+        </p:blipFill>
+        <p:spPr>
+          <a:xfrm>
+            <a:off x="548640" y="1965960"/>
+            <a:ext cx="7071358" cy="3977639"/>
+          </a:xfrm>
+          <a:prstGeom prst="rect">
+            <a:avLst/>
+          </a:prstGeom>
+        </p:spPr>
+      </p:pic>
+      <p:sp>
+        <p:nvSpPr>
+          <p:cNvPr id="5" name="TextBox 4"/>
+          <p:cNvSpPr txBox="1"/>
+          <p:nvPr/>
+        </p:nvSpPr>
+        <p:spPr>
+          <a:xfrm>
+            <a:off x="548640" y="6355080"/>
+            <a:ext cx="11064240" cy="320040"/>
+          </a:xfrm>
+          <a:prstGeom prst="rect">
+            <a:avLst/>
+          </a:prstGeom>
+          <a:noFill/>
+        </p:spPr>
+        <p:txBody>
+          <a:bodyPr wrap="square">
+            <a:noAutofit/>
+          </a:bodyPr>
+          <a:lstStyle/>
+          <a:p>
+            <a:pPr algn="r">
+              <a:lnSpc>
+                <a:spcPts val="2200"/>
+              </a:lnSpc>
+              <a:defRPr sz="1000" b="0">
+                <a:solidFill>
+                  <a:srgbClr val="666666"/>
+                </a:solidFill>
+                <a:latin typeface="Calibri"/>
+              </a:defRPr>
+            </a:pPr>
+            <a:r>
+              <a:t>verification_planning_management / Module 4</a:t>
+            </a:r>
+          </a:p>
+        </p:txBody>
+      </p:sp>
+    </p:spTree>
+  </p:cSld>
+  <p:clrMapOvr>
+    <a:masterClrMapping/>
+  </p:clrMapOvr>
+</p:sld>
+</file>
+
+<file path=ppt/slides/slide36.xml><?xml version="1.0" encoding="utf-8"?>
+<p:sld xmlns:a="http://schemas.openxmlformats.org/drawingml/2006/main" xmlns:p="http://schemas.openxmlformats.org/presentationml/2006/main" xmlns:r="http://schemas.openxmlformats.org/officeDocument/2006/relationships">
+  <p:cSld>
+    <p:spTree>
+      <p:nvGrpSpPr>
+        <p:cNvPr id="1" name=""/>
+        <p:cNvGrpSpPr/>
+        <p:nvPr/>
+      </p:nvGrpSpPr>
+      <p:grpSpPr/>
+      <p:sp>
+        <p:nvSpPr>
+          <p:cNvPr id="2" name="TextBox 1"/>
+          <p:cNvSpPr txBox="1"/>
+          <p:nvPr/>
+        </p:nvSpPr>
+        <p:spPr>
+          <a:xfrm>
+            <a:off x="548640" y="411480"/>
+            <a:ext cx="11064240" cy="777240"/>
+          </a:xfrm>
+          <a:prstGeom prst="rect">
+            <a:avLst/>
+          </a:prstGeom>
+          <a:noFill/>
+        </p:spPr>
+        <p:txBody>
+          <a:bodyPr wrap="square">
+            <a:noAutofit/>
+          </a:bodyPr>
+          <a:lstStyle/>
+          <a:p>
+            <a:pPr>
+              <a:lnSpc>
+                <a:spcPts val="2200"/>
+              </a:lnSpc>
+              <a:defRPr sz="2800" b="1">
+                <a:solidFill>
+                  <a:srgbClr val="1A1A2E"/>
+                </a:solidFill>
+                <a:latin typeface="Calibri"/>
+              </a:defRPr>
+            </a:pPr>
+            <a:r>
+              <a:t>Demo: Checker plan template</a:t>
+            </a:r>
+          </a:p>
+        </p:txBody>
+      </p:sp>
+      <p:sp>
+        <p:nvSpPr>
+          <p:cNvPr id="3" name="TextBox 2"/>
+          <p:cNvSpPr txBox="1"/>
+          <p:nvPr/>
+        </p:nvSpPr>
+        <p:spPr>
+          <a:xfrm>
+            <a:off x="548640" y="1051560"/>
+            <a:ext cx="11064240" cy="914400"/>
+          </a:xfrm>
+          <a:prstGeom prst="rect">
+            <a:avLst/>
+          </a:prstGeom>
+          <a:solidFill>
+            <a:srgbClr val="F4F4F4"/>
+          </a:solidFill>
+        </p:spPr>
+        <p:txBody>
+          <a:bodyPr wrap="square">
+            <a:noAutofit/>
+          </a:bodyPr>
+          <a:lstStyle/>
+          <a:p>
+            <a:pPr>
+              <a:lnSpc>
+                <a:spcPts val="2200"/>
+              </a:lnSpc>
+              <a:spcAft>
+                <a:spcPts val="200"/>
+              </a:spcAft>
+              <a:defRPr sz="2000" b="0">
+                <a:solidFill>
+                  <a:srgbClr val="333333"/>
+                </a:solidFill>
+                <a:latin typeface="Consolas"/>
+              </a:defRPr>
+            </a:pPr>
+            <a:r>
+              <a:t>$ head -25 module4/templates/CHECKER_PLAN.md</a:t>
+            </a:r>
+          </a:p>
+        </p:txBody>
+      </p:sp>
+      <p:pic>
+        <p:nvPicPr>
+          <p:cNvPr id="4" name="Picture 3" descr="ex02_checker_plan.png"/>
+          <p:cNvPicPr>
+            <a:picLocks noChangeAspect="1"/>
+          </p:cNvPicPr>
+          <p:nvPr/>
+        </p:nvPicPr>
+        <p:blipFill>
+          <a:blip r:embed="rId2"/>
+          <a:stretch>
+            <a:fillRect/>
+          </a:stretch>
+        </p:blipFill>
+        <p:spPr>
+          <a:xfrm>
+            <a:off x="548640" y="1965960"/>
+            <a:ext cx="7071358" cy="3977639"/>
+          </a:xfrm>
+          <a:prstGeom prst="rect">
+            <a:avLst/>
+          </a:prstGeom>
+        </p:spPr>
+      </p:pic>
+      <p:sp>
+        <p:nvSpPr>
+          <p:cNvPr id="5" name="TextBox 4"/>
+          <p:cNvSpPr txBox="1"/>
+          <p:nvPr/>
+        </p:nvSpPr>
+        <p:spPr>
+          <a:xfrm>
+            <a:off x="548640" y="6355080"/>
+            <a:ext cx="11064240" cy="320040"/>
+          </a:xfrm>
+          <a:prstGeom prst="rect">
+            <a:avLst/>
+          </a:prstGeom>
+          <a:noFill/>
+        </p:spPr>
+        <p:txBody>
+          <a:bodyPr wrap="square">
+            <a:noAutofit/>
+          </a:bodyPr>
+          <a:lstStyle/>
+          <a:p>
+            <a:pPr algn="r">
+              <a:lnSpc>
+                <a:spcPts val="2200"/>
+              </a:lnSpc>
+              <a:defRPr sz="1000" b="0">
+                <a:solidFill>
+                  <a:srgbClr val="666666"/>
+                </a:solidFill>
+                <a:latin typeface="Calibri"/>
+              </a:defRPr>
+            </a:pPr>
+            <a:r>
+              <a:t>verification_planning_management / Module 4</a:t>
+            </a:r>
+          </a:p>
+        </p:txBody>
+      </p:sp>
+    </p:spTree>
+  </p:cSld>
+  <p:clrMapOvr>
+    <a:masterClrMapping/>
+  </p:clrMapOvr>
+</p:sld>
+</file>
+
+<file path=ppt/slides/slide37.xml><?xml version="1.0" encoding="utf-8"?>
+<p:sld xmlns:a="http://schemas.openxmlformats.org/drawingml/2006/main" xmlns:p="http://schemas.openxmlformats.org/presentationml/2006/main" xmlns:r="http://schemas.openxmlformats.org/officeDocument/2006/relationships">
+  <p:cSld>
+    <p:spTree>
+      <p:nvGrpSpPr>
+        <p:cNvPr id="1" name=""/>
+        <p:cNvGrpSpPr/>
+        <p:nvPr/>
+      </p:nvGrpSpPr>
+      <p:grpSpPr/>
+      <p:sp>
+        <p:nvSpPr>
+          <p:cNvPr id="2" name="TextBox 1"/>
+          <p:cNvSpPr txBox="1"/>
+          <p:nvPr/>
+        </p:nvSpPr>
+        <p:spPr>
+          <a:xfrm>
+            <a:off x="548640" y="411480"/>
+            <a:ext cx="11064240" cy="777240"/>
+          </a:xfrm>
+          <a:prstGeom prst="rect">
+            <a:avLst/>
+          </a:prstGeom>
+          <a:noFill/>
+        </p:spPr>
+        <p:txBody>
+          <a:bodyPr wrap="square">
+            <a:noAutofit/>
+          </a:bodyPr>
+          <a:lstStyle/>
+          <a:p>
+            <a:pPr>
+              <a:lnSpc>
+                <a:spcPts val="2200"/>
+              </a:lnSpc>
+              <a:defRPr sz="2800" b="1">
+                <a:solidFill>
+                  <a:srgbClr val="1A1A2E"/>
+                </a:solidFill>
+                <a:latin typeface="Calibri"/>
+              </a:defRPr>
+            </a:pPr>
+            <a:r>
+              <a:t>Demo: Module-local UVM TB</a:t>
+            </a:r>
+          </a:p>
+        </p:txBody>
+      </p:sp>
+      <p:sp>
+        <p:nvSpPr>
+          <p:cNvPr id="3" name="TextBox 2"/>
+          <p:cNvSpPr txBox="1"/>
+          <p:nvPr/>
+        </p:nvSpPr>
+        <p:spPr>
+          <a:xfrm>
+            <a:off x="548640" y="1051560"/>
+            <a:ext cx="11064240" cy="914400"/>
+          </a:xfrm>
+          <a:prstGeom prst="rect">
+            <a:avLst/>
+          </a:prstGeom>
+          <a:solidFill>
+            <a:srgbClr val="F4F4F4"/>
+          </a:solidFill>
+        </p:spPr>
+        <p:txBody>
+          <a:bodyPr wrap="square">
+            <a:noAutofit/>
+          </a:bodyPr>
+          <a:lstStyle/>
+          <a:p>
+            <a:pPr>
+              <a:lnSpc>
+                <a:spcPts val="2200"/>
+              </a:lnSpc>
+              <a:spcAft>
+                <a:spcPts val="200"/>
+              </a:spcAft>
+              <a:defRPr sz="2000" b="0">
+                <a:solidFill>
+                  <a:srgbClr val="333333"/>
+                </a:solidFill>
+                <a:latin typeface="Consolas"/>
+              </a:defRPr>
+            </a:pPr>
+            <a:r>
+              <a:t>$ head -35 module4/tb/tb_stream_fifo_uvm.sv</a:t>
+            </a:r>
+          </a:p>
+        </p:txBody>
+      </p:sp>
+      <p:pic>
+        <p:nvPicPr>
+          <p:cNvPr id="4" name="Picture 3" descr="ex03_module_tb.png"/>
+          <p:cNvPicPr>
+            <a:picLocks noChangeAspect="1"/>
+          </p:cNvPicPr>
+          <p:nvPr/>
+        </p:nvPicPr>
+        <p:blipFill>
+          <a:blip r:embed="rId2"/>
+          <a:stretch>
+            <a:fillRect/>
+          </a:stretch>
+        </p:blipFill>
+        <p:spPr>
+          <a:xfrm>
+            <a:off x="548640" y="1965960"/>
+            <a:ext cx="7071358" cy="3977639"/>
+          </a:xfrm>
+          <a:prstGeom prst="rect">
+            <a:avLst/>
+          </a:prstGeom>
+        </p:spPr>
+      </p:pic>
+      <p:sp>
+        <p:nvSpPr>
+          <p:cNvPr id="5" name="TextBox 4"/>
+          <p:cNvSpPr txBox="1"/>
+          <p:nvPr/>
+        </p:nvSpPr>
+        <p:spPr>
+          <a:xfrm>
+            <a:off x="548640" y="6355080"/>
+            <a:ext cx="11064240" cy="320040"/>
+          </a:xfrm>
+          <a:prstGeom prst="rect">
+            <a:avLst/>
+          </a:prstGeom>
+          <a:noFill/>
+        </p:spPr>
+        <p:txBody>
+          <a:bodyPr wrap="square">
+            <a:noAutofit/>
+          </a:bodyPr>
+          <a:lstStyle/>
+          <a:p>
+            <a:pPr algn="r">
+              <a:lnSpc>
+                <a:spcPts val="2200"/>
+              </a:lnSpc>
+              <a:defRPr sz="1000" b="0">
+                <a:solidFill>
+                  <a:srgbClr val="666666"/>
+                </a:solidFill>
+                <a:latin typeface="Calibri"/>
+              </a:defRPr>
+            </a:pPr>
+            <a:r>
+              <a:t>verification_planning_management / Module 4</a:t>
+            </a:r>
+          </a:p>
+        </p:txBody>
+      </p:sp>
+    </p:spTree>
+  </p:cSld>
+  <p:clrMapOvr>
+    <a:masterClrMapping/>
+  </p:clrMapOvr>
+</p:sld>
+</file>
+
+<file path=ppt/slides/slide38.xml><?xml version="1.0" encoding="utf-8"?>
+<p:sld xmlns:a="http://schemas.openxmlformats.org/drawingml/2006/main" xmlns:p="http://schemas.openxmlformats.org/presentationml/2006/main" xmlns:r="http://schemas.openxmlformats.org/officeDocument/2006/relationships">
+  <p:cSld>
+    <p:spTree>
+      <p:nvGrpSpPr>
+        <p:cNvPr id="1" name=""/>
+        <p:cNvGrpSpPr/>
+        <p:nvPr/>
+      </p:nvGrpSpPr>
+      <p:grpSpPr/>
+      <p:sp>
+        <p:nvSpPr>
+          <p:cNvPr id="2" name="TextBox 1"/>
+          <p:cNvSpPr txBox="1"/>
+          <p:nvPr/>
+        </p:nvSpPr>
+        <p:spPr>
+          <a:xfrm>
+            <a:off x="548640" y="411480"/>
+            <a:ext cx="11064240" cy="777240"/>
+          </a:xfrm>
+          <a:prstGeom prst="rect">
+            <a:avLst/>
+          </a:prstGeom>
+          <a:noFill/>
+        </p:spPr>
+        <p:txBody>
+          <a:bodyPr wrap="square">
+            <a:noAutofit/>
+          </a:bodyPr>
+          <a:lstStyle/>
+          <a:p>
+            <a:pPr>
+              <a:lnSpc>
+                <a:spcPts val="2200"/>
+              </a:lnSpc>
+              <a:defRPr sz="2800" b="1">
+                <a:solidFill>
+                  <a:srgbClr val="1A1A2E"/>
+                </a:solidFill>
+                <a:latin typeface="Calibri"/>
+              </a:defRPr>
+            </a:pPr>
+            <a:r>
+              <a:t>Demo: Reference env design</a:t>
+            </a:r>
+          </a:p>
+        </p:txBody>
+      </p:sp>
+      <p:sp>
+        <p:nvSpPr>
+          <p:cNvPr id="3" name="TextBox 2"/>
+          <p:cNvSpPr txBox="1"/>
+          <p:nvPr/>
+        </p:nvSpPr>
+        <p:spPr>
+          <a:xfrm>
+            <a:off x="548640" y="1051560"/>
+            <a:ext cx="11064240" cy="914400"/>
+          </a:xfrm>
+          <a:prstGeom prst="rect">
+            <a:avLst/>
+          </a:prstGeom>
+          <a:solidFill>
+            <a:srgbClr val="F4F4F4"/>
+          </a:solidFill>
+        </p:spPr>
+        <p:txBody>
+          <a:bodyPr wrap="square">
+            <a:noAutofit/>
+          </a:bodyPr>
+          <a:lstStyle/>
+          <a:p>
+            <a:pPr>
+              <a:lnSpc>
+                <a:spcPts val="2200"/>
+              </a:lnSpc>
+              <a:spcAft>
+                <a:spcPts val="200"/>
+              </a:spcAft>
+              <a:defRPr sz="2000" b="0">
+                <a:solidFill>
+                  <a:srgbClr val="333333"/>
+                </a:solidFill>
+                <a:latin typeface="Consolas"/>
+              </a:defRPr>
+            </a:pPr>
+            <a:r>
+              <a:t>$ head -20 module4/.solutions/ENV_DESIGN.md</a:t>
+            </a:r>
+          </a:p>
+        </p:txBody>
+      </p:sp>
+      <p:pic>
+        <p:nvPicPr>
+          <p:cNvPr id="4" name="Picture 3" descr="ex04_solutions.png"/>
+          <p:cNvPicPr>
+            <a:picLocks noChangeAspect="1"/>
+          </p:cNvPicPr>
+          <p:nvPr/>
+        </p:nvPicPr>
+        <p:blipFill>
+          <a:blip r:embed="rId2"/>
+          <a:stretch>
+            <a:fillRect/>
+          </a:stretch>
+        </p:blipFill>
+        <p:spPr>
+          <a:xfrm>
+            <a:off x="548640" y="1965960"/>
+            <a:ext cx="7071358" cy="3977639"/>
+          </a:xfrm>
+          <a:prstGeom prst="rect">
+            <a:avLst/>
+          </a:prstGeom>
+        </p:spPr>
+      </p:pic>
+      <p:sp>
+        <p:nvSpPr>
+          <p:cNvPr id="5" name="TextBox 4"/>
+          <p:cNvSpPr txBox="1"/>
+          <p:nvPr/>
+        </p:nvSpPr>
+        <p:spPr>
+          <a:xfrm>
+            <a:off x="548640" y="6355080"/>
+            <a:ext cx="11064240" cy="320040"/>
+          </a:xfrm>
+          <a:prstGeom prst="rect">
+            <a:avLst/>
+          </a:prstGeom>
+          <a:noFill/>
+        </p:spPr>
+        <p:txBody>
+          <a:bodyPr wrap="square">
+            <a:noAutofit/>
+          </a:bodyPr>
+          <a:lstStyle/>
+          <a:p>
+            <a:pPr algn="r">
+              <a:lnSpc>
+                <a:spcPts val="2200"/>
+              </a:lnSpc>
+              <a:defRPr sz="1000" b="0">
+                <a:solidFill>
+                  <a:srgbClr val="666666"/>
+                </a:solidFill>
+                <a:latin typeface="Calibri"/>
+              </a:defRPr>
+            </a:pPr>
+            <a:r>
+              <a:t>verification_planning_management / Module 4</a:t>
+            </a:r>
+          </a:p>
+        </p:txBody>
+      </p:sp>
+    </p:spTree>
+  </p:cSld>
+  <p:clrMapOvr>
+    <a:masterClrMapping/>
+  </p:clrMapOvr>
+</p:sld>
+</file>
+
+<file path=ppt/slides/slide39.xml><?xml version="1.0" encoding="utf-8"?>
+<p:sld xmlns:a="http://schemas.openxmlformats.org/drawingml/2006/main" xmlns:p="http://schemas.openxmlformats.org/presentationml/2006/main" xmlns:r="http://schemas.openxmlformats.org/officeDocument/2006/relationships">
+  <p:cSld>
+    <p:spTree>
+      <p:nvGrpSpPr>
+        <p:cNvPr id="1" name=""/>
+        <p:cNvGrpSpPr/>
+        <p:nvPr/>
+      </p:nvGrpSpPr>
+      <p:grpSpPr/>
+      <p:sp>
+        <p:nvSpPr>
+          <p:cNvPr id="2" name="TextBox 1"/>
+          <p:cNvSpPr txBox="1"/>
+          <p:nvPr/>
+        </p:nvSpPr>
+        <p:spPr>
+          <a:xfrm>
+            <a:off x="548640" y="411480"/>
+            <a:ext cx="11064240" cy="777240"/>
+          </a:xfrm>
+          <a:prstGeom prst="rect">
+            <a:avLst/>
+          </a:prstGeom>
+          <a:noFill/>
+        </p:spPr>
+        <p:txBody>
+          <a:bodyPr wrap="square">
+            <a:noAutofit/>
+          </a:bodyPr>
+          <a:lstStyle/>
+          <a:p>
+            <a:pPr>
+              <a:lnSpc>
+                <a:spcPts val="2200"/>
+              </a:lnSpc>
+              <a:defRPr sz="2800" b="1">
+                <a:solidFill>
+                  <a:srgbClr val="1A1A2E"/>
+                </a:solidFill>
+                <a:latin typeface="Calibri"/>
+              </a:defRPr>
+            </a:pPr>
+            <a:r>
+              <a:t>Demo: Module validation</a:t>
+            </a:r>
+          </a:p>
+        </p:txBody>
+      </p:sp>
+      <p:sp>
+        <p:nvSpPr>
+          <p:cNvPr id="3" name="TextBox 2"/>
+          <p:cNvSpPr txBox="1"/>
+          <p:nvPr/>
+        </p:nvSpPr>
+        <p:spPr>
+          <a:xfrm>
+            <a:off x="548640" y="1051560"/>
+            <a:ext cx="11064240" cy="914400"/>
+          </a:xfrm>
+          <a:prstGeom prst="rect">
+            <a:avLst/>
+          </a:prstGeom>
+          <a:solidFill>
+            <a:srgbClr val="F4F4F4"/>
+          </a:solidFill>
+        </p:spPr>
+        <p:txBody>
+          <a:bodyPr wrap="square">
+            <a:noAutofit/>
+          </a:bodyPr>
+          <a:lstStyle/>
+          <a:p>
+            <a:pPr>
+              <a:lnSpc>
+                <a:spcPts val="2200"/>
+              </a:lnSpc>
+              <a:spcAft>
+                <a:spcPts val="200"/>
+              </a:spcAft>
+              <a:defRPr sz="2000" b="0">
+                <a:solidFill>
+                  <a:srgbClr val="333333"/>
+                </a:solidFill>
+                <a:latin typeface="Consolas"/>
+              </a:defRPr>
+            </a:pPr>
+            <a:r>
+              <a:t>$ ./scripts/module4.sh --check</a:t>
+            </a:r>
+          </a:p>
+        </p:txBody>
+      </p:sp>
+      <p:pic>
+        <p:nvPicPr>
+          <p:cNvPr id="4" name="Picture 3" descr="ex05_validate.png"/>
+          <p:cNvPicPr>
+            <a:picLocks noChangeAspect="1"/>
+          </p:cNvPicPr>
+          <p:nvPr/>
+        </p:nvPicPr>
+        <p:blipFill>
+          <a:blip r:embed="rId2"/>
+          <a:stretch>
+            <a:fillRect/>
+          </a:stretch>
+        </p:blipFill>
+        <p:spPr>
+          <a:xfrm>
+            <a:off x="548640" y="1965960"/>
+            <a:ext cx="7071358" cy="3977639"/>
+          </a:xfrm>
+          <a:prstGeom prst="rect">
+            <a:avLst/>
+          </a:prstGeom>
+        </p:spPr>
+      </p:pic>
+      <p:sp>
+        <p:nvSpPr>
+          <p:cNvPr id="5" name="TextBox 4"/>
           <p:cNvSpPr txBox="1"/>
           <p:nvPr/>
         </p:nvSpPr>
@@ -10330,6 +12224,1262 @@
 </p:sld>
 </file>
 
+<file path=ppt/slides/slide40.xml><?xml version="1.0" encoding="utf-8"?>
+<p:sld xmlns:a="http://schemas.openxmlformats.org/drawingml/2006/main" xmlns:p="http://schemas.openxmlformats.org/presentationml/2006/main" xmlns:r="http://schemas.openxmlformats.org/officeDocument/2006/relationships">
+  <p:cSld>
+    <p:spTree>
+      <p:nvGrpSpPr>
+        <p:cNvPr id="1" name=""/>
+        <p:cNvGrpSpPr/>
+        <p:nvPr/>
+      </p:nvGrpSpPr>
+      <p:grpSpPr/>
+      <p:sp>
+        <p:nvSpPr>
+          <p:cNvPr id="2" name="TextBox 1"/>
+          <p:cNvSpPr txBox="1"/>
+          <p:nvPr/>
+        </p:nvSpPr>
+        <p:spPr>
+          <a:xfrm>
+            <a:off x="548640" y="2743200"/>
+            <a:ext cx="11064240" cy="1371600"/>
+          </a:xfrm>
+          <a:prstGeom prst="rect">
+            <a:avLst/>
+          </a:prstGeom>
+          <a:noFill/>
+        </p:spPr>
+        <p:txBody>
+          <a:bodyPr wrap="square">
+            <a:noAutofit/>
+          </a:bodyPr>
+          <a:lstStyle/>
+          <a:p>
+            <a:pPr algn="ctr">
+              <a:lnSpc>
+                <a:spcPts val="2200"/>
+              </a:lnSpc>
+              <a:defRPr sz="3600" b="1">
+                <a:solidFill>
+                  <a:srgbClr val="1A1A2E"/>
+                </a:solidFill>
+                <a:latin typeface="Calibri"/>
+              </a:defRPr>
+            </a:pPr>
+            <a:r>
+              <a:t>Practice &amp; assessment</a:t>
+            </a:r>
+          </a:p>
+        </p:txBody>
+      </p:sp>
+      <p:sp>
+        <p:nvSpPr>
+          <p:cNvPr id="3" name="TextBox 2"/>
+          <p:cNvSpPr txBox="1"/>
+          <p:nvPr/>
+        </p:nvSpPr>
+        <p:spPr>
+          <a:xfrm>
+            <a:off x="548640" y="6355080"/>
+            <a:ext cx="11064240" cy="320040"/>
+          </a:xfrm>
+          <a:prstGeom prst="rect">
+            <a:avLst/>
+          </a:prstGeom>
+          <a:noFill/>
+        </p:spPr>
+        <p:txBody>
+          <a:bodyPr wrap="square">
+            <a:noAutofit/>
+          </a:bodyPr>
+          <a:lstStyle/>
+          <a:p>
+            <a:pPr algn="r">
+              <a:lnSpc>
+                <a:spcPts val="2200"/>
+              </a:lnSpc>
+              <a:defRPr sz="1000" b="0">
+                <a:solidFill>
+                  <a:srgbClr val="666666"/>
+                </a:solidFill>
+                <a:latin typeface="Calibri"/>
+              </a:defRPr>
+            </a:pPr>
+            <a:r>
+              <a:t>verification_planning_management / Module 4</a:t>
+            </a:r>
+          </a:p>
+        </p:txBody>
+      </p:sp>
+    </p:spTree>
+  </p:cSld>
+  <p:clrMapOvr>
+    <a:masterClrMapping/>
+  </p:clrMapOvr>
+</p:sld>
+</file>
+
+<file path=ppt/slides/slide41.xml><?xml version="1.0" encoding="utf-8"?>
+<p:sld xmlns:a="http://schemas.openxmlformats.org/drawingml/2006/main" xmlns:p="http://schemas.openxmlformats.org/presentationml/2006/main" xmlns:r="http://schemas.openxmlformats.org/officeDocument/2006/relationships">
+  <p:cSld>
+    <p:spTree>
+      <p:nvGrpSpPr>
+        <p:cNvPr id="1" name=""/>
+        <p:cNvGrpSpPr/>
+        <p:nvPr/>
+      </p:nvGrpSpPr>
+      <p:grpSpPr/>
+      <p:sp>
+        <p:nvSpPr>
+          <p:cNvPr id="2" name="TextBox 1"/>
+          <p:cNvSpPr txBox="1"/>
+          <p:nvPr/>
+        </p:nvSpPr>
+        <p:spPr>
+          <a:xfrm>
+            <a:off x="548640" y="411480"/>
+            <a:ext cx="11064240" cy="777240"/>
+          </a:xfrm>
+          <a:prstGeom prst="rect">
+            <a:avLst/>
+          </a:prstGeom>
+          <a:noFill/>
+        </p:spPr>
+        <p:txBody>
+          <a:bodyPr wrap="square">
+            <a:noAutofit/>
+          </a:bodyPr>
+          <a:lstStyle/>
+          <a:p>
+            <a:pPr>
+              <a:lnSpc>
+                <a:spcPts val="2200"/>
+              </a:lnSpc>
+              <a:defRPr sz="2800" b="1">
+                <a:solidFill>
+                  <a:srgbClr val="1A1A2E"/>
+                </a:solidFill>
+                <a:latin typeface="Calibri"/>
+              </a:defRPr>
+            </a:pPr>
+            <a:r>
+              <a:t>What you should know (1/2)</a:t>
+            </a:r>
+          </a:p>
+        </p:txBody>
+      </p:sp>
+      <p:sp>
+        <p:nvSpPr>
+          <p:cNvPr id="3" name="TextBox 2"/>
+          <p:cNvSpPr txBox="1"/>
+          <p:nvPr/>
+        </p:nvSpPr>
+        <p:spPr>
+          <a:xfrm>
+            <a:off x="548640" y="1234440"/>
+            <a:ext cx="11064240" cy="4937760"/>
+          </a:xfrm>
+          <a:prstGeom prst="rect">
+            <a:avLst/>
+          </a:prstGeom>
+          <a:noFill/>
+        </p:spPr>
+        <p:txBody>
+          <a:bodyPr wrap="square">
+            <a:noAutofit/>
+          </a:bodyPr>
+          <a:lstStyle/>
+          <a:p>
+            <a:pPr>
+              <a:lnSpc>
+                <a:spcPts val="2200"/>
+              </a:lnSpc>
+              <a:spcAft>
+                <a:spcPts val="1000"/>
+              </a:spcAft>
+              <a:defRPr sz="2000" b="0">
+                <a:solidFill>
+                  <a:srgbClr val="333333"/>
+                </a:solidFill>
+                <a:latin typeface="Calibri"/>
+              </a:defRPr>
+            </a:pPr>
+            <a:r>
+              <a:t>• Describe and justify your UVM environment and agent</a:t>
+            </a:r>
+          </a:p>
+          <a:p>
+            <a:pPr>
+              <a:lnSpc>
+                <a:spcPts val="2200"/>
+              </a:lnSpc>
+              <a:spcAft>
+                <a:spcPts val="1000"/>
+              </a:spcAft>
+              <a:defRPr sz="2000" b="0">
+                <a:solidFill>
+                  <a:srgbClr val="333333"/>
+                </a:solidFill>
+                <a:latin typeface="Calibri"/>
+              </a:defRPr>
+            </a:pPr>
+            <a:r>
+              <a:t>      architecture.</a:t>
+            </a:r>
+          </a:p>
+          <a:p>
+            <a:pPr>
+              <a:lnSpc>
+                <a:spcPts val="2200"/>
+              </a:lnSpc>
+              <a:spcAft>
+                <a:spcPts val="1000"/>
+              </a:spcAft>
+              <a:defRPr sz="2000" b="0">
+                <a:solidFill>
+                  <a:srgbClr val="333333"/>
+                </a:solidFill>
+                <a:latin typeface="Calibri"/>
+              </a:defRPr>
+            </a:pPr>
+            <a:r>
+              <a:t>• Implement and maintain drivers, monitors,</a:t>
+            </a:r>
+          </a:p>
+          <a:p>
+            <a:pPr>
+              <a:lnSpc>
+                <a:spcPts val="2200"/>
+              </a:lnSpc>
+              <a:spcAft>
+                <a:spcPts val="1000"/>
+              </a:spcAft>
+              <a:defRPr sz="2000" b="0">
+                <a:solidFill>
+                  <a:srgbClr val="333333"/>
+                </a:solidFill>
+                <a:latin typeface="Calibri"/>
+              </a:defRPr>
+            </a:pPr>
+            <a:r>
+              <a:t>      sequencers, and transactions that match your DUT and</a:t>
+            </a:r>
+          </a:p>
+          <a:p>
+            <a:pPr>
+              <a:lnSpc>
+                <a:spcPts val="2200"/>
+              </a:lnSpc>
+              <a:spcAft>
+                <a:spcPts val="1000"/>
+              </a:spcAft>
+              <a:defRPr sz="2000" b="0">
+                <a:solidFill>
+                  <a:srgbClr val="333333"/>
+                </a:solidFill>
+                <a:latin typeface="Calibri"/>
+              </a:defRPr>
+            </a:pPr>
+            <a:r>
+              <a:t>      test…</a:t>
+            </a:r>
+          </a:p>
+          <a:p>
+            <a:pPr>
+              <a:lnSpc>
+                <a:spcPts val="2200"/>
+              </a:lnSpc>
+              <a:spcAft>
+                <a:spcPts val="1000"/>
+              </a:spcAft>
+              <a:defRPr sz="2000" b="0">
+                <a:solidFill>
+                  <a:srgbClr val="333333"/>
+                </a:solidFill>
+                <a:latin typeface="Calibri"/>
+              </a:defRPr>
+            </a:pPr>
+            <a:r>
+              <a:t>• Implement or integrate scoreboards and reference</a:t>
+            </a:r>
+          </a:p>
+          <a:p>
+            <a:pPr>
+              <a:lnSpc>
+                <a:spcPts val="2200"/>
+              </a:lnSpc>
+              <a:spcAft>
+                <a:spcPts val="1000"/>
+              </a:spcAft>
+              <a:defRPr sz="2000" b="0">
+                <a:solidFill>
+                  <a:srgbClr val="333333"/>
+                </a:solidFill>
+                <a:latin typeface="Calibri"/>
+              </a:defRPr>
+            </a:pPr>
+            <a:r>
+              <a:t>      models for robust checking.</a:t>
+            </a:r>
+          </a:p>
+          <a:p>
+            <a:pPr>
+              <a:lnSpc>
+                <a:spcPts val="2200"/>
+              </a:lnSpc>
+              <a:spcAft>
+                <a:spcPts val="1000"/>
+              </a:spcAft>
+              <a:defRPr sz="2000" b="0">
+                <a:solidFill>
+                  <a:srgbClr val="333333"/>
+                </a:solidFill>
+                <a:latin typeface="Calibri"/>
+              </a:defRPr>
+            </a:pPr>
+            <a:r>
+              <a:t>• Design and place protocol and functional assertions</a:t>
+            </a:r>
+          </a:p>
+          <a:p>
+            <a:pPr>
+              <a:lnSpc>
+                <a:spcPts val="2200"/>
+              </a:lnSpc>
+              <a:spcAft>
+                <a:spcPts val="1000"/>
+              </a:spcAft>
+              <a:defRPr sz="2000" b="0">
+                <a:solidFill>
+                  <a:srgbClr val="333333"/>
+                </a:solidFill>
+                <a:latin typeface="Calibri"/>
+              </a:defRPr>
+            </a:pPr>
+            <a:r>
+              <a:t>      that support your verification goals.</a:t>
+            </a:r>
+          </a:p>
+          <a:p>
+            <a:pPr>
+              <a:lnSpc>
+                <a:spcPts val="2200"/>
+              </a:lnSpc>
+              <a:spcAft>
+                <a:spcPts val="1000"/>
+              </a:spcAft>
+              <a:defRPr sz="2000" b="0">
+                <a:solidFill>
+                  <a:srgbClr val="333333"/>
+                </a:solidFill>
+                <a:latin typeface="Calibri"/>
+              </a:defRPr>
+            </a:pPr>
+            <a:r>
+              <a:t>• Configure your environment for different modes and</a:t>
+            </a:r>
+          </a:p>
+          <a:p>
+            <a:pPr>
+              <a:lnSpc>
+                <a:spcPts val="2200"/>
+              </a:lnSpc>
+              <a:spcAft>
+                <a:spcPts val="1000"/>
+              </a:spcAft>
+              <a:defRPr sz="2000" b="0">
+                <a:solidFill>
+                  <a:srgbClr val="333333"/>
+                </a:solidFill>
+                <a:latin typeface="Calibri"/>
+              </a:defRPr>
+            </a:pPr>
+            <a:r>
+              <a:t>      regression tiers.</a:t>
+            </a:r>
+          </a:p>
+          <a:p>
+            <a:pPr>
+              <a:lnSpc>
+                <a:spcPts val="2200"/>
+              </a:lnSpc>
+              <a:spcAft>
+                <a:spcPts val="1000"/>
+              </a:spcAft>
+              <a:defRPr sz="2000" b="0">
+                <a:solidFill>
+                  <a:srgbClr val="333333"/>
+                </a:solidFill>
+                <a:latin typeface="Calibri"/>
+              </a:defRPr>
+            </a:pPr>
+            <a:r>
+              <a:t>• UVM env/agent architecture documented in</a:t>
+            </a:r>
+          </a:p>
+          <a:p>
+            <a:pPr>
+              <a:lnSpc>
+                <a:spcPts val="2200"/>
+              </a:lnSpc>
+              <a:spcAft>
+                <a:spcPts val="1000"/>
+              </a:spcAft>
+              <a:defRPr sz="2000" b="0">
+                <a:solidFill>
+                  <a:srgbClr val="333333"/>
+                </a:solidFill>
+                <a:latin typeface="Calibri"/>
+              </a:defRPr>
+            </a:pPr>
+            <a:r>
+              <a:t>      `module4/ENV_DESIGN.md`.</a:t>
+            </a:r>
+          </a:p>
+        </p:txBody>
+      </p:sp>
+      <p:sp>
+        <p:nvSpPr>
+          <p:cNvPr id="4" name="TextBox 3"/>
+          <p:cNvSpPr txBox="1"/>
+          <p:nvPr/>
+        </p:nvSpPr>
+        <p:spPr>
+          <a:xfrm>
+            <a:off x="548640" y="6355080"/>
+            <a:ext cx="11064240" cy="320040"/>
+          </a:xfrm>
+          <a:prstGeom prst="rect">
+            <a:avLst/>
+          </a:prstGeom>
+          <a:noFill/>
+        </p:spPr>
+        <p:txBody>
+          <a:bodyPr wrap="square">
+            <a:noAutofit/>
+          </a:bodyPr>
+          <a:lstStyle/>
+          <a:p>
+            <a:pPr algn="r">
+              <a:lnSpc>
+                <a:spcPts val="2200"/>
+              </a:lnSpc>
+              <a:defRPr sz="1000" b="0">
+                <a:solidFill>
+                  <a:srgbClr val="666666"/>
+                </a:solidFill>
+                <a:latin typeface="Calibri"/>
+              </a:defRPr>
+            </a:pPr>
+            <a:r>
+              <a:t>verification_planning_management / Module 4</a:t>
+            </a:r>
+          </a:p>
+        </p:txBody>
+      </p:sp>
+    </p:spTree>
+  </p:cSld>
+  <p:clrMapOvr>
+    <a:masterClrMapping/>
+  </p:clrMapOvr>
+</p:sld>
+</file>
+
+<file path=ppt/slides/slide42.xml><?xml version="1.0" encoding="utf-8"?>
+<p:sld xmlns:a="http://schemas.openxmlformats.org/drawingml/2006/main" xmlns:p="http://schemas.openxmlformats.org/presentationml/2006/main" xmlns:r="http://schemas.openxmlformats.org/officeDocument/2006/relationships">
+  <p:cSld>
+    <p:spTree>
+      <p:nvGrpSpPr>
+        <p:cNvPr id="1" name=""/>
+        <p:cNvGrpSpPr/>
+        <p:nvPr/>
+      </p:nvGrpSpPr>
+      <p:grpSpPr/>
+      <p:sp>
+        <p:nvSpPr>
+          <p:cNvPr id="2" name="TextBox 1"/>
+          <p:cNvSpPr txBox="1"/>
+          <p:nvPr/>
+        </p:nvSpPr>
+        <p:spPr>
+          <a:xfrm>
+            <a:off x="548640" y="411480"/>
+            <a:ext cx="11064240" cy="777240"/>
+          </a:xfrm>
+          <a:prstGeom prst="rect">
+            <a:avLst/>
+          </a:prstGeom>
+          <a:noFill/>
+        </p:spPr>
+        <p:txBody>
+          <a:bodyPr wrap="square">
+            <a:noAutofit/>
+          </a:bodyPr>
+          <a:lstStyle/>
+          <a:p>
+            <a:pPr>
+              <a:lnSpc>
+                <a:spcPts val="2200"/>
+              </a:lnSpc>
+              <a:defRPr sz="2800" b="1">
+                <a:solidFill>
+                  <a:srgbClr val="1A1A2E"/>
+                </a:solidFill>
+                <a:latin typeface="Calibri"/>
+              </a:defRPr>
+            </a:pPr>
+            <a:r>
+              <a:t>What you should know (2/2)</a:t>
+            </a:r>
+          </a:p>
+        </p:txBody>
+      </p:sp>
+      <p:sp>
+        <p:nvSpPr>
+          <p:cNvPr id="3" name="TextBox 2"/>
+          <p:cNvSpPr txBox="1"/>
+          <p:nvPr/>
+        </p:nvSpPr>
+        <p:spPr>
+          <a:xfrm>
+            <a:off x="548640" y="1234440"/>
+            <a:ext cx="11064240" cy="4937760"/>
+          </a:xfrm>
+          <a:prstGeom prst="rect">
+            <a:avLst/>
+          </a:prstGeom>
+          <a:noFill/>
+        </p:spPr>
+        <p:txBody>
+          <a:bodyPr wrap="square">
+            <a:noAutofit/>
+          </a:bodyPr>
+          <a:lstStyle/>
+          <a:p>
+            <a:pPr>
+              <a:lnSpc>
+                <a:spcPts val="2200"/>
+              </a:lnSpc>
+              <a:spcAft>
+                <a:spcPts val="1000"/>
+              </a:spcAft>
+              <a:defRPr sz="2000" b="0">
+                <a:solidFill>
+                  <a:srgbClr val="333333"/>
+                </a:solidFill>
+                <a:latin typeface="Calibri"/>
+              </a:defRPr>
+            </a:pPr>
+            <a:r>
+              <a:t>• Transaction and sequence designs documented and</a:t>
+            </a:r>
+          </a:p>
+          <a:p>
+            <a:pPr>
+              <a:lnSpc>
+                <a:spcPts val="2200"/>
+              </a:lnSpc>
+              <a:spcAft>
+                <a:spcPts val="1000"/>
+              </a:spcAft>
+              <a:defRPr sz="2000" b="0">
+                <a:solidFill>
+                  <a:srgbClr val="333333"/>
+                </a:solidFill>
+                <a:latin typeface="Calibri"/>
+              </a:defRPr>
+            </a:pPr>
+            <a:r>
+              <a:t>      aligned with `module2/TEST_PLAN.md`.</a:t>
+            </a:r>
+          </a:p>
+          <a:p>
+            <a:pPr>
+              <a:lnSpc>
+                <a:spcPts val="2200"/>
+              </a:lnSpc>
+              <a:spcAft>
+                <a:spcPts val="1000"/>
+              </a:spcAft>
+              <a:defRPr sz="2000" b="0">
+                <a:solidFill>
+                  <a:srgbClr val="333333"/>
+                </a:solidFill>
+                <a:latin typeface="Calibri"/>
+              </a:defRPr>
+            </a:pPr>
+            <a:r>
+              <a:t>• Scoreboards and reference models specified in</a:t>
+            </a:r>
+          </a:p>
+          <a:p>
+            <a:pPr>
+              <a:lnSpc>
+                <a:spcPts val="2200"/>
+              </a:lnSpc>
+              <a:spcAft>
+                <a:spcPts val="1000"/>
+              </a:spcAft>
+              <a:defRPr sz="2000" b="0">
+                <a:solidFill>
+                  <a:srgbClr val="333333"/>
+                </a:solidFill>
+                <a:latin typeface="Calibri"/>
+              </a:defRPr>
+            </a:pPr>
+            <a:r>
+              <a:t>      `module4/CHECKER_PLAN.md`.</a:t>
+            </a:r>
+          </a:p>
+          <a:p>
+            <a:pPr>
+              <a:lnSpc>
+                <a:spcPts val="2200"/>
+              </a:lnSpc>
+              <a:spcAft>
+                <a:spcPts val="1000"/>
+              </a:spcAft>
+              <a:defRPr sz="2000" b="0">
+                <a:solidFill>
+                  <a:srgbClr val="333333"/>
+                </a:solidFill>
+                <a:latin typeface="Calibri"/>
+              </a:defRPr>
+            </a:pPr>
+            <a:r>
+              <a:t>• Key protocol/functional assertions listed and</a:t>
+            </a:r>
+          </a:p>
+          <a:p>
+            <a:pPr>
+              <a:lnSpc>
+                <a:spcPts val="2200"/>
+              </a:lnSpc>
+              <a:spcAft>
+                <a:spcPts val="1000"/>
+              </a:spcAft>
+              <a:defRPr sz="2000" b="0">
+                <a:solidFill>
+                  <a:srgbClr val="333333"/>
+                </a:solidFill>
+                <a:latin typeface="Calibri"/>
+              </a:defRPr>
+            </a:pPr>
+            <a:r>
+              <a:t>      placed.</a:t>
+            </a:r>
+          </a:p>
+          <a:p>
+            <a:pPr>
+              <a:lnSpc>
+                <a:spcPts val="2200"/>
+              </a:lnSpc>
+              <a:spcAft>
+                <a:spcPts val="1000"/>
+              </a:spcAft>
+              <a:defRPr sz="2000" b="0">
+                <a:solidFill>
+                  <a:srgbClr val="333333"/>
+                </a:solidFill>
+                <a:latin typeface="Calibri"/>
+              </a:defRPr>
+            </a:pPr>
+            <a:r>
+              <a:t>• At least one env/checker review (self or peer)</a:t>
+            </a:r>
+          </a:p>
+          <a:p>
+            <a:pPr>
+              <a:lnSpc>
+                <a:spcPts val="2200"/>
+              </a:lnSpc>
+              <a:spcAft>
+                <a:spcPts val="1000"/>
+              </a:spcAft>
+              <a:defRPr sz="2000" b="0">
+                <a:solidFill>
+                  <a:srgbClr val="333333"/>
+                </a:solidFill>
+                <a:latin typeface="Calibri"/>
+              </a:defRPr>
+            </a:pPr>
+            <a:r>
+              <a:t>      completed; action items captured.</a:t>
+            </a:r>
+          </a:p>
+        </p:txBody>
+      </p:sp>
+      <p:sp>
+        <p:nvSpPr>
+          <p:cNvPr id="4" name="TextBox 3"/>
+          <p:cNvSpPr txBox="1"/>
+          <p:nvPr/>
+        </p:nvSpPr>
+        <p:spPr>
+          <a:xfrm>
+            <a:off x="548640" y="6355080"/>
+            <a:ext cx="11064240" cy="320040"/>
+          </a:xfrm>
+          <a:prstGeom prst="rect">
+            <a:avLst/>
+          </a:prstGeom>
+          <a:noFill/>
+        </p:spPr>
+        <p:txBody>
+          <a:bodyPr wrap="square">
+            <a:noAutofit/>
+          </a:bodyPr>
+          <a:lstStyle/>
+          <a:p>
+            <a:pPr algn="r">
+              <a:lnSpc>
+                <a:spcPts val="2200"/>
+              </a:lnSpc>
+              <a:defRPr sz="1000" b="0">
+                <a:solidFill>
+                  <a:srgbClr val="666666"/>
+                </a:solidFill>
+                <a:latin typeface="Calibri"/>
+              </a:defRPr>
+            </a:pPr>
+            <a:r>
+              <a:t>verification_planning_management / Module 4</a:t>
+            </a:r>
+          </a:p>
+        </p:txBody>
+      </p:sp>
+    </p:spTree>
+  </p:cSld>
+  <p:clrMapOvr>
+    <a:masterClrMapping/>
+  </p:clrMapOvr>
+</p:sld>
+</file>
+
+<file path=ppt/slides/slide43.xml><?xml version="1.0" encoding="utf-8"?>
+<p:sld xmlns:a="http://schemas.openxmlformats.org/drawingml/2006/main" xmlns:p="http://schemas.openxmlformats.org/presentationml/2006/main" xmlns:r="http://schemas.openxmlformats.org/officeDocument/2006/relationships">
+  <p:cSld>
+    <p:spTree>
+      <p:nvGrpSpPr>
+        <p:cNvPr id="1" name=""/>
+        <p:cNvGrpSpPr/>
+        <p:nvPr/>
+      </p:nvGrpSpPr>
+      <p:grpSpPr/>
+      <p:sp>
+        <p:nvSpPr>
+          <p:cNvPr id="2" name="TextBox 1"/>
+          <p:cNvSpPr txBox="1"/>
+          <p:nvPr/>
+        </p:nvSpPr>
+        <p:spPr>
+          <a:xfrm>
+            <a:off x="548640" y="411480"/>
+            <a:ext cx="11064240" cy="777240"/>
+          </a:xfrm>
+          <a:prstGeom prst="rect">
+            <a:avLst/>
+          </a:prstGeom>
+          <a:noFill/>
+        </p:spPr>
+        <p:txBody>
+          <a:bodyPr wrap="square">
+            <a:noAutofit/>
+          </a:bodyPr>
+          <a:lstStyle/>
+          <a:p>
+            <a:pPr>
+              <a:lnSpc>
+                <a:spcPts val="2200"/>
+              </a:lnSpc>
+              <a:defRPr sz="2800" b="1">
+                <a:solidFill>
+                  <a:srgbClr val="1A1A2E"/>
+                </a:solidFill>
+                <a:latin typeface="Calibri"/>
+              </a:defRPr>
+            </a:pPr>
+            <a:r>
+              <a:t>Assessment checklist</a:t>
+            </a:r>
+          </a:p>
+        </p:txBody>
+      </p:sp>
+      <p:sp>
+        <p:nvSpPr>
+          <p:cNvPr id="3" name="TextBox 2"/>
+          <p:cNvSpPr txBox="1"/>
+          <p:nvPr/>
+        </p:nvSpPr>
+        <p:spPr>
+          <a:xfrm>
+            <a:off x="548640" y="1234440"/>
+            <a:ext cx="11064240" cy="4937760"/>
+          </a:xfrm>
+          <a:prstGeom prst="rect">
+            <a:avLst/>
+          </a:prstGeom>
+          <a:noFill/>
+        </p:spPr>
+        <p:txBody>
+          <a:bodyPr wrap="square">
+            <a:noAutofit/>
+          </a:bodyPr>
+          <a:lstStyle/>
+          <a:p>
+            <a:pPr>
+              <a:lnSpc>
+                <a:spcPts val="2200"/>
+              </a:lnSpc>
+              <a:spcAft>
+                <a:spcPts val="1000"/>
+              </a:spcAft>
+              <a:defRPr sz="2000" b="0">
+                <a:solidFill>
+                  <a:srgbClr val="333333"/>
+                </a:solidFill>
+                <a:latin typeface="Calibri"/>
+              </a:defRPr>
+            </a:pPr>
+            <a:r>
+              <a:t>• UVM env/agent architecture documented in</a:t>
+            </a:r>
+          </a:p>
+          <a:p>
+            <a:pPr>
+              <a:lnSpc>
+                <a:spcPts val="2200"/>
+              </a:lnSpc>
+              <a:spcAft>
+                <a:spcPts val="1000"/>
+              </a:spcAft>
+              <a:defRPr sz="2000" b="0">
+                <a:solidFill>
+                  <a:srgbClr val="333333"/>
+                </a:solidFill>
+                <a:latin typeface="Calibri"/>
+              </a:defRPr>
+            </a:pPr>
+            <a:r>
+              <a:t>      `module4/ENV_DESIGN.md`.</a:t>
+            </a:r>
+          </a:p>
+          <a:p>
+            <a:pPr>
+              <a:lnSpc>
+                <a:spcPts val="2200"/>
+              </a:lnSpc>
+              <a:spcAft>
+                <a:spcPts val="1000"/>
+              </a:spcAft>
+              <a:defRPr sz="2000" b="0">
+                <a:solidFill>
+                  <a:srgbClr val="333333"/>
+                </a:solidFill>
+                <a:latin typeface="Calibri"/>
+              </a:defRPr>
+            </a:pPr>
+            <a:r>
+              <a:t>• Transaction and sequence designs documented and</a:t>
+            </a:r>
+          </a:p>
+          <a:p>
+            <a:pPr>
+              <a:lnSpc>
+                <a:spcPts val="2200"/>
+              </a:lnSpc>
+              <a:spcAft>
+                <a:spcPts val="1000"/>
+              </a:spcAft>
+              <a:defRPr sz="2000" b="0">
+                <a:solidFill>
+                  <a:srgbClr val="333333"/>
+                </a:solidFill>
+                <a:latin typeface="Calibri"/>
+              </a:defRPr>
+            </a:pPr>
+            <a:r>
+              <a:t>      aligned with `module2/TEST_PLAN.md`.</a:t>
+            </a:r>
+          </a:p>
+          <a:p>
+            <a:pPr>
+              <a:lnSpc>
+                <a:spcPts val="2200"/>
+              </a:lnSpc>
+              <a:spcAft>
+                <a:spcPts val="1000"/>
+              </a:spcAft>
+              <a:defRPr sz="2000" b="0">
+                <a:solidFill>
+                  <a:srgbClr val="333333"/>
+                </a:solidFill>
+                <a:latin typeface="Calibri"/>
+              </a:defRPr>
+            </a:pPr>
+            <a:r>
+              <a:t>• Scoreboards and reference models specified in</a:t>
+            </a:r>
+          </a:p>
+          <a:p>
+            <a:pPr>
+              <a:lnSpc>
+                <a:spcPts val="2200"/>
+              </a:lnSpc>
+              <a:spcAft>
+                <a:spcPts val="1000"/>
+              </a:spcAft>
+              <a:defRPr sz="2000" b="0">
+                <a:solidFill>
+                  <a:srgbClr val="333333"/>
+                </a:solidFill>
+                <a:latin typeface="Calibri"/>
+              </a:defRPr>
+            </a:pPr>
+            <a:r>
+              <a:t>      `module4/CHECKER_PLAN.md`.</a:t>
+            </a:r>
+          </a:p>
+          <a:p>
+            <a:pPr>
+              <a:lnSpc>
+                <a:spcPts val="2200"/>
+              </a:lnSpc>
+              <a:spcAft>
+                <a:spcPts val="1000"/>
+              </a:spcAft>
+              <a:defRPr sz="2000" b="0">
+                <a:solidFill>
+                  <a:srgbClr val="333333"/>
+                </a:solidFill>
+                <a:latin typeface="Calibri"/>
+              </a:defRPr>
+            </a:pPr>
+            <a:r>
+              <a:t>• Key protocol/functional assertions listed and</a:t>
+            </a:r>
+          </a:p>
+          <a:p>
+            <a:pPr>
+              <a:lnSpc>
+                <a:spcPts val="2200"/>
+              </a:lnSpc>
+              <a:spcAft>
+                <a:spcPts val="1000"/>
+              </a:spcAft>
+              <a:defRPr sz="2000" b="0">
+                <a:solidFill>
+                  <a:srgbClr val="333333"/>
+                </a:solidFill>
+                <a:latin typeface="Calibri"/>
+              </a:defRPr>
+            </a:pPr>
+            <a:r>
+              <a:t>      placed.</a:t>
+            </a:r>
+          </a:p>
+          <a:p>
+            <a:pPr>
+              <a:lnSpc>
+                <a:spcPts val="2200"/>
+              </a:lnSpc>
+              <a:spcAft>
+                <a:spcPts val="1000"/>
+              </a:spcAft>
+              <a:defRPr sz="2000" b="0">
+                <a:solidFill>
+                  <a:srgbClr val="333333"/>
+                </a:solidFill>
+                <a:latin typeface="Calibri"/>
+              </a:defRPr>
+            </a:pPr>
+            <a:r>
+              <a:t>• At least one env/checker review (self or peer)</a:t>
+            </a:r>
+          </a:p>
+          <a:p>
+            <a:pPr>
+              <a:lnSpc>
+                <a:spcPts val="2200"/>
+              </a:lnSpc>
+              <a:spcAft>
+                <a:spcPts val="1000"/>
+              </a:spcAft>
+              <a:defRPr sz="2000" b="0">
+                <a:solidFill>
+                  <a:srgbClr val="333333"/>
+                </a:solidFill>
+                <a:latin typeface="Calibri"/>
+              </a:defRPr>
+            </a:pPr>
+            <a:r>
+              <a:t>      completed; action items captured.</a:t>
+            </a:r>
+          </a:p>
+        </p:txBody>
+      </p:sp>
+      <p:sp>
+        <p:nvSpPr>
+          <p:cNvPr id="4" name="TextBox 3"/>
+          <p:cNvSpPr txBox="1"/>
+          <p:nvPr/>
+        </p:nvSpPr>
+        <p:spPr>
+          <a:xfrm>
+            <a:off x="548640" y="6355080"/>
+            <a:ext cx="11064240" cy="320040"/>
+          </a:xfrm>
+          <a:prstGeom prst="rect">
+            <a:avLst/>
+          </a:prstGeom>
+          <a:noFill/>
+        </p:spPr>
+        <p:txBody>
+          <a:bodyPr wrap="square">
+            <a:noAutofit/>
+          </a:bodyPr>
+          <a:lstStyle/>
+          <a:p>
+            <a:pPr algn="r">
+              <a:lnSpc>
+                <a:spcPts val="2200"/>
+              </a:lnSpc>
+              <a:defRPr sz="1000" b="0">
+                <a:solidFill>
+                  <a:srgbClr val="666666"/>
+                </a:solidFill>
+                <a:latin typeface="Calibri"/>
+              </a:defRPr>
+            </a:pPr>
+            <a:r>
+              <a:t>verification_planning_management / Module 4</a:t>
+            </a:r>
+          </a:p>
+        </p:txBody>
+      </p:sp>
+    </p:spTree>
+  </p:cSld>
+  <p:clrMapOvr>
+    <a:masterClrMapping/>
+  </p:clrMapOvr>
+</p:sld>
+</file>
+
+<file path=ppt/slides/slide44.xml><?xml version="1.0" encoding="utf-8"?>
+<p:sld xmlns:a="http://schemas.openxmlformats.org/drawingml/2006/main" xmlns:p="http://schemas.openxmlformats.org/presentationml/2006/main" xmlns:r="http://schemas.openxmlformats.org/officeDocument/2006/relationships">
+  <p:cSld>
+    <p:spTree>
+      <p:nvGrpSpPr>
+        <p:cNvPr id="1" name=""/>
+        <p:cNvGrpSpPr/>
+        <p:nvPr/>
+      </p:nvGrpSpPr>
+      <p:grpSpPr/>
+      <p:sp>
+        <p:nvSpPr>
+          <p:cNvPr id="2" name="TextBox 1"/>
+          <p:cNvSpPr txBox="1"/>
+          <p:nvPr/>
+        </p:nvSpPr>
+        <p:spPr>
+          <a:xfrm>
+            <a:off x="548640" y="411480"/>
+            <a:ext cx="11064240" cy="777240"/>
+          </a:xfrm>
+          <a:prstGeom prst="rect">
+            <a:avLst/>
+          </a:prstGeom>
+          <a:noFill/>
+        </p:spPr>
+        <p:txBody>
+          <a:bodyPr wrap="square">
+            <a:noAutofit/>
+          </a:bodyPr>
+          <a:lstStyle/>
+          <a:p>
+            <a:pPr>
+              <a:lnSpc>
+                <a:spcPts val="2200"/>
+              </a:lnSpc>
+              <a:defRPr sz="2800" b="1">
+                <a:solidFill>
+                  <a:srgbClr val="1A1A2E"/>
+                </a:solidFill>
+                <a:latin typeface="Calibri"/>
+              </a:defRPr>
+            </a:pPr>
+            <a:r>
+              <a:t>Summary &amp; next steps</a:t>
+            </a:r>
+          </a:p>
+        </p:txBody>
+      </p:sp>
+      <p:sp>
+        <p:nvSpPr>
+          <p:cNvPr id="3" name="TextBox 2"/>
+          <p:cNvSpPr txBox="1"/>
+          <p:nvPr/>
+        </p:nvSpPr>
+        <p:spPr>
+          <a:xfrm>
+            <a:off x="548640" y="1234440"/>
+            <a:ext cx="11064240" cy="4937760"/>
+          </a:xfrm>
+          <a:prstGeom prst="rect">
+            <a:avLst/>
+          </a:prstGeom>
+          <a:noFill/>
+        </p:spPr>
+        <p:txBody>
+          <a:bodyPr wrap="square">
+            <a:noAutofit/>
+          </a:bodyPr>
+          <a:lstStyle/>
+          <a:p>
+            <a:pPr>
+              <a:lnSpc>
+                <a:spcPts val="2200"/>
+              </a:lnSpc>
+              <a:spcAft>
+                <a:spcPts val="1000"/>
+              </a:spcAft>
+              <a:defRPr sz="2000" b="0">
+                <a:solidFill>
+                  <a:srgbClr val="333333"/>
+                </a:solidFill>
+                <a:latin typeface="Calibri"/>
+              </a:defRPr>
+            </a:pPr>
+            <a:r>
+              <a:t>• Design and mature your **UVM environment** (env,</a:t>
+            </a:r>
+          </a:p>
+          <a:p>
+            <a:pPr>
+              <a:lnSpc>
+                <a:spcPts val="2200"/>
+              </a:lnSpc>
+              <a:spcAft>
+                <a:spcPts val="1000"/>
+              </a:spcAft>
+              <a:defRPr sz="2000" b="0">
+                <a:solidFill>
+                  <a:srgbClr val="333333"/>
+                </a:solidFill>
+                <a:latin typeface="Calibri"/>
+              </a:defRPr>
+            </a:pPr>
+            <a:r>
+              <a:t>      agents, drivers, monitors, sequencers) and **check…</a:t>
+            </a:r>
+          </a:p>
+          <a:p>
+            <a:pPr>
+              <a:lnSpc>
+                <a:spcPts val="2200"/>
+              </a:lnSpc>
+              <a:spcAft>
+                <a:spcPts val="1000"/>
+              </a:spcAft>
+              <a:defRPr sz="2000" b="0">
+                <a:solidFill>
+                  <a:srgbClr val="333333"/>
+                </a:solidFill>
+                <a:latin typeface="Calibri"/>
+              </a:defRPr>
+            </a:pPr>
+            <a:r>
+              <a:t>• Complete module4/CHECKLIST.md</a:t>
+            </a:r>
+          </a:p>
+          <a:p>
+            <a:pPr>
+              <a:lnSpc>
+                <a:spcPts val="2200"/>
+              </a:lnSpc>
+              <a:spcAft>
+                <a:spcPts val="1000"/>
+              </a:spcAft>
+              <a:defRPr sz="2000" b="0">
+                <a:solidFill>
+                  <a:srgbClr val="333333"/>
+                </a:solidFill>
+                <a:latin typeface="Calibri"/>
+              </a:defRPr>
+            </a:pPr>
+            <a:r>
+              <a:t>• Review module4/EXAMPLES.md and run each lab</a:t>
+            </a:r>
+          </a:p>
+          <a:p>
+            <a:pPr>
+              <a:lnSpc>
+                <a:spcPts val="2200"/>
+              </a:lnSpc>
+              <a:spcAft>
+                <a:spcPts val="1000"/>
+              </a:spcAft>
+              <a:defRPr sz="2000" b="0">
+                <a:solidFill>
+                  <a:srgbClr val="333333"/>
+                </a:solidFill>
+                <a:latin typeface="Calibri"/>
+              </a:defRPr>
+            </a:pPr>
+            <a:r>
+              <a:t>• Next: Next module in course</a:t>
+            </a:r>
+          </a:p>
+        </p:txBody>
+      </p:sp>
+      <p:sp>
+        <p:nvSpPr>
+          <p:cNvPr id="4" name="TextBox 3"/>
+          <p:cNvSpPr txBox="1"/>
+          <p:nvPr/>
+        </p:nvSpPr>
+        <p:spPr>
+          <a:xfrm>
+            <a:off x="548640" y="6355080"/>
+            <a:ext cx="11064240" cy="320040"/>
+          </a:xfrm>
+          <a:prstGeom prst="rect">
+            <a:avLst/>
+          </a:prstGeom>
+          <a:noFill/>
+        </p:spPr>
+        <p:txBody>
+          <a:bodyPr wrap="square">
+            <a:noAutofit/>
+          </a:bodyPr>
+          <a:lstStyle/>
+          <a:p>
+            <a:pPr algn="r">
+              <a:lnSpc>
+                <a:spcPts val="2200"/>
+              </a:lnSpc>
+              <a:defRPr sz="1000" b="0">
+                <a:solidFill>
+                  <a:srgbClr val="666666"/>
+                </a:solidFill>
+                <a:latin typeface="Calibri"/>
+              </a:defRPr>
+            </a:pPr>
+            <a:r>
+              <a:t>verification_planning_management / Module 4</a:t>
+            </a:r>
+          </a:p>
+        </p:txBody>
+      </p:sp>
+    </p:spTree>
+  </p:cSld>
+  <p:clrMapOvr>
+    <a:masterClrMapping/>
+  </p:clrMapOvr>
+</p:sld>
+</file>
+
 <file path=ppt/slides/slide5.xml><?xml version="1.0" encoding="utf-8"?>
 <p:sld xmlns:a="http://schemas.openxmlformats.org/drawingml/2006/main" xmlns:p="http://schemas.openxmlformats.org/presentationml/2006/main" xmlns:r="http://schemas.openxmlformats.org/officeDocument/2006/relationships">
   <p:cSld>
@@ -10550,7 +13700,7 @@
               </a:defRPr>
             </a:pPr>
             <a:r>
-              <a:t>Design architecture</a:t>
+              <a:t>How to learn this module</a:t>
             </a:r>
           </a:p>
         </p:txBody>
@@ -10646,7 +13796,7 @@
               </a:defRPr>
             </a:pPr>
             <a:r>
-              <a:t>1. Mature UVM environment (stream_fifo)</a:t>
+              <a:t>Suggested learning path (1/2)</a:t>
             </a:r>
           </a:p>
         </p:txBody>
@@ -10660,7 +13810,7 @@
         <p:spPr>
           <a:xfrm>
             <a:off x="548640" y="1234440"/>
-            <a:ext cx="5303520" cy="4754880"/>
+            <a:ext cx="11064240" cy="4937760"/>
           </a:xfrm>
           <a:prstGeom prst="rect">
             <a:avLst/>
@@ -10688,7 +13838,7 @@
               </a:defRPr>
             </a:pPr>
             <a:r>
-              <a:t>• Env (`stream_fifo_env`):</a:t>
+              <a:t>• Re-read `module2/TEST_PLAN.md` and</a:t>
             </a:r>
           </a:p>
           <a:p>
@@ -10707,7 +13857,7 @@
               </a:defRPr>
             </a:pPr>
             <a:r>
-              <a:t>      connects source/sink agents,</a:t>
+              <a:t>      `module3/COVERAGE_DESIGN.md`.</a:t>
             </a:r>
           </a:p>
           <a:p>
@@ -10726,7 +13876,7 @@
               </a:defRPr>
             </a:pPr>
             <a:r>
-              <a:t>      scoreboard, coverage</a:t>
+              <a:t>• Scaffold Module 4 workspace: `./scripts/module4.sh</a:t>
             </a:r>
           </a:p>
           <a:p>
@@ -10745,7 +13895,7 @@
               </a:defRPr>
             </a:pPr>
             <a:r>
-              <a:t>      subscribers.</a:t>
+              <a:t>      --scaffold`</a:t>
             </a:r>
           </a:p>
           <a:p>
@@ -10764,7 +13914,7 @@
               </a:defRPr>
             </a:pPr>
             <a:r>
-              <a:t>• Agents: driver + sequencer +</a:t>
+              <a:t>• Complete `module4/ENV_DESIGN.md` (agents,</a:t>
             </a:r>
           </a:p>
           <a:p>
@@ -10783,7 +13933,7 @@
               </a:defRPr>
             </a:pPr>
             <a:r>
-              <a:t>      monitor per interface; active vs</a:t>
+              <a:t>      transactions, connectivity).</a:t>
             </a:r>
           </a:p>
           <a:p>
@@ -10802,7 +13952,7 @@
               </a:defRPr>
             </a:pPr>
             <a:r>
-              <a:t>      passive roles documented in</a:t>
+              <a:t>• Complete `module4/CHECKER_PLAN.md` (scoreboard,</a:t>
             </a:r>
           </a:p>
           <a:p>
@@ -10821,7 +13971,7 @@
               </a:defRPr>
             </a:pPr>
             <a:r>
-              <a:t>      `ENV_DESI…</a:t>
+              <a:t>      reference model, SVA split).</a:t>
             </a:r>
           </a:p>
           <a:p>
@@ -10840,7 +13990,7 @@
               </a:defRPr>
             </a:pPr>
             <a:r>
-              <a:t>• Transactions: item fields mirror</a:t>
+              <a:t>• Implement or refine UVM components in `module4/tb/`</a:t>
             </a:r>
           </a:p>
           <a:p>
@@ -10859,114 +14009,14 @@
               </a:defRPr>
             </a:pPr>
             <a:r>
-              <a:t>      DUT handshake semantics (data,</a:t>
-            </a:r>
-          </a:p>
-          <a:p>
-            <a:pPr>
-              <a:lnSpc>
-                <a:spcPts val="2200"/>
-              </a:lnSpc>
-              <a:spcAft>
-                <a:spcPts val="1000"/>
-              </a:spcAft>
-              <a:defRPr sz="2000" b="0">
-                <a:solidFill>
-                  <a:srgbClr val="333333"/>
-                </a:solidFill>
-                <a:latin typeface="Calibri"/>
-              </a:defRPr>
-            </a:pPr>
-            <a:r>
-              <a:t>      valid/ready timing).</a:t>
-            </a:r>
-          </a:p>
-          <a:p>
-            <a:pPr>
-              <a:lnSpc>
-                <a:spcPts val="2200"/>
-              </a:lnSpc>
-              <a:spcAft>
-                <a:spcPts val="1000"/>
-              </a:spcAft>
-              <a:defRPr sz="2000" b="0">
-                <a:solidFill>
-                  <a:srgbClr val="333333"/>
-                </a:solidFill>
-                <a:latin typeface="Calibri"/>
-              </a:defRPr>
-            </a:pPr>
-            <a:r>
-              <a:t>• Reference implementation sketch:</a:t>
-            </a:r>
-          </a:p>
-          <a:p>
-            <a:pPr>
-              <a:lnSpc>
-                <a:spcPts val="2200"/>
-              </a:lnSpc>
-              <a:spcAft>
-                <a:spcPts val="1000"/>
-              </a:spcAft>
-              <a:defRPr sz="2000" b="0">
-                <a:solidFill>
-                  <a:srgbClr val="333333"/>
-                </a:solidFill>
-                <a:latin typeface="Calibri"/>
-              </a:defRPr>
-            </a:pPr>
-            <a:r>
-              <a:t>      `module4/tb/tb_stream_fifo_uvm.s</a:t>
-            </a:r>
-          </a:p>
-          <a:p>
-            <a:pPr>
-              <a:lnSpc>
-                <a:spcPts val="2200"/>
-              </a:lnSpc>
-              <a:spcAft>
-                <a:spcPts val="1000"/>
-              </a:spcAft>
-              <a:defRPr sz="2000" b="0">
-                <a:solidFill>
-                  <a:srgbClr val="333333"/>
-                </a:solidFill>
-                <a:latin typeface="Calibri"/>
-              </a:defRPr>
-            </a:pPr>
-            <a:r>
-              <a:t>      v` and `stream_pkg.sv` patterns.</a:t>
-            </a:r>
-          </a:p>
-        </p:txBody>
-      </p:sp>
-      <p:pic>
-        <p:nvPicPr>
-          <p:cNvPr id="4" name="Picture 3" descr="rtl_architecture.png"/>
-          <p:cNvPicPr>
-            <a:picLocks noChangeAspect="1"/>
-          </p:cNvPicPr>
-          <p:nvPr/>
-        </p:nvPicPr>
-        <p:blipFill>
-          <a:blip r:embed="rId2"/>
-          <a:stretch>
-            <a:fillRect/>
-          </a:stretch>
-        </p:blipFill>
-        <p:spPr>
-          <a:xfrm>
-            <a:off x="6172200" y="2094547"/>
-            <a:ext cx="5394960" cy="3034665"/>
-          </a:xfrm>
-          <a:prstGeom prst="rect">
-            <a:avLst/>
-          </a:prstGeom>
-        </p:spPr>
-      </p:pic>
-      <p:sp>
-        <p:nvSpPr>
-          <p:cNvPr id="5" name="TextBox 4"/>
+              <a:t>      and `common_dut/tb/`.</a:t>
+            </a:r>
+          </a:p>
+        </p:txBody>
+      </p:sp>
+      <p:sp>
+        <p:nvSpPr>
+          <p:cNvPr id="4" name="TextBox 3"/>
           <p:cNvSpPr txBox="1"/>
           <p:nvPr/>
         </p:nvSpPr>
@@ -11055,7 +14105,7 @@
               </a:defRPr>
             </a:pPr>
             <a:r>
-              <a:t>2. Checking architecture</a:t>
+              <a:t>Suggested learning path (2/2)</a:t>
             </a:r>
           </a:p>
         </p:txBody>
@@ -11069,7 +14119,7 @@
         <p:spPr>
           <a:xfrm>
             <a:off x="548640" y="1234440"/>
-            <a:ext cx="5303520" cy="4754880"/>
+            <a:ext cx="11064240" cy="4937760"/>
           </a:xfrm>
           <a:prstGeom prst="rect">
             <a:avLst/>
@@ -11097,190 +14147,14 @@
               </a:defRPr>
             </a:pPr>
             <a:r>
-              <a:t>• Scoreboard / reference model —</a:t>
-            </a:r>
-          </a:p>
-          <a:p>
-            <a:pPr>
-              <a:lnSpc>
-                <a:spcPts val="2200"/>
-              </a:lnSpc>
-              <a:spcAft>
-                <a:spcPts val="1000"/>
-              </a:spcAft>
-              <a:defRPr sz="2000" b="0">
-                <a:solidFill>
-                  <a:srgbClr val="333333"/>
-                </a:solidFill>
-                <a:latin typeface="Calibri"/>
-              </a:defRPr>
-            </a:pPr>
-            <a:r>
-              <a:t>      golden data path and ordering</a:t>
-            </a:r>
-          </a:p>
-          <a:p>
-            <a:pPr>
-              <a:lnSpc>
-                <a:spcPts val="2200"/>
-              </a:lnSpc>
-              <a:spcAft>
-                <a:spcPts val="1000"/>
-              </a:spcAft>
-              <a:defRPr sz="2000" b="0">
-                <a:solidFill>
-                  <a:srgbClr val="333333"/>
-                </a:solidFill>
-                <a:latin typeface="Calibri"/>
-              </a:defRPr>
-            </a:pPr>
-            <a:r>
-              <a:t>      checks (`CHECKER_PLAN.md`).</a:t>
-            </a:r>
-          </a:p>
-          <a:p>
-            <a:pPr>
-              <a:lnSpc>
-                <a:spcPts val="2200"/>
-              </a:lnSpc>
-              <a:spcAft>
-                <a:spcPts val="1000"/>
-              </a:spcAft>
-              <a:defRPr sz="2000" b="0">
-                <a:solidFill>
-                  <a:srgbClr val="333333"/>
-                </a:solidFill>
-                <a:latin typeface="Calibri"/>
-              </a:defRPr>
-            </a:pPr>
-            <a:r>
-              <a:t>• SVA — protocol and functional</a:t>
-            </a:r>
-          </a:p>
-          <a:p>
-            <a:pPr>
-              <a:lnSpc>
-                <a:spcPts val="2200"/>
-              </a:lnSpc>
-              <a:spcAft>
-                <a:spcPts val="1000"/>
-              </a:spcAft>
-              <a:defRPr sz="2000" b="0">
-                <a:solidFill>
-                  <a:srgbClr val="333333"/>
-                </a:solidFill>
-                <a:latin typeface="Calibri"/>
-              </a:defRPr>
-            </a:pPr>
-            <a:r>
-              <a:t>      assertions on interfaces and</a:t>
-            </a:r>
-          </a:p>
-          <a:p>
-            <a:pPr>
-              <a:lnSpc>
-                <a:spcPts val="2200"/>
-              </a:lnSpc>
-              <a:spcAft>
-                <a:spcPts val="1000"/>
-              </a:spcAft>
-              <a:defRPr sz="2000" b="0">
-                <a:solidFill>
-                  <a:srgbClr val="333333"/>
-                </a:solidFill>
-                <a:latin typeface="Calibri"/>
-              </a:defRPr>
-            </a:pPr>
-            <a:r>
-              <a:t>      internal flags.</a:t>
-            </a:r>
-          </a:p>
-          <a:p>
-            <a:pPr>
-              <a:lnSpc>
-                <a:spcPts val="2200"/>
-              </a:lnSpc>
-              <a:spcAft>
-                <a:spcPts val="1000"/>
-              </a:spcAft>
-              <a:defRPr sz="2000" b="0">
-                <a:solidFill>
-                  <a:srgbClr val="333333"/>
-                </a:solidFill>
-                <a:latin typeface="Calibri"/>
-              </a:defRPr>
-            </a:pPr>
-            <a:r>
-              <a:t>• Clear split: what is checked in</a:t>
-            </a:r>
-          </a:p>
-          <a:p>
-            <a:pPr>
-              <a:lnSpc>
-                <a:spcPts val="2200"/>
-              </a:lnSpc>
-              <a:spcAft>
-                <a:spcPts val="1000"/>
-              </a:spcAft>
-              <a:defRPr sz="2000" b="0">
-                <a:solidFill>
-                  <a:srgbClr val="333333"/>
-                </a:solidFill>
-                <a:latin typeface="Calibri"/>
-              </a:defRPr>
-            </a:pPr>
-            <a:r>
-              <a:t>      SVA vs scoreboard vs test self-</a:t>
-            </a:r>
-          </a:p>
-          <a:p>
-            <a:pPr>
-              <a:lnSpc>
-                <a:spcPts val="2200"/>
-              </a:lnSpc>
-              <a:spcAft>
-                <a:spcPts val="1000"/>
-              </a:spcAft>
-              <a:defRPr sz="2000" b="0">
-                <a:solidFill>
-                  <a:srgbClr val="333333"/>
-                </a:solidFill>
-                <a:latin typeface="Calibri"/>
-              </a:defRPr>
-            </a:pPr>
-            <a:r>
-              <a:t>      check.</a:t>
-            </a:r>
-          </a:p>
-        </p:txBody>
-      </p:sp>
-      <p:pic>
-        <p:nvPicPr>
-          <p:cNvPr id="4" name="Picture 3" descr="verification_architecture.png"/>
-          <p:cNvPicPr>
-            <a:picLocks noChangeAspect="1"/>
-          </p:cNvPicPr>
-          <p:nvPr/>
-        </p:nvPicPr>
-        <p:blipFill>
-          <a:blip r:embed="rId2"/>
-          <a:stretch>
-            <a:fillRect/>
-          </a:stretch>
-        </p:blipFill>
-        <p:spPr>
-          <a:xfrm>
-            <a:off x="6172200" y="2094547"/>
-            <a:ext cx="5394960" cy="3034665"/>
-          </a:xfrm>
-          <a:prstGeom prst="rect">
-            <a:avLst/>
-          </a:prstGeom>
-        </p:spPr>
-      </p:pic>
-      <p:sp>
-        <p:nvSpPr>
-          <p:cNvPr id="5" name="TextBox 4"/>
+              <a:t>• Validate: `./scripts/module4.sh --check`</a:t>
+            </a:r>
+          </a:p>
+        </p:txBody>
+      </p:sp>
+      <p:sp>
+        <p:nvSpPr>
+          <p:cNvPr id="4" name="TextBox 3"/>
           <p:cNvSpPr txBox="1"/>
           <p:nvPr/>
         </p:nvSpPr>
@@ -11343,8 +14217,8 @@
         </p:nvSpPr>
         <p:spPr>
           <a:xfrm>
-            <a:off x="548640" y="411480"/>
-            <a:ext cx="11064240" cy="777240"/>
+            <a:off x="548640" y="2743200"/>
+            <a:ext cx="11064240" cy="1371600"/>
           </a:xfrm>
           <a:prstGeom prst="rect">
             <a:avLst/>
@@ -11357,11 +14231,11 @@
           </a:bodyPr>
           <a:lstStyle/>
           <a:p>
-            <a:pPr>
-              <a:lnSpc>
-                <a:spcPts val="2200"/>
-              </a:lnSpc>
-              <a:defRPr sz="2800" b="1">
+            <a:pPr algn="ctr">
+              <a:lnSpc>
+                <a:spcPts val="2200"/>
+              </a:lnSpc>
+              <a:defRPr sz="3600" b="1">
                 <a:solidFill>
                   <a:srgbClr val="1A1A2E"/>
                 </a:solidFill>
@@ -11369,7 +14243,7 @@
               </a:defRPr>
             </a:pPr>
             <a:r>
-              <a:t>DUT instantiation in UVM top</a:t>
+              <a:t>Design architecture</a:t>
             </a:r>
           </a:p>
         </p:txBody>
@@ -11377,354 +14251,6 @@
       <p:sp>
         <p:nvSpPr>
           <p:cNvPr id="3" name="TextBox 2"/>
-          <p:cNvSpPr txBox="1"/>
-          <p:nvPr/>
-        </p:nvSpPr>
-        <p:spPr>
-          <a:xfrm>
-            <a:off x="548640" y="1143000"/>
-            <a:ext cx="11064240" cy="5029200"/>
-          </a:xfrm>
-          <a:prstGeom prst="rect">
-            <a:avLst/>
-          </a:prstGeom>
-          <a:solidFill>
-            <a:srgbClr val="F4F4F4"/>
-          </a:solidFill>
-        </p:spPr>
-        <p:txBody>
-          <a:bodyPr wrap="square">
-            <a:noAutofit/>
-          </a:bodyPr>
-          <a:lstStyle/>
-          <a:p>
-            <a:pPr>
-              <a:lnSpc>
-                <a:spcPts val="2200"/>
-              </a:lnSpc>
-              <a:spcAft>
-                <a:spcPts val="400"/>
-              </a:spcAft>
-              <a:defRPr sz="2000" b="0">
-                <a:solidFill>
-                  <a:srgbClr val="333333"/>
-                </a:solidFill>
-                <a:latin typeface="Consolas"/>
-              </a:defRPr>
-            </a:pPr>
-            <a:r>
-              <a:t>// DUT instance</a:t>
-            </a:r>
-          </a:p>
-          <a:p>
-            <a:pPr>
-              <a:lnSpc>
-                <a:spcPts val="2200"/>
-              </a:lnSpc>
-              <a:spcAft>
-                <a:spcPts val="400"/>
-              </a:spcAft>
-              <a:defRPr sz="2000" b="0">
-                <a:solidFill>
-                  <a:srgbClr val="333333"/>
-                </a:solidFill>
-                <a:latin typeface="Consolas"/>
-              </a:defRPr>
-            </a:pPr>
-            <a:r>
-              <a:t>  stream_fifo #(</a:t>
-            </a:r>
-          </a:p>
-          <a:p>
-            <a:pPr>
-              <a:lnSpc>
-                <a:spcPts val="2200"/>
-              </a:lnSpc>
-              <a:spcAft>
-                <a:spcPts val="400"/>
-              </a:spcAft>
-              <a:defRPr sz="2000" b="0">
-                <a:solidFill>
-                  <a:srgbClr val="333333"/>
-                </a:solidFill>
-                <a:latin typeface="Consolas"/>
-              </a:defRPr>
-            </a:pPr>
-            <a:r>
-              <a:t>    .DATA_WIDTH (DATA_WIDTH),</a:t>
-            </a:r>
-          </a:p>
-          <a:p>
-            <a:pPr>
-              <a:lnSpc>
-                <a:spcPts val="2200"/>
-              </a:lnSpc>
-              <a:spcAft>
-                <a:spcPts val="400"/>
-              </a:spcAft>
-              <a:defRPr sz="2000" b="0">
-                <a:solidFill>
-                  <a:srgbClr val="333333"/>
-                </a:solidFill>
-                <a:latin typeface="Consolas"/>
-              </a:defRPr>
-            </a:pPr>
-            <a:r>
-              <a:t>    .DEPTH      (DEPTH)</a:t>
-            </a:r>
-          </a:p>
-          <a:p>
-            <a:pPr>
-              <a:lnSpc>
-                <a:spcPts val="2200"/>
-              </a:lnSpc>
-              <a:spcAft>
-                <a:spcPts val="400"/>
-              </a:spcAft>
-              <a:defRPr sz="2000" b="0">
-                <a:solidFill>
-                  <a:srgbClr val="333333"/>
-                </a:solidFill>
-                <a:latin typeface="Consolas"/>
-              </a:defRPr>
-            </a:pPr>
-            <a:r>
-              <a:t>  ) dut (</a:t>
-            </a:r>
-          </a:p>
-          <a:p>
-            <a:pPr>
-              <a:lnSpc>
-                <a:spcPts val="2200"/>
-              </a:lnSpc>
-              <a:spcAft>
-                <a:spcPts val="400"/>
-              </a:spcAft>
-              <a:defRPr sz="2000" b="0">
-                <a:solidFill>
-                  <a:srgbClr val="333333"/>
-                </a:solidFill>
-                <a:latin typeface="Consolas"/>
-              </a:defRPr>
-            </a:pPr>
-            <a:r>
-              <a:t>    .clk       (clk),</a:t>
-            </a:r>
-          </a:p>
-          <a:p>
-            <a:pPr>
-              <a:lnSpc>
-                <a:spcPts val="2200"/>
-              </a:lnSpc>
-              <a:spcAft>
-                <a:spcPts val="400"/>
-              </a:spcAft>
-              <a:defRPr sz="2000" b="0">
-                <a:solidFill>
-                  <a:srgbClr val="333333"/>
-                </a:solidFill>
-                <a:latin typeface="Consolas"/>
-              </a:defRPr>
-            </a:pPr>
-            <a:r>
-              <a:t>    .rst_n     (rst_n),</a:t>
-            </a:r>
-          </a:p>
-          <a:p>
-            <a:pPr>
-              <a:lnSpc>
-                <a:spcPts val="2200"/>
-              </a:lnSpc>
-              <a:spcAft>
-                <a:spcPts val="400"/>
-              </a:spcAft>
-              <a:defRPr sz="2000" b="0">
-                <a:solidFill>
-                  <a:srgbClr val="333333"/>
-                </a:solidFill>
-                <a:latin typeface="Consolas"/>
-              </a:defRPr>
-            </a:pPr>
-            <a:r>
-              <a:t>    // source side</a:t>
-            </a:r>
-          </a:p>
-          <a:p>
-            <a:pPr>
-              <a:lnSpc>
-                <a:spcPts val="2200"/>
-              </a:lnSpc>
-              <a:spcAft>
-                <a:spcPts val="400"/>
-              </a:spcAft>
-              <a:defRPr sz="2000" b="0">
-                <a:solidFill>
-                  <a:srgbClr val="333333"/>
-                </a:solidFill>
-                <a:latin typeface="Consolas"/>
-              </a:defRPr>
-            </a:pPr>
-            <a:r>
-              <a:t>    .s_valid   (s_if.valid),</a:t>
-            </a:r>
-          </a:p>
-          <a:p>
-            <a:pPr>
-              <a:lnSpc>
-                <a:spcPts val="2200"/>
-              </a:lnSpc>
-              <a:spcAft>
-                <a:spcPts val="400"/>
-              </a:spcAft>
-              <a:defRPr sz="2000" b="0">
-                <a:solidFill>
-                  <a:srgbClr val="333333"/>
-                </a:solidFill>
-                <a:latin typeface="Consolas"/>
-              </a:defRPr>
-            </a:pPr>
-            <a:r>
-              <a:t>    .s_data    (s_if.data),</a:t>
-            </a:r>
-          </a:p>
-          <a:p>
-            <a:pPr>
-              <a:lnSpc>
-                <a:spcPts val="2200"/>
-              </a:lnSpc>
-              <a:spcAft>
-                <a:spcPts val="400"/>
-              </a:spcAft>
-              <a:defRPr sz="2000" b="0">
-                <a:solidFill>
-                  <a:srgbClr val="333333"/>
-                </a:solidFill>
-                <a:latin typeface="Consolas"/>
-              </a:defRPr>
-            </a:pPr>
-            <a:r>
-              <a:t>    .s_ready   (s_if.ready),</a:t>
-            </a:r>
-          </a:p>
-          <a:p>
-            <a:pPr>
-              <a:lnSpc>
-                <a:spcPts val="2200"/>
-              </a:lnSpc>
-              <a:spcAft>
-                <a:spcPts val="400"/>
-              </a:spcAft>
-              <a:defRPr sz="2000" b="0">
-                <a:solidFill>
-                  <a:srgbClr val="333333"/>
-                </a:solidFill>
-                <a:latin typeface="Consolas"/>
-              </a:defRPr>
-            </a:pPr>
-            <a:r>
-              <a:t>    // sink side</a:t>
-            </a:r>
-          </a:p>
-          <a:p>
-            <a:pPr>
-              <a:lnSpc>
-                <a:spcPts val="2200"/>
-              </a:lnSpc>
-              <a:spcAft>
-                <a:spcPts val="400"/>
-              </a:spcAft>
-              <a:defRPr sz="2000" b="0">
-                <a:solidFill>
-                  <a:srgbClr val="333333"/>
-                </a:solidFill>
-                <a:latin typeface="Consolas"/>
-              </a:defRPr>
-            </a:pPr>
-            <a:r>
-              <a:t>    .m_valid   (m_if.valid),</a:t>
-            </a:r>
-          </a:p>
-          <a:p>
-            <a:pPr>
-              <a:lnSpc>
-                <a:spcPts val="2200"/>
-              </a:lnSpc>
-              <a:spcAft>
-                <a:spcPts val="400"/>
-              </a:spcAft>
-              <a:defRPr sz="2000" b="0">
-                <a:solidFill>
-                  <a:srgbClr val="333333"/>
-                </a:solidFill>
-                <a:latin typeface="Consolas"/>
-              </a:defRPr>
-            </a:pPr>
-            <a:r>
-              <a:t>    .m_data    (m_if.data),</a:t>
-            </a:r>
-          </a:p>
-          <a:p>
-            <a:pPr>
-              <a:lnSpc>
-                <a:spcPts val="2200"/>
-              </a:lnSpc>
-              <a:spcAft>
-                <a:spcPts val="400"/>
-              </a:spcAft>
-              <a:defRPr sz="2000" b="0">
-                <a:solidFill>
-                  <a:srgbClr val="333333"/>
-                </a:solidFill>
-                <a:latin typeface="Consolas"/>
-              </a:defRPr>
-            </a:pPr>
-            <a:r>
-              <a:t>    .m_ready   (m_if.ready),</a:t>
-            </a:r>
-          </a:p>
-          <a:p>
-            <a:pPr>
-              <a:lnSpc>
-                <a:spcPts val="2200"/>
-              </a:lnSpc>
-              <a:spcAft>
-                <a:spcPts val="400"/>
-              </a:spcAft>
-              <a:defRPr sz="2000" b="0">
-                <a:solidFill>
-                  <a:srgbClr val="333333"/>
-                </a:solidFill>
-                <a:latin typeface="Consolas"/>
-              </a:defRPr>
-            </a:pPr>
-            <a:r>
-              <a:t>    // status</a:t>
-            </a:r>
-          </a:p>
-          <a:p>
-            <a:pPr>
-              <a:lnSpc>
-                <a:spcPts val="2200"/>
-              </a:lnSpc>
-              <a:spcAft>
-                <a:spcPts val="400"/>
-              </a:spcAft>
-              <a:defRPr sz="2000" b="0">
-                <a:solidFill>
-                  <a:srgbClr val="333333"/>
-                </a:solidFill>
-                <a:latin typeface="Consolas"/>
-              </a:defRPr>
-            </a:pPr>
-            <a:r>
-              <a:t># ...</a:t>
-            </a:r>
-          </a:p>
-        </p:txBody>
-      </p:sp>
-      <p:sp>
-        <p:nvSpPr>
-          <p:cNvPr id="4" name="TextBox 3"/>
           <p:cNvSpPr txBox="1"/>
           <p:nvPr/>
         </p:nvSpPr>
